--- a/Templates/Asset Solution Brief Template.pptx
+++ b/Templates/Asset Solution Brief Template.pptx
@@ -5,15 +5,16 @@
     <p:sldMasterId id="2147483660" r:id="rId1"/>
   </p:sldMasterIdLst>
   <p:notesMasterIdLst>
-    <p:notesMasterId r:id="rId5"/>
+    <p:notesMasterId r:id="rId6"/>
   </p:notesMasterIdLst>
   <p:handoutMasterIdLst>
-    <p:handoutMasterId r:id="rId6"/>
+    <p:handoutMasterId r:id="rId7"/>
   </p:handoutMasterIdLst>
   <p:sldIdLst>
     <p:sldId id="270" r:id="rId2"/>
-    <p:sldId id="268" r:id="rId3"/>
-    <p:sldId id="269" r:id="rId4"/>
+    <p:sldId id="271" r:id="rId3"/>
+    <p:sldId id="268" r:id="rId4"/>
+    <p:sldId id="269" r:id="rId5"/>
   </p:sldIdLst>
   <p:sldSz cx="7772400" cy="10058400"/>
   <p:notesSz cx="6858000" cy="9144000"/>
@@ -238,7 +239,7 @@
           <a:p>
             <a:fld id="{46EA407C-5CB9-47CF-BBBB-3982928850A3}" type="datetimeFigureOut">
               <a:rPr lang="en-US" smtClean="0"/>
-              <a:t>9/23/2026</a:t>
+              <a:t>9/30/2026</a:t>
             </a:fld>
             <a:endParaRPr lang="en-US"/>
           </a:p>
@@ -415,7 +416,7 @@
           <a:p>
             <a:fld id="{CC9BF9C6-C4C5-429D-953C-A412904A62EE}" type="datetimeFigureOut">
               <a:rPr lang="en-US" smtClean="0"/>
-              <a:t>9/23/2026</a:t>
+              <a:t>9/30/2026</a:t>
             </a:fld>
             <a:endParaRPr lang="en-US"/>
           </a:p>
@@ -747,7 +748,7 @@
           <a:p>
             <a:fld id="{5E163197-9E82-4B5A-8180-F90BA4BFB91C}" type="slidenum">
               <a:rPr lang="en-US" smtClean="0"/>
-              <a:t>2</a:t>
+              <a:t>3</a:t>
             </a:fld>
             <a:endParaRPr lang="en-US"/>
           </a:p>
@@ -831,7 +832,7 @@
           <a:p>
             <a:fld id="{5E163197-9E82-4B5A-8180-F90BA4BFB91C}" type="slidenum">
               <a:rPr lang="en-US" smtClean="0"/>
-              <a:t>3</a:t>
+              <a:t>4</a:t>
             </a:fld>
             <a:endParaRPr lang="en-US"/>
           </a:p>
@@ -1358,7 +1359,7 @@
           <a:lstStyle>
             <a:lvl1pPr marL="0" indent="0">
               <a:buNone/>
-              <a:defRPr sz="1400">
+              <a:defRPr sz="1200">
                 <a:latin typeface="IBM Plex Sans" panose="020B0503050203000203" pitchFamily="34" charset="0"/>
               </a:defRPr>
             </a:lvl1pPr>
@@ -2513,7 +2514,7 @@
         <p:spPr>
           <a:xfrm>
             <a:off x="3045486" y="605123"/>
-            <a:ext cx="4439753" cy="553998"/>
+            <a:ext cx="4439753" cy="1259536"/>
           </a:xfrm>
           <a:prstGeom prst="rect">
             <a:avLst/>
@@ -2521,7 +2522,7 @@
         </p:spPr>
         <p:txBody>
           <a:bodyPr lIns="0" tIns="0" rIns="0" bIns="0">
-            <a:spAutoFit/>
+            <a:noAutofit/>
           </a:bodyPr>
           <a:lstStyle>
             <a:lvl1pPr marL="0" indent="0">
@@ -2570,7 +2571,7 @@
         </p:spPr>
         <p:txBody>
           <a:bodyPr lIns="0" tIns="0" rIns="0" bIns="0">
-            <a:spAutoFit/>
+            <a:noAutofit/>
           </a:bodyPr>
           <a:lstStyle>
             <a:lvl1pPr marL="0" indent="0">
@@ -2611,7 +2612,7 @@
         <p:spPr>
           <a:xfrm>
             <a:off x="3045485" y="3779791"/>
-            <a:ext cx="4439751" cy="123111"/>
+            <a:ext cx="4439751" cy="654750"/>
           </a:xfrm>
           <a:prstGeom prst="rect">
             <a:avLst/>
@@ -2619,7 +2620,7 @@
         </p:spPr>
         <p:txBody>
           <a:bodyPr wrap="square" lIns="0" tIns="0" rIns="0" bIns="0">
-            <a:spAutoFit/>
+            <a:noAutofit/>
           </a:bodyPr>
           <a:lstStyle>
             <a:lvl1pPr marL="0" indent="0">
@@ -2842,7 +2843,9 @@
           </a:prstGeom>
         </p:spPr>
         <p:txBody>
-          <a:bodyPr lIns="0" tIns="0" rIns="0" bIns="0"/>
+          <a:bodyPr lIns="0" tIns="0" rIns="0" bIns="0">
+            <a:noAutofit/>
+          </a:bodyPr>
           <a:lstStyle>
             <a:lvl1pPr marL="0" marR="0" indent="0" algn="l" defTabSz="457200" rtl="0" eaLnBrk="1" fontAlgn="auto" latinLnBrk="0" hangingPunct="1">
               <a:lnSpc>
@@ -3119,7 +3122,9 @@
           </a:prstGeom>
         </p:spPr>
         <p:txBody>
-          <a:bodyPr lIns="0" tIns="0" rIns="0" bIns="0"/>
+          <a:bodyPr lIns="0" tIns="0" rIns="0" bIns="0">
+            <a:noAutofit/>
+          </a:bodyPr>
           <a:lstStyle>
             <a:lvl1pPr>
               <a:lnSpc>
@@ -3918,7 +3923,7 @@
         </p:nvGrpSpPr>
         <p:grpSpPr>
           <a:xfrm>
-            <a:off x="382682" y="3296450"/>
+            <a:off x="382682" y="3708826"/>
             <a:ext cx="76200" cy="76200"/>
             <a:chOff x="0" y="0"/>
             <a:chExt cx="76200" cy="76200"/>
@@ -4007,7 +4012,7 @@
         </p:nvSpPr>
         <p:spPr bwMode="auto">
           <a:xfrm>
-            <a:off x="282079" y="3422639"/>
+            <a:off x="282079" y="3799158"/>
             <a:ext cx="2221923" cy="230832"/>
           </a:xfrm>
           <a:prstGeom prst="rect">
@@ -5110,8 +5115,8 @@
         </p:nvSpPr>
         <p:spPr>
           <a:xfrm>
-            <a:off x="3043238" y="3238499"/>
-            <a:ext cx="4422274" cy="276999"/>
+            <a:off x="3043238" y="3704658"/>
+            <a:ext cx="4422274" cy="1065174"/>
           </a:xfrm>
           <a:prstGeom prst="rect">
             <a:avLst/>
@@ -5119,7 +5124,7 @@
         </p:spPr>
         <p:txBody>
           <a:bodyPr lIns="0" tIns="0" rIns="0" bIns="0">
-            <a:spAutoFit/>
+            <a:noAutofit/>
           </a:bodyPr>
           <a:lstStyle>
             <a:lvl1pPr marL="0" indent="0">
@@ -5188,7 +5193,7 @@
         </p:nvSpPr>
         <p:spPr>
           <a:xfrm>
-            <a:off x="3043238" y="4431795"/>
+            <a:off x="3043238" y="4897954"/>
             <a:ext cx="4422274" cy="415498"/>
           </a:xfrm>
           <a:prstGeom prst="rect">
@@ -5197,7 +5202,7 @@
         </p:spPr>
         <p:txBody>
           <a:bodyPr lIns="0" tIns="0" rIns="0" bIns="0">
-            <a:spAutoFit/>
+            <a:noAutofit/>
           </a:bodyPr>
           <a:lstStyle>
             <a:lvl1pPr marL="0" indent="0">
@@ -5243,15 +5248,7 @@
             <a:pPr lvl="0"/>
             <a:r>
               <a:rPr lang="en-US" dirty="0"/>
-              <a:t>What-if statement - an aspirational question that reflects what the asset can help </a:t>
-            </a:r>
-            <a:r>
-              <a:rPr lang="en-US" dirty="0" err="1"/>
-              <a:t>acheive</a:t>
-            </a:r>
-            <a:r>
-              <a:rPr lang="en-US" dirty="0"/>
-              <a:t>. Example: What if you had a team of experts, augmented with advanced AI, to help …</a:t>
+              <a:t>What-if statement - an aspirational question that reflects what the asset can help achieve. Example: What if you had a team of experts, augmented with advanced AI, to help …</a:t>
             </a:r>
           </a:p>
         </p:txBody>
@@ -5274,8 +5271,8 @@
         </p:nvSpPr>
         <p:spPr>
           <a:xfrm>
-            <a:off x="3043238" y="4975415"/>
-            <a:ext cx="4422274" cy="415498"/>
+            <a:off x="3043238" y="5441573"/>
+            <a:ext cx="4422274" cy="1401479"/>
           </a:xfrm>
           <a:prstGeom prst="rect">
             <a:avLst/>
@@ -5283,7 +5280,7 @@
         </p:spPr>
         <p:txBody>
           <a:bodyPr lIns="0" tIns="0" rIns="0" bIns="0">
-            <a:spAutoFit/>
+            <a:noAutofit/>
           </a:bodyPr>
           <a:lstStyle>
             <a:lvl1pPr marL="0" indent="0">
@@ -5351,8 +5348,8 @@
         </p:nvSpPr>
         <p:spPr>
           <a:xfrm>
-            <a:off x="3043238" y="1415471"/>
-            <a:ext cx="4422274" cy="369332"/>
+            <a:off x="3043238" y="1415470"/>
+            <a:ext cx="4422274" cy="708709"/>
           </a:xfrm>
           <a:prstGeom prst="rect">
             <a:avLst/>
@@ -5360,7 +5357,7 @@
         </p:spPr>
         <p:txBody>
           <a:bodyPr lIns="0" tIns="0" rIns="0" bIns="0">
-            <a:spAutoFit/>
+            <a:noAutofit/>
           </a:bodyPr>
           <a:lstStyle>
             <a:lvl1pPr marL="0" indent="0">
@@ -5454,7 +5451,7 @@
         </p:spPr>
         <p:txBody>
           <a:bodyPr wrap="square" lIns="0" tIns="0" rIns="0" bIns="0">
-            <a:spAutoFit/>
+            <a:noAutofit/>
           </a:bodyPr>
           <a:lstStyle>
             <a:lvl1pPr marL="0" indent="0">
@@ -5523,7 +5520,7 @@
         </p:nvSpPr>
         <p:spPr>
           <a:xfrm>
-            <a:off x="382682" y="3743151"/>
+            <a:off x="382682" y="4119670"/>
             <a:ext cx="2057056" cy="415498"/>
           </a:xfrm>
           <a:prstGeom prst="rect">
@@ -5532,7 +5529,7 @@
         </p:spPr>
         <p:txBody>
           <a:bodyPr wrap="square" lIns="0" tIns="0" rIns="0" bIns="0">
-            <a:spAutoFit/>
+            <a:noAutofit/>
           </a:bodyPr>
           <a:lstStyle>
             <a:lvl1pPr marL="0" indent="0">
@@ -5610,7 +5607,7 @@
         </p:spPr>
         <p:txBody>
           <a:bodyPr lIns="0" tIns="0" rIns="0" bIns="0">
-            <a:spAutoFit/>
+            <a:noAutofit/>
           </a:bodyPr>
           <a:lstStyle>
             <a:lvl1pPr marL="0" indent="0">
@@ -5801,7 +5798,7 @@
         <p:spPr>
           <a:xfrm>
             <a:off x="3045486" y="961836"/>
-            <a:ext cx="4439753" cy="138499"/>
+            <a:ext cx="4439753" cy="636639"/>
           </a:xfrm>
           <a:prstGeom prst="rect">
             <a:avLst/>
@@ -5809,7 +5806,7 @@
         </p:spPr>
         <p:txBody>
           <a:bodyPr lIns="0" tIns="0" rIns="0" bIns="0">
-            <a:spAutoFit/>
+            <a:noAutofit/>
           </a:bodyPr>
           <a:lstStyle>
             <a:lvl1pPr marL="0" indent="0">
@@ -5926,7 +5923,7 @@
         <p:spPr>
           <a:xfrm>
             <a:off x="382680" y="961836"/>
-            <a:ext cx="2278457" cy="215444"/>
+            <a:ext cx="2278457" cy="382870"/>
           </a:xfrm>
           <a:prstGeom prst="rect">
             <a:avLst/>
@@ -5934,7 +5931,7 @@
         </p:spPr>
         <p:txBody>
           <a:bodyPr lIns="0" tIns="0" rIns="0" bIns="0">
-            <a:spAutoFit/>
+            <a:noAutofit/>
           </a:bodyPr>
           <a:lstStyle>
             <a:lvl1pPr marL="0" indent="0">
@@ -5974,7 +5971,7 @@
         </p:nvSpPr>
         <p:spPr>
           <a:xfrm>
-            <a:off x="382681" y="2840831"/>
+            <a:off x="382681" y="2858759"/>
             <a:ext cx="429768" cy="429768"/>
           </a:xfrm>
           <a:prstGeom prst="rect">
@@ -6008,7 +6005,7 @@
         <p:spPr>
           <a:xfrm>
             <a:off x="3045486" y="2429659"/>
-            <a:ext cx="4439753" cy="138499"/>
+            <a:ext cx="4439753" cy="636639"/>
           </a:xfrm>
           <a:prstGeom prst="rect">
             <a:avLst/>
@@ -6016,7 +6013,7 @@
         </p:spPr>
         <p:txBody>
           <a:bodyPr lIns="0" tIns="0" rIns="0" bIns="0">
-            <a:spAutoFit/>
+            <a:noAutofit/>
           </a:bodyPr>
           <a:lstStyle>
             <a:lvl1pPr marL="0" indent="0">
@@ -6060,7 +6057,7 @@
         <p:spPr>
           <a:xfrm>
             <a:off x="382680" y="2429659"/>
-            <a:ext cx="2278457" cy="215444"/>
+            <a:ext cx="2278457" cy="382870"/>
           </a:xfrm>
           <a:prstGeom prst="rect">
             <a:avLst/>
@@ -6068,7 +6065,7 @@
         </p:spPr>
         <p:txBody>
           <a:bodyPr lIns="0" tIns="0" rIns="0" bIns="0">
-            <a:spAutoFit/>
+            <a:noAutofit/>
           </a:bodyPr>
           <a:lstStyle>
             <a:lvl1pPr marL="0" indent="0">
@@ -6108,7 +6105,7 @@
         </p:nvSpPr>
         <p:spPr>
           <a:xfrm>
-            <a:off x="382681" y="4288132"/>
+            <a:off x="382681" y="4306060"/>
             <a:ext cx="429768" cy="429768"/>
           </a:xfrm>
           <a:prstGeom prst="rect">
@@ -6142,7 +6139,7 @@
         <p:spPr>
           <a:xfrm>
             <a:off x="3045486" y="3862685"/>
-            <a:ext cx="4439753" cy="138499"/>
+            <a:ext cx="4439753" cy="636639"/>
           </a:xfrm>
           <a:prstGeom prst="rect">
             <a:avLst/>
@@ -6150,7 +6147,7 @@
         </p:spPr>
         <p:txBody>
           <a:bodyPr lIns="0" tIns="0" rIns="0" bIns="0">
-            <a:spAutoFit/>
+            <a:noAutofit/>
           </a:bodyPr>
           <a:lstStyle>
             <a:lvl1pPr marL="0" indent="0">
@@ -6194,7 +6191,7 @@
         <p:spPr>
           <a:xfrm>
             <a:off x="382680" y="3862685"/>
-            <a:ext cx="2278457" cy="215444"/>
+            <a:ext cx="2278457" cy="382870"/>
           </a:xfrm>
           <a:prstGeom prst="rect">
             <a:avLst/>
@@ -6202,7 +6199,7 @@
         </p:spPr>
         <p:txBody>
           <a:bodyPr lIns="0" tIns="0" rIns="0" bIns="0">
-            <a:spAutoFit/>
+            <a:noAutofit/>
           </a:bodyPr>
           <a:lstStyle>
             <a:lvl1pPr marL="0" indent="0">
@@ -6242,7 +6239,7 @@
         </p:nvSpPr>
         <p:spPr>
           <a:xfrm>
-            <a:off x="382681" y="5735432"/>
+            <a:off x="382681" y="5753360"/>
             <a:ext cx="429768" cy="429768"/>
           </a:xfrm>
           <a:prstGeom prst="rect">
@@ -6276,7 +6273,7 @@
         <p:spPr>
           <a:xfrm>
             <a:off x="3045486" y="5309949"/>
-            <a:ext cx="4439753" cy="138499"/>
+            <a:ext cx="4439753" cy="636639"/>
           </a:xfrm>
           <a:prstGeom prst="rect">
             <a:avLst/>
@@ -6284,7 +6281,7 @@
         </p:spPr>
         <p:txBody>
           <a:bodyPr lIns="0" tIns="0" rIns="0" bIns="0">
-            <a:spAutoFit/>
+            <a:noAutofit/>
           </a:bodyPr>
           <a:lstStyle>
             <a:lvl1pPr marL="0" indent="0">
@@ -6328,7 +6325,7 @@
         <p:spPr>
           <a:xfrm>
             <a:off x="382680" y="5309949"/>
-            <a:ext cx="2278457" cy="215444"/>
+            <a:ext cx="2278457" cy="382870"/>
           </a:xfrm>
           <a:prstGeom prst="rect">
             <a:avLst/>
@@ -6336,7 +6333,7 @@
         </p:spPr>
         <p:txBody>
           <a:bodyPr lIns="0" tIns="0" rIns="0" bIns="0">
-            <a:spAutoFit/>
+            <a:noAutofit/>
           </a:bodyPr>
           <a:lstStyle>
             <a:lvl1pPr marL="0" indent="0">
@@ -6376,7 +6373,7 @@
         </p:nvSpPr>
         <p:spPr>
           <a:xfrm>
-            <a:off x="382681" y="7182732"/>
+            <a:off x="382681" y="7200660"/>
             <a:ext cx="429768" cy="429768"/>
           </a:xfrm>
           <a:prstGeom prst="rect">
@@ -6410,7 +6407,7 @@
         <p:spPr>
           <a:xfrm>
             <a:off x="3045486" y="6751038"/>
-            <a:ext cx="4439753" cy="138499"/>
+            <a:ext cx="4439753" cy="636639"/>
           </a:xfrm>
           <a:prstGeom prst="rect">
             <a:avLst/>
@@ -6418,7 +6415,7 @@
         </p:spPr>
         <p:txBody>
           <a:bodyPr lIns="0" tIns="0" rIns="0" bIns="0">
-            <a:spAutoFit/>
+            <a:noAutofit/>
           </a:bodyPr>
           <a:lstStyle>
             <a:lvl1pPr marL="0" indent="0">
@@ -6462,7 +6459,7 @@
         <p:spPr>
           <a:xfrm>
             <a:off x="382680" y="6751038"/>
-            <a:ext cx="2278457" cy="215444"/>
+            <a:ext cx="2278457" cy="382870"/>
           </a:xfrm>
           <a:prstGeom prst="rect">
             <a:avLst/>
@@ -6470,7 +6467,7 @@
         </p:spPr>
         <p:txBody>
           <a:bodyPr lIns="0" tIns="0" rIns="0" bIns="0">
-            <a:spAutoFit/>
+            <a:noAutofit/>
           </a:bodyPr>
           <a:lstStyle>
             <a:lvl1pPr marL="0" indent="0">
@@ -6511,7 +6508,7 @@
         <p:spPr>
           <a:xfrm>
             <a:off x="3045485" y="8412714"/>
-            <a:ext cx="4439753" cy="276999"/>
+            <a:ext cx="4439753" cy="492261"/>
           </a:xfrm>
           <a:prstGeom prst="rect">
             <a:avLst/>
@@ -6519,7 +6516,7 @@
         </p:spPr>
         <p:txBody>
           <a:bodyPr lIns="0" tIns="0" rIns="0" bIns="0">
-            <a:spAutoFit/>
+            <a:noAutofit/>
           </a:bodyPr>
           <a:lstStyle>
             <a:lvl1pPr marL="0" indent="0">
@@ -6615,8 +6612,8 @@
         </p:nvSpPr>
         <p:spPr>
           <a:xfrm>
-            <a:off x="3045484" y="8760318"/>
-            <a:ext cx="4439753" cy="276999"/>
+            <a:off x="3045484" y="8784222"/>
+            <a:ext cx="4439753" cy="492261"/>
           </a:xfrm>
           <a:prstGeom prst="rect">
             <a:avLst/>
@@ -6624,7 +6621,7 @@
         </p:spPr>
         <p:txBody>
           <a:bodyPr lIns="0" tIns="0" rIns="0" bIns="0">
-            <a:spAutoFit/>
+            <a:noAutofit/>
           </a:bodyPr>
           <a:lstStyle>
             <a:lvl1pPr marL="0" indent="0">
@@ -6788,7 +6785,7 @@
         <p:spPr>
           <a:xfrm>
             <a:off x="3045486" y="961836"/>
-            <a:ext cx="4439753" cy="138499"/>
+            <a:ext cx="4439753" cy="669739"/>
           </a:xfrm>
           <a:prstGeom prst="rect">
             <a:avLst/>
@@ -6796,7 +6793,7 @@
         </p:spPr>
         <p:txBody>
           <a:bodyPr lIns="0" tIns="0" rIns="0" bIns="0">
-            <a:spAutoFit/>
+            <a:noAutofit/>
           </a:bodyPr>
           <a:lstStyle>
             <a:lvl1pPr marL="0" indent="0">
@@ -6912,8 +6909,8 @@
         </p:nvSpPr>
         <p:spPr>
           <a:xfrm>
-            <a:off x="382680" y="961836"/>
-            <a:ext cx="2278457" cy="215444"/>
+            <a:off x="382680" y="961835"/>
+            <a:ext cx="2278457" cy="370917"/>
           </a:xfrm>
           <a:prstGeom prst="rect">
             <a:avLst/>
@@ -6921,7 +6918,7 @@
         </p:spPr>
         <p:txBody>
           <a:bodyPr lIns="0" tIns="0" rIns="0" bIns="0">
-            <a:spAutoFit/>
+            <a:noAutofit/>
           </a:bodyPr>
           <a:lstStyle>
             <a:lvl1pPr marL="0" indent="0">
@@ -6995,7 +6992,7 @@
         <p:spPr>
           <a:xfrm>
             <a:off x="3045486" y="2501373"/>
-            <a:ext cx="4439753" cy="138499"/>
+            <a:ext cx="4439753" cy="669739"/>
           </a:xfrm>
           <a:prstGeom prst="rect">
             <a:avLst/>
@@ -7003,7 +7000,7 @@
         </p:spPr>
         <p:txBody>
           <a:bodyPr lIns="0" tIns="0" rIns="0" bIns="0">
-            <a:spAutoFit/>
+            <a:noAutofit/>
           </a:bodyPr>
           <a:lstStyle>
             <a:lvl1pPr marL="0" indent="0">
@@ -7046,8 +7043,8 @@
         </p:nvSpPr>
         <p:spPr>
           <a:xfrm>
-            <a:off x="382680" y="2501373"/>
-            <a:ext cx="2278457" cy="215444"/>
+            <a:off x="382680" y="2501372"/>
+            <a:ext cx="2278457" cy="370917"/>
           </a:xfrm>
           <a:prstGeom prst="rect">
             <a:avLst/>
@@ -7055,7 +7052,7 @@
         </p:spPr>
         <p:txBody>
           <a:bodyPr lIns="0" tIns="0" rIns="0" bIns="0">
-            <a:spAutoFit/>
+            <a:noAutofit/>
           </a:bodyPr>
           <a:lstStyle>
             <a:lvl1pPr marL="0" indent="0">
@@ -7129,7 +7126,7 @@
         <p:spPr>
           <a:xfrm>
             <a:off x="3045486" y="4000136"/>
-            <a:ext cx="4439753" cy="138499"/>
+            <a:ext cx="4439753" cy="669739"/>
           </a:xfrm>
           <a:prstGeom prst="rect">
             <a:avLst/>
@@ -7137,7 +7134,7 @@
         </p:spPr>
         <p:txBody>
           <a:bodyPr lIns="0" tIns="0" rIns="0" bIns="0">
-            <a:spAutoFit/>
+            <a:noAutofit/>
           </a:bodyPr>
           <a:lstStyle>
             <a:lvl1pPr marL="0" indent="0">
@@ -7180,8 +7177,8 @@
         </p:nvSpPr>
         <p:spPr>
           <a:xfrm>
-            <a:off x="382680" y="4000136"/>
-            <a:ext cx="2278457" cy="215444"/>
+            <a:off x="382680" y="4000135"/>
+            <a:ext cx="2278457" cy="370917"/>
           </a:xfrm>
           <a:prstGeom prst="rect">
             <a:avLst/>
@@ -7189,7 +7186,7 @@
         </p:spPr>
         <p:txBody>
           <a:bodyPr lIns="0" tIns="0" rIns="0" bIns="0">
-            <a:spAutoFit/>
+            <a:noAutofit/>
           </a:bodyPr>
           <a:lstStyle>
             <a:lvl1pPr marL="0" indent="0">
@@ -7263,7 +7260,7 @@
         <p:spPr>
           <a:xfrm>
             <a:off x="3045486" y="5519114"/>
-            <a:ext cx="4439753" cy="138499"/>
+            <a:ext cx="4439753" cy="669739"/>
           </a:xfrm>
           <a:prstGeom prst="rect">
             <a:avLst/>
@@ -7271,7 +7268,7 @@
         </p:spPr>
         <p:txBody>
           <a:bodyPr lIns="0" tIns="0" rIns="0" bIns="0">
-            <a:spAutoFit/>
+            <a:noAutofit/>
           </a:bodyPr>
           <a:lstStyle>
             <a:lvl1pPr marL="0" indent="0">
@@ -7314,8 +7311,8 @@
         </p:nvSpPr>
         <p:spPr>
           <a:xfrm>
-            <a:off x="382680" y="5519114"/>
-            <a:ext cx="2278457" cy="215444"/>
+            <a:off x="382680" y="5519113"/>
+            <a:ext cx="2278457" cy="370917"/>
           </a:xfrm>
           <a:prstGeom prst="rect">
             <a:avLst/>
@@ -7323,7 +7320,7 @@
         </p:spPr>
         <p:txBody>
           <a:bodyPr lIns="0" tIns="0" rIns="0" bIns="0">
-            <a:spAutoFit/>
+            <a:noAutofit/>
           </a:bodyPr>
           <a:lstStyle>
             <a:lvl1pPr marL="0" indent="0">
@@ -7405,7 +7402,7 @@
         <p:spPr>
           <a:xfrm>
             <a:off x="3045485" y="7552105"/>
-            <a:ext cx="4439753" cy="276999"/>
+            <a:ext cx="4439753" cy="476893"/>
           </a:xfrm>
           <a:prstGeom prst="rect">
             <a:avLst/>
@@ -7413,7 +7410,7 @@
         </p:spPr>
         <p:txBody>
           <a:bodyPr lIns="0" tIns="0" rIns="0" bIns="0">
-            <a:spAutoFit/>
+            <a:noAutofit/>
           </a:bodyPr>
           <a:lstStyle>
             <a:lvl1pPr marL="0" indent="0">
@@ -7467,8 +7464,8 @@
         </p:nvSpPr>
         <p:spPr>
           <a:xfrm>
-            <a:off x="3045484" y="7899709"/>
-            <a:ext cx="4439753" cy="276999"/>
+            <a:off x="3045484" y="7917637"/>
+            <a:ext cx="4439753" cy="476893"/>
           </a:xfrm>
           <a:prstGeom prst="rect">
             <a:avLst/>
@@ -7476,7 +7473,7 @@
         </p:spPr>
         <p:txBody>
           <a:bodyPr lIns="0" tIns="0" rIns="0" bIns="0">
-            <a:spAutoFit/>
+            <a:noAutofit/>
           </a:bodyPr>
           <a:lstStyle>
             <a:lvl1pPr marL="0" indent="0">
@@ -7572,7 +7569,9 @@
           </a:prstGeom>
         </p:spPr>
         <p:txBody>
-          <a:bodyPr/>
+          <a:bodyPr>
+            <a:noAutofit/>
+          </a:bodyPr>
           <a:lstStyle>
             <a:lvl1pPr marL="0" indent="0">
               <a:buNone/>
@@ -7640,7 +7639,7 @@
         </p:spPr>
         <p:txBody>
           <a:bodyPr>
-            <a:spAutoFit/>
+            <a:noAutofit/>
           </a:bodyPr>
           <a:lstStyle>
             <a:lvl1pPr marL="0" indent="0">
@@ -7716,7 +7715,7 @@
         </p:spPr>
         <p:txBody>
           <a:bodyPr>
-            <a:spAutoFit/>
+            <a:noAutofit/>
           </a:bodyPr>
           <a:lstStyle>
             <a:lvl1pPr marL="0" indent="0">
@@ -7784,7 +7783,7 @@
         <p:spPr>
           <a:xfrm>
             <a:off x="2976562" y="1487459"/>
-            <a:ext cx="4500003" cy="230832"/>
+            <a:ext cx="4500003" cy="761386"/>
           </a:xfrm>
           <a:prstGeom prst="rect">
             <a:avLst/>
@@ -7792,7 +7791,7 @@
         </p:spPr>
         <p:txBody>
           <a:bodyPr>
-            <a:spAutoFit/>
+            <a:noAutofit/>
           </a:bodyPr>
           <a:lstStyle>
             <a:lvl1pPr marL="0" indent="0">
@@ -7859,8 +7858,8 @@
         </p:nvSpPr>
         <p:spPr>
           <a:xfrm>
-            <a:off x="322920" y="1529036"/>
-            <a:ext cx="2055720" cy="216982"/>
+            <a:off x="322920" y="1529035"/>
+            <a:ext cx="2055720" cy="468211"/>
           </a:xfrm>
           <a:prstGeom prst="rect">
             <a:avLst/>
@@ -7868,7 +7867,7 @@
         </p:spPr>
         <p:txBody>
           <a:bodyPr>
-            <a:spAutoFit/>
+            <a:noAutofit/>
           </a:bodyPr>
           <a:lstStyle>
             <a:lvl1pPr marL="0" indent="0">
@@ -7937,7 +7936,9 @@
           </a:prstGeom>
         </p:spPr>
         <p:txBody>
-          <a:bodyPr/>
+          <a:bodyPr>
+            <a:noAutofit/>
+          </a:bodyPr>
           <a:lstStyle>
             <a:lvl1pPr marL="0" indent="0">
               <a:buNone/>
@@ -7996,8 +7997,8 @@
         </p:nvSpPr>
         <p:spPr>
           <a:xfrm>
-            <a:off x="322917" y="2697718"/>
-            <a:ext cx="2055720" cy="216982"/>
+            <a:off x="322917" y="2697717"/>
+            <a:ext cx="2055720" cy="468211"/>
           </a:xfrm>
           <a:prstGeom prst="rect">
             <a:avLst/>
@@ -8005,7 +8006,7 @@
         </p:spPr>
         <p:txBody>
           <a:bodyPr>
-            <a:spAutoFit/>
+            <a:noAutofit/>
           </a:bodyPr>
           <a:lstStyle>
             <a:lvl1pPr marL="0" indent="0">
@@ -8074,7 +8075,9 @@
           </a:prstGeom>
         </p:spPr>
         <p:txBody>
-          <a:bodyPr/>
+          <a:bodyPr>
+            <a:noAutofit/>
+          </a:bodyPr>
           <a:lstStyle>
             <a:lvl1pPr marL="0" indent="0">
               <a:buNone/>
@@ -8133,8 +8136,8 @@
         </p:nvSpPr>
         <p:spPr>
           <a:xfrm>
-            <a:off x="322914" y="3866118"/>
-            <a:ext cx="2055720" cy="216982"/>
+            <a:off x="322914" y="3866117"/>
+            <a:ext cx="2055720" cy="468211"/>
           </a:xfrm>
           <a:prstGeom prst="rect">
             <a:avLst/>
@@ -8142,7 +8145,7 @@
         </p:spPr>
         <p:txBody>
           <a:bodyPr>
-            <a:spAutoFit/>
+            <a:noAutofit/>
           </a:bodyPr>
           <a:lstStyle>
             <a:lvl1pPr marL="0" indent="0">
@@ -8211,7 +8214,9 @@
           </a:prstGeom>
         </p:spPr>
         <p:txBody>
-          <a:bodyPr/>
+          <a:bodyPr>
+            <a:noAutofit/>
+          </a:bodyPr>
           <a:lstStyle>
             <a:lvl1pPr marL="0" indent="0">
               <a:buNone/>
@@ -8270,8 +8275,8 @@
         </p:nvSpPr>
         <p:spPr>
           <a:xfrm>
-            <a:off x="322911" y="5034518"/>
-            <a:ext cx="2055720" cy="216982"/>
+            <a:off x="322911" y="5034517"/>
+            <a:ext cx="2055720" cy="468211"/>
           </a:xfrm>
           <a:prstGeom prst="rect">
             <a:avLst/>
@@ -8279,7 +8284,7 @@
         </p:spPr>
         <p:txBody>
           <a:bodyPr>
-            <a:spAutoFit/>
+            <a:noAutofit/>
           </a:bodyPr>
           <a:lstStyle>
             <a:lvl1pPr marL="0" indent="0">
@@ -8340,7 +8345,7 @@
         </p:nvSpPr>
         <p:spPr>
           <a:xfrm>
-            <a:off x="2976562" y="2700359"/>
+            <a:off x="2976562" y="2670479"/>
             <a:ext cx="4500003" cy="261610"/>
           </a:xfrm>
           <a:prstGeom prst="rect">
@@ -8349,7 +8354,7 @@
         </p:spPr>
         <p:txBody>
           <a:bodyPr>
-            <a:spAutoFit/>
+            <a:noAutofit/>
           </a:bodyPr>
           <a:lstStyle>
             <a:lvl1pPr marL="0" indent="0">
@@ -8416,7 +8421,7 @@
         </p:nvSpPr>
         <p:spPr>
           <a:xfrm>
-            <a:off x="2976562" y="2969302"/>
+            <a:off x="2976562" y="2939422"/>
             <a:ext cx="4500003" cy="261610"/>
           </a:xfrm>
           <a:prstGeom prst="rect">
@@ -8425,7 +8430,7 @@
         </p:spPr>
         <p:txBody>
           <a:bodyPr>
-            <a:spAutoFit/>
+            <a:noAutofit/>
           </a:bodyPr>
           <a:lstStyle>
             <a:lvl1pPr marL="0" indent="0">
@@ -8492,8 +8497,8 @@
         </p:nvSpPr>
         <p:spPr>
           <a:xfrm>
-            <a:off x="2976562" y="3238245"/>
-            <a:ext cx="4500003" cy="230832"/>
+            <a:off x="2976562" y="3208365"/>
+            <a:ext cx="4500003" cy="761386"/>
           </a:xfrm>
           <a:prstGeom prst="rect">
             <a:avLst/>
@@ -8501,7 +8506,7 @@
         </p:spPr>
         <p:txBody>
           <a:bodyPr>
-            <a:spAutoFit/>
+            <a:noAutofit/>
           </a:bodyPr>
           <a:lstStyle>
             <a:lvl1pPr marL="0" indent="0">
@@ -8568,7 +8573,7 @@
         </p:nvSpPr>
         <p:spPr>
           <a:xfrm>
-            <a:off x="2976562" y="4460436"/>
+            <a:off x="2976562" y="4400676"/>
             <a:ext cx="4500003" cy="261610"/>
           </a:xfrm>
           <a:prstGeom prst="rect">
@@ -8577,7 +8582,7 @@
         </p:spPr>
         <p:txBody>
           <a:bodyPr>
-            <a:spAutoFit/>
+            <a:noAutofit/>
           </a:bodyPr>
           <a:lstStyle>
             <a:lvl1pPr marL="0" indent="0">
@@ -8644,7 +8649,7 @@
         </p:nvSpPr>
         <p:spPr>
           <a:xfrm>
-            <a:off x="2976562" y="4729379"/>
+            <a:off x="2976562" y="4669619"/>
             <a:ext cx="4500003" cy="261610"/>
           </a:xfrm>
           <a:prstGeom prst="rect">
@@ -8653,7 +8658,7 @@
         </p:spPr>
         <p:txBody>
           <a:bodyPr>
-            <a:spAutoFit/>
+            <a:noAutofit/>
           </a:bodyPr>
           <a:lstStyle>
             <a:lvl1pPr marL="0" indent="0">
@@ -8720,8 +8725,8 @@
         </p:nvSpPr>
         <p:spPr>
           <a:xfrm>
-            <a:off x="2976562" y="4998322"/>
-            <a:ext cx="4500003" cy="230832"/>
+            <a:off x="2976562" y="4938562"/>
+            <a:ext cx="4500003" cy="761386"/>
           </a:xfrm>
           <a:prstGeom prst="rect">
             <a:avLst/>
@@ -8729,7 +8734,7 @@
         </p:spPr>
         <p:txBody>
           <a:bodyPr>
-            <a:spAutoFit/>
+            <a:noAutofit/>
           </a:bodyPr>
           <a:lstStyle>
             <a:lvl1pPr marL="0" indent="0">
@@ -8796,7 +8801,7 @@
         </p:nvSpPr>
         <p:spPr>
           <a:xfrm>
-            <a:off x="2976562" y="6214536"/>
+            <a:off x="2976562" y="6124896"/>
             <a:ext cx="4500003" cy="261610"/>
           </a:xfrm>
           <a:prstGeom prst="rect">
@@ -8805,7 +8810,7 @@
         </p:spPr>
         <p:txBody>
           <a:bodyPr>
-            <a:spAutoFit/>
+            <a:noAutofit/>
           </a:bodyPr>
           <a:lstStyle>
             <a:lvl1pPr marL="0" indent="0">
@@ -8872,7 +8877,7 @@
         </p:nvSpPr>
         <p:spPr>
           <a:xfrm>
-            <a:off x="2976562" y="6483479"/>
+            <a:off x="2976562" y="6393839"/>
             <a:ext cx="4500003" cy="261610"/>
           </a:xfrm>
           <a:prstGeom prst="rect">
@@ -8881,7 +8886,7 @@
         </p:spPr>
         <p:txBody>
           <a:bodyPr>
-            <a:spAutoFit/>
+            <a:noAutofit/>
           </a:bodyPr>
           <a:lstStyle>
             <a:lvl1pPr marL="0" indent="0">
@@ -8948,8 +8953,8 @@
         </p:nvSpPr>
         <p:spPr>
           <a:xfrm>
-            <a:off x="2976562" y="6752422"/>
-            <a:ext cx="4500003" cy="230832"/>
+            <a:off x="2976562" y="6662782"/>
+            <a:ext cx="4500003" cy="761386"/>
           </a:xfrm>
           <a:prstGeom prst="rect">
             <a:avLst/>
@@ -8957,7 +8962,7 @@
         </p:spPr>
         <p:txBody>
           <a:bodyPr>
-            <a:spAutoFit/>
+            <a:noAutofit/>
           </a:bodyPr>
           <a:lstStyle>
             <a:lvl1pPr marL="0" indent="0">
@@ -9024,7 +9029,7 @@
         </p:nvSpPr>
         <p:spPr>
           <a:xfrm>
-            <a:off x="2976562" y="7980590"/>
+            <a:off x="2976562" y="7855094"/>
             <a:ext cx="4500003" cy="261610"/>
           </a:xfrm>
           <a:prstGeom prst="rect">
@@ -9033,7 +9038,7 @@
         </p:spPr>
         <p:txBody>
           <a:bodyPr>
-            <a:spAutoFit/>
+            <a:noAutofit/>
           </a:bodyPr>
           <a:lstStyle>
             <a:lvl1pPr marL="0" indent="0">
@@ -9100,7 +9105,7 @@
         </p:nvSpPr>
         <p:spPr>
           <a:xfrm>
-            <a:off x="2976562" y="8249533"/>
+            <a:off x="2976562" y="8124037"/>
             <a:ext cx="4500003" cy="261610"/>
           </a:xfrm>
           <a:prstGeom prst="rect">
@@ -9109,7 +9114,7 @@
         </p:spPr>
         <p:txBody>
           <a:bodyPr>
-            <a:spAutoFit/>
+            <a:noAutofit/>
           </a:bodyPr>
           <a:lstStyle>
             <a:lvl1pPr marL="0" indent="0">
@@ -9176,8 +9181,8 @@
         </p:nvSpPr>
         <p:spPr>
           <a:xfrm>
-            <a:off x="2976562" y="8518476"/>
-            <a:ext cx="4500003" cy="230832"/>
+            <a:off x="2976562" y="8392980"/>
+            <a:ext cx="4500003" cy="761386"/>
           </a:xfrm>
           <a:prstGeom prst="rect">
             <a:avLst/>
@@ -9185,7 +9190,7 @@
         </p:spPr>
         <p:txBody>
           <a:bodyPr>
-            <a:spAutoFit/>
+            <a:noAutofit/>
           </a:bodyPr>
           <a:lstStyle>
             <a:lvl1pPr marL="0" indent="0">
@@ -9406,7 +9411,7 @@
         </p:spPr>
         <p:txBody>
           <a:bodyPr>
-            <a:spAutoFit/>
+            <a:noAutofit/>
           </a:bodyPr>
           <a:lstStyle>
             <a:lvl1pPr marL="0" indent="0">
@@ -9482,7 +9487,7 @@
         </p:spPr>
         <p:txBody>
           <a:bodyPr>
-            <a:spAutoFit/>
+            <a:noAutofit/>
           </a:bodyPr>
           <a:lstStyle>
             <a:lvl1pPr marL="0" indent="0">
@@ -9550,7 +9555,7 @@
         <p:spPr>
           <a:xfrm>
             <a:off x="2976562" y="1039254"/>
-            <a:ext cx="4500003" cy="230832"/>
+            <a:ext cx="4500003" cy="786884"/>
           </a:xfrm>
           <a:prstGeom prst="rect">
             <a:avLst/>
@@ -9558,7 +9563,7 @@
         </p:spPr>
         <p:txBody>
           <a:bodyPr>
-            <a:spAutoFit/>
+            <a:noAutofit/>
           </a:bodyPr>
           <a:lstStyle>
             <a:lvl1pPr marL="0" indent="0">
@@ -9625,7 +9630,7 @@
         </p:nvSpPr>
         <p:spPr>
           <a:xfrm>
-            <a:off x="2976562" y="2353748"/>
+            <a:off x="2976562" y="2323868"/>
             <a:ext cx="4500003" cy="261610"/>
           </a:xfrm>
           <a:prstGeom prst="rect">
@@ -9634,7 +9639,7 @@
         </p:spPr>
         <p:txBody>
           <a:bodyPr>
-            <a:spAutoFit/>
+            <a:noAutofit/>
           </a:bodyPr>
           <a:lstStyle>
             <a:lvl1pPr marL="0" indent="0">
@@ -9701,7 +9706,7 @@
         </p:nvSpPr>
         <p:spPr>
           <a:xfrm>
-            <a:off x="2976562" y="2622691"/>
+            <a:off x="2976562" y="2592811"/>
             <a:ext cx="4500003" cy="261610"/>
           </a:xfrm>
           <a:prstGeom prst="rect">
@@ -9710,7 +9715,7 @@
         </p:spPr>
         <p:txBody>
           <a:bodyPr>
-            <a:spAutoFit/>
+            <a:noAutofit/>
           </a:bodyPr>
           <a:lstStyle>
             <a:lvl1pPr marL="0" indent="0">
@@ -9777,8 +9782,8 @@
         </p:nvSpPr>
         <p:spPr>
           <a:xfrm>
-            <a:off x="2976562" y="2891634"/>
-            <a:ext cx="4500003" cy="230832"/>
+            <a:off x="2976562" y="2861754"/>
+            <a:ext cx="4500003" cy="786884"/>
           </a:xfrm>
           <a:prstGeom prst="rect">
             <a:avLst/>
@@ -9786,7 +9791,7 @@
         </p:spPr>
         <p:txBody>
           <a:bodyPr>
-            <a:spAutoFit/>
+            <a:noAutofit/>
           </a:bodyPr>
           <a:lstStyle>
             <a:lvl1pPr marL="0" indent="0">
@@ -9853,7 +9858,7 @@
         </p:nvSpPr>
         <p:spPr>
           <a:xfrm>
-            <a:off x="2976562" y="4209442"/>
+            <a:off x="2976562" y="4149682"/>
             <a:ext cx="4500003" cy="261610"/>
           </a:xfrm>
           <a:prstGeom prst="rect">
@@ -9862,7 +9867,7 @@
         </p:spPr>
         <p:txBody>
           <a:bodyPr>
-            <a:spAutoFit/>
+            <a:noAutofit/>
           </a:bodyPr>
           <a:lstStyle>
             <a:lvl1pPr marL="0" indent="0">
@@ -9929,7 +9934,7 @@
         </p:nvSpPr>
         <p:spPr>
           <a:xfrm>
-            <a:off x="2976562" y="4478385"/>
+            <a:off x="2976562" y="4418625"/>
             <a:ext cx="4500003" cy="261610"/>
           </a:xfrm>
           <a:prstGeom prst="rect">
@@ -9938,7 +9943,7 @@
         </p:spPr>
         <p:txBody>
           <a:bodyPr>
-            <a:spAutoFit/>
+            <a:noAutofit/>
           </a:bodyPr>
           <a:lstStyle>
             <a:lvl1pPr marL="0" indent="0">
@@ -10005,8 +10010,8 @@
         </p:nvSpPr>
         <p:spPr>
           <a:xfrm>
-            <a:off x="2976562" y="4747328"/>
-            <a:ext cx="4500003" cy="230832"/>
+            <a:off x="2976562" y="4687568"/>
+            <a:ext cx="4500003" cy="786884"/>
           </a:xfrm>
           <a:prstGeom prst="rect">
             <a:avLst/>
@@ -10014,7 +10019,7 @@
         </p:spPr>
         <p:txBody>
           <a:bodyPr>
-            <a:spAutoFit/>
+            <a:noAutofit/>
           </a:bodyPr>
           <a:lstStyle>
             <a:lvl1pPr marL="0" indent="0">
@@ -10081,7 +10086,7 @@
         </p:nvSpPr>
         <p:spPr>
           <a:xfrm>
-            <a:off x="2976562" y="6065136"/>
+            <a:off x="2976562" y="5975496"/>
             <a:ext cx="4500003" cy="261610"/>
           </a:xfrm>
           <a:prstGeom prst="rect">
@@ -10090,7 +10095,7 @@
         </p:spPr>
         <p:txBody>
           <a:bodyPr>
-            <a:spAutoFit/>
+            <a:noAutofit/>
           </a:bodyPr>
           <a:lstStyle>
             <a:lvl1pPr marL="0" indent="0">
@@ -10157,7 +10162,7 @@
         </p:nvSpPr>
         <p:spPr>
           <a:xfrm>
-            <a:off x="2976562" y="6334079"/>
+            <a:off x="2976562" y="6244439"/>
             <a:ext cx="4500003" cy="261610"/>
           </a:xfrm>
           <a:prstGeom prst="rect">
@@ -10166,7 +10171,7 @@
         </p:spPr>
         <p:txBody>
           <a:bodyPr>
-            <a:spAutoFit/>
+            <a:noAutofit/>
           </a:bodyPr>
           <a:lstStyle>
             <a:lvl1pPr marL="0" indent="0">
@@ -10233,8 +10238,8 @@
         </p:nvSpPr>
         <p:spPr>
           <a:xfrm>
-            <a:off x="2976562" y="6603022"/>
-            <a:ext cx="4500003" cy="230832"/>
+            <a:off x="2976562" y="6513382"/>
+            <a:ext cx="4500003" cy="786884"/>
           </a:xfrm>
           <a:prstGeom prst="rect">
             <a:avLst/>
@@ -10242,7 +10247,7 @@
         </p:spPr>
         <p:txBody>
           <a:bodyPr>
-            <a:spAutoFit/>
+            <a:noAutofit/>
           </a:bodyPr>
           <a:lstStyle>
             <a:lvl1pPr marL="0" indent="0">
@@ -10309,7 +10314,7 @@
         </p:nvSpPr>
         <p:spPr>
           <a:xfrm>
-            <a:off x="2976562" y="7920830"/>
+            <a:off x="2976562" y="7801310"/>
             <a:ext cx="4500003" cy="261610"/>
           </a:xfrm>
           <a:prstGeom prst="rect">
@@ -10318,7 +10323,7 @@
         </p:spPr>
         <p:txBody>
           <a:bodyPr>
-            <a:spAutoFit/>
+            <a:noAutofit/>
           </a:bodyPr>
           <a:lstStyle>
             <a:lvl1pPr marL="0" indent="0">
@@ -10385,7 +10390,7 @@
         </p:nvSpPr>
         <p:spPr>
           <a:xfrm>
-            <a:off x="2976562" y="8189773"/>
+            <a:off x="2976562" y="8070253"/>
             <a:ext cx="4500003" cy="261610"/>
           </a:xfrm>
           <a:prstGeom prst="rect">
@@ -10394,7 +10399,7 @@
         </p:spPr>
         <p:txBody>
           <a:bodyPr>
-            <a:spAutoFit/>
+            <a:noAutofit/>
           </a:bodyPr>
           <a:lstStyle>
             <a:lvl1pPr marL="0" indent="0">
@@ -10461,8 +10466,8 @@
         </p:nvSpPr>
         <p:spPr>
           <a:xfrm>
-            <a:off x="2976562" y="8458716"/>
-            <a:ext cx="4500003" cy="230832"/>
+            <a:off x="2976562" y="8339196"/>
+            <a:ext cx="4500003" cy="786884"/>
           </a:xfrm>
           <a:prstGeom prst="rect">
             <a:avLst/>
@@ -10470,7 +10475,7 @@
         </p:spPr>
         <p:txBody>
           <a:bodyPr>
-            <a:spAutoFit/>
+            <a:noAutofit/>
           </a:bodyPr>
           <a:lstStyle>
             <a:lvl1pPr marL="0" indent="0">
@@ -10691,7 +10696,7 @@
         </p:spPr>
         <p:txBody>
           <a:bodyPr>
-            <a:spAutoFit/>
+            <a:noAutofit/>
           </a:bodyPr>
           <a:lstStyle>
             <a:lvl1pPr marL="0" indent="0">
@@ -10767,7 +10772,7 @@
         </p:spPr>
         <p:txBody>
           <a:bodyPr>
-            <a:spAutoFit/>
+            <a:noAutofit/>
           </a:bodyPr>
           <a:lstStyle>
             <a:lvl1pPr marL="0" indent="0">
@@ -10835,7 +10840,7 @@
         <p:spPr>
           <a:xfrm>
             <a:off x="3430494" y="1487473"/>
-            <a:ext cx="4046071" cy="230832"/>
+            <a:ext cx="4046071" cy="962222"/>
           </a:xfrm>
           <a:prstGeom prst="rect">
             <a:avLst/>
@@ -10843,7 +10848,7 @@
         </p:spPr>
         <p:txBody>
           <a:bodyPr>
-            <a:spAutoFit/>
+            <a:noAutofit/>
           </a:bodyPr>
           <a:lstStyle>
             <a:lvl1pPr marL="0" indent="0">
@@ -10992,7 +10997,7 @@
         </p:spPr>
         <p:txBody>
           <a:bodyPr>
-            <a:spAutoFit/>
+            <a:noAutofit/>
           </a:bodyPr>
           <a:lstStyle>
             <a:lvl1pPr marL="0" indent="0">
@@ -11068,7 +11073,7 @@
         </p:spPr>
         <p:txBody>
           <a:bodyPr>
-            <a:spAutoFit/>
+            <a:noAutofit/>
           </a:bodyPr>
           <a:lstStyle>
             <a:lvl1pPr marL="0" indent="0">
@@ -11136,7 +11141,7 @@
         <p:spPr>
           <a:xfrm>
             <a:off x="3430494" y="3560224"/>
-            <a:ext cx="4046071" cy="230832"/>
+            <a:ext cx="4046071" cy="962222"/>
           </a:xfrm>
           <a:prstGeom prst="rect">
             <a:avLst/>
@@ -11144,7 +11149,7 @@
         </p:spPr>
         <p:txBody>
           <a:bodyPr>
-            <a:spAutoFit/>
+            <a:noAutofit/>
           </a:bodyPr>
           <a:lstStyle>
             <a:lvl1pPr marL="0" indent="0">
@@ -11220,7 +11225,7 @@
         </p:spPr>
         <p:txBody>
           <a:bodyPr>
-            <a:spAutoFit/>
+            <a:noAutofit/>
           </a:bodyPr>
           <a:lstStyle>
             <a:lvl1pPr marL="0" indent="0">
@@ -11296,7 +11301,7 @@
         </p:spPr>
         <p:txBody>
           <a:bodyPr>
-            <a:spAutoFit/>
+            <a:noAutofit/>
           </a:bodyPr>
           <a:lstStyle>
             <a:lvl1pPr marL="0" indent="0">
@@ -11364,7 +11369,7 @@
         <p:spPr>
           <a:xfrm>
             <a:off x="3424518" y="5650860"/>
-            <a:ext cx="4046071" cy="230832"/>
+            <a:ext cx="4046071" cy="962222"/>
           </a:xfrm>
           <a:prstGeom prst="rect">
             <a:avLst/>
@@ -11372,7 +11377,7 @@
         </p:spPr>
         <p:txBody>
           <a:bodyPr>
-            <a:spAutoFit/>
+            <a:noAutofit/>
           </a:bodyPr>
           <a:lstStyle>
             <a:lvl1pPr marL="0" indent="0">
@@ -11448,7 +11453,7 @@
         </p:spPr>
         <p:txBody>
           <a:bodyPr>
-            <a:spAutoFit/>
+            <a:noAutofit/>
           </a:bodyPr>
           <a:lstStyle>
             <a:lvl1pPr marL="0" indent="0">
@@ -11524,7 +11529,7 @@
         </p:spPr>
         <p:txBody>
           <a:bodyPr>
-            <a:spAutoFit/>
+            <a:noAutofit/>
           </a:bodyPr>
           <a:lstStyle>
             <a:lvl1pPr marL="0" indent="0">
@@ -11592,7 +11597,7 @@
         <p:spPr>
           <a:xfrm>
             <a:off x="3424518" y="7723611"/>
-            <a:ext cx="4046071" cy="230832"/>
+            <a:ext cx="4046071" cy="962222"/>
           </a:xfrm>
           <a:prstGeom prst="rect">
             <a:avLst/>
@@ -11600,7 +11605,7 @@
         </p:spPr>
         <p:txBody>
           <a:bodyPr>
-            <a:spAutoFit/>
+            <a:noAutofit/>
           </a:bodyPr>
           <a:lstStyle>
             <a:lvl1pPr marL="0" indent="0">
@@ -11875,7 +11880,7 @@
         </p:spPr>
         <p:txBody>
           <a:bodyPr>
-            <a:spAutoFit/>
+            <a:noAutofit/>
           </a:bodyPr>
           <a:lstStyle>
             <a:lvl1pPr marL="0" indent="0">
@@ -11943,7 +11948,7 @@
         <p:spPr>
           <a:xfrm>
             <a:off x="352613" y="1253737"/>
-            <a:ext cx="3281082" cy="261610"/>
+            <a:ext cx="3281082" cy="420858"/>
           </a:xfrm>
           <a:prstGeom prst="rect">
             <a:avLst/>
@@ -11951,7 +11956,7 @@
         </p:spPr>
         <p:txBody>
           <a:bodyPr>
-            <a:spAutoFit/>
+            <a:noAutofit/>
           </a:bodyPr>
           <a:lstStyle>
             <a:lvl1pPr marL="0" indent="0">
@@ -12018,8 +12023,8 @@
         </p:nvSpPr>
         <p:spPr>
           <a:xfrm>
-            <a:off x="352611" y="3955851"/>
-            <a:ext cx="3281082" cy="230832"/>
+            <a:off x="352611" y="4063419"/>
+            <a:ext cx="3281082" cy="987882"/>
           </a:xfrm>
           <a:prstGeom prst="rect">
             <a:avLst/>
@@ -12027,7 +12032,7 @@
         </p:spPr>
         <p:txBody>
           <a:bodyPr>
-            <a:spAutoFit/>
+            <a:noAutofit/>
           </a:bodyPr>
           <a:lstStyle>
             <a:lvl1pPr marL="0" indent="0">
@@ -12204,7 +12209,7 @@
         </p:nvSpPr>
         <p:spPr>
           <a:xfrm>
-            <a:off x="352612" y="1678816"/>
+            <a:off x="352612" y="1786384"/>
             <a:ext cx="3281082" cy="2104290"/>
           </a:xfrm>
           <a:prstGeom prst="rect">
@@ -12246,7 +12251,7 @@
         </p:spPr>
         <p:txBody>
           <a:bodyPr>
-            <a:spAutoFit/>
+            <a:noAutofit/>
           </a:bodyPr>
           <a:lstStyle>
             <a:lvl1pPr marL="0" indent="0">
@@ -12314,7 +12319,7 @@
         <p:spPr>
           <a:xfrm>
             <a:off x="4138705" y="1253737"/>
-            <a:ext cx="3281082" cy="261610"/>
+            <a:ext cx="3281082" cy="420858"/>
           </a:xfrm>
           <a:prstGeom prst="rect">
             <a:avLst/>
@@ -12322,7 +12327,7 @@
         </p:spPr>
         <p:txBody>
           <a:bodyPr>
-            <a:spAutoFit/>
+            <a:noAutofit/>
           </a:bodyPr>
           <a:lstStyle>
             <a:lvl1pPr marL="0" indent="0">
@@ -12389,8 +12394,8 @@
         </p:nvSpPr>
         <p:spPr>
           <a:xfrm>
-            <a:off x="4138703" y="3955851"/>
-            <a:ext cx="3281082" cy="230832"/>
+            <a:off x="4138703" y="4063419"/>
+            <a:ext cx="3281082" cy="987882"/>
           </a:xfrm>
           <a:prstGeom prst="rect">
             <a:avLst/>
@@ -12398,7 +12403,7 @@
         </p:spPr>
         <p:txBody>
           <a:bodyPr>
-            <a:spAutoFit/>
+            <a:noAutofit/>
           </a:bodyPr>
           <a:lstStyle>
             <a:lvl1pPr marL="0" indent="0">
@@ -12465,7 +12470,7 @@
         </p:nvSpPr>
         <p:spPr>
           <a:xfrm>
-            <a:off x="4138702" y="1678816"/>
+            <a:off x="4138702" y="1786384"/>
             <a:ext cx="3281082" cy="2104290"/>
           </a:xfrm>
           <a:prstGeom prst="rect">
@@ -12507,7 +12512,7 @@
         </p:spPr>
         <p:txBody>
           <a:bodyPr>
-            <a:spAutoFit/>
+            <a:noAutofit/>
           </a:bodyPr>
           <a:lstStyle>
             <a:lvl1pPr marL="0" indent="0">
@@ -12575,7 +12580,7 @@
         <p:spPr>
           <a:xfrm>
             <a:off x="352611" y="5716977"/>
-            <a:ext cx="3281082" cy="261610"/>
+            <a:ext cx="3281082" cy="420858"/>
           </a:xfrm>
           <a:prstGeom prst="rect">
             <a:avLst/>
@@ -12583,7 +12588,7 @@
         </p:spPr>
         <p:txBody>
           <a:bodyPr>
-            <a:spAutoFit/>
+            <a:noAutofit/>
           </a:bodyPr>
           <a:lstStyle>
             <a:lvl1pPr marL="0" indent="0">
@@ -12650,8 +12655,8 @@
         </p:nvSpPr>
         <p:spPr>
           <a:xfrm>
-            <a:off x="352611" y="8419091"/>
-            <a:ext cx="3281082" cy="230832"/>
+            <a:off x="352611" y="8526659"/>
+            <a:ext cx="3281082" cy="987882"/>
           </a:xfrm>
           <a:prstGeom prst="rect">
             <a:avLst/>
@@ -12659,7 +12664,7 @@
         </p:spPr>
         <p:txBody>
           <a:bodyPr>
-            <a:spAutoFit/>
+            <a:noAutofit/>
           </a:bodyPr>
           <a:lstStyle>
             <a:lvl1pPr marL="0" indent="0">
@@ -12726,7 +12731,7 @@
         </p:nvSpPr>
         <p:spPr>
           <a:xfrm>
-            <a:off x="352612" y="6142056"/>
+            <a:off x="352612" y="6249624"/>
             <a:ext cx="3281082" cy="2104290"/>
           </a:xfrm>
           <a:prstGeom prst="rect">
@@ -12768,7 +12773,7 @@
         </p:spPr>
         <p:txBody>
           <a:bodyPr>
-            <a:spAutoFit/>
+            <a:noAutofit/>
           </a:bodyPr>
           <a:lstStyle>
             <a:lvl1pPr marL="0" indent="0">
@@ -12836,7 +12841,7 @@
         <p:spPr>
           <a:xfrm>
             <a:off x="4138702" y="5716977"/>
-            <a:ext cx="3281082" cy="261610"/>
+            <a:ext cx="3281082" cy="420858"/>
           </a:xfrm>
           <a:prstGeom prst="rect">
             <a:avLst/>
@@ -12844,7 +12849,7 @@
         </p:spPr>
         <p:txBody>
           <a:bodyPr>
-            <a:spAutoFit/>
+            <a:noAutofit/>
           </a:bodyPr>
           <a:lstStyle>
             <a:lvl1pPr marL="0" indent="0">
@@ -12911,8 +12916,8 @@
         </p:nvSpPr>
         <p:spPr>
           <a:xfrm>
-            <a:off x="4138702" y="8419091"/>
-            <a:ext cx="3281082" cy="230832"/>
+            <a:off x="4138702" y="8526659"/>
+            <a:ext cx="3281082" cy="987882"/>
           </a:xfrm>
           <a:prstGeom prst="rect">
             <a:avLst/>
@@ -12920,7 +12925,7 @@
         </p:spPr>
         <p:txBody>
           <a:bodyPr>
-            <a:spAutoFit/>
+            <a:noAutofit/>
           </a:bodyPr>
           <a:lstStyle>
             <a:lvl1pPr marL="0" indent="0">
@@ -12987,7 +12992,7 @@
         </p:nvSpPr>
         <p:spPr>
           <a:xfrm>
-            <a:off x="4138703" y="6142056"/>
+            <a:off x="4138703" y="6249624"/>
             <a:ext cx="3281082" cy="2104290"/>
           </a:xfrm>
           <a:prstGeom prst="rect">
@@ -13059,7 +13064,7 @@
         </p:spPr>
         <p:txBody>
           <a:bodyPr>
-            <a:spAutoFit/>
+            <a:noAutofit/>
           </a:bodyPr>
           <a:lstStyle>
             <a:lvl1pPr marL="0" indent="0">
@@ -13127,7 +13132,7 @@
         <p:spPr>
           <a:xfrm>
             <a:off x="352613" y="1236558"/>
-            <a:ext cx="3281082" cy="230832"/>
+            <a:ext cx="3281082" cy="1008788"/>
           </a:xfrm>
           <a:prstGeom prst="rect">
             <a:avLst/>
@@ -13135,7 +13140,7 @@
         </p:spPr>
         <p:txBody>
           <a:bodyPr>
-            <a:spAutoFit/>
+            <a:noAutofit/>
           </a:bodyPr>
           <a:lstStyle>
             <a:lvl1pPr marL="0" indent="0">
@@ -13321,7 +13326,7 @@
         </p:spPr>
         <p:txBody>
           <a:bodyPr>
-            <a:spAutoFit/>
+            <a:noAutofit/>
           </a:bodyPr>
           <a:lstStyle>
             <a:lvl1pPr marL="0" indent="0">
@@ -13389,7 +13394,7 @@
         <p:spPr>
           <a:xfrm>
             <a:off x="4138705" y="1236558"/>
-            <a:ext cx="3281082" cy="230832"/>
+            <a:ext cx="3281082" cy="1008788"/>
           </a:xfrm>
           <a:prstGeom prst="rect">
             <a:avLst/>
@@ -13397,7 +13402,7 @@
         </p:spPr>
         <p:txBody>
           <a:bodyPr>
-            <a:spAutoFit/>
+            <a:noAutofit/>
           </a:bodyPr>
           <a:lstStyle>
             <a:lvl1pPr marL="0" indent="0">
@@ -13473,7 +13478,7 @@
         </p:spPr>
         <p:txBody>
           <a:bodyPr>
-            <a:spAutoFit/>
+            <a:noAutofit/>
           </a:bodyPr>
           <a:lstStyle>
             <a:lvl1pPr marL="0" indent="0">
@@ -13541,7 +13546,7 @@
         <p:spPr>
           <a:xfrm>
             <a:off x="352613" y="3046246"/>
-            <a:ext cx="3281082" cy="230832"/>
+            <a:ext cx="3281082" cy="1008788"/>
           </a:xfrm>
           <a:prstGeom prst="rect">
             <a:avLst/>
@@ -13549,7 +13554,7 @@
         </p:spPr>
         <p:txBody>
           <a:bodyPr>
-            <a:spAutoFit/>
+            <a:noAutofit/>
           </a:bodyPr>
           <a:lstStyle>
             <a:lvl1pPr marL="0" indent="0">
@@ -13625,7 +13630,7 @@
         </p:spPr>
         <p:txBody>
           <a:bodyPr>
-            <a:spAutoFit/>
+            <a:noAutofit/>
           </a:bodyPr>
           <a:lstStyle>
             <a:lvl1pPr marL="0" indent="0">
@@ -13693,7 +13698,7 @@
         <p:spPr>
           <a:xfrm>
             <a:off x="4138704" y="3046246"/>
-            <a:ext cx="3281082" cy="230832"/>
+            <a:ext cx="3281082" cy="1008788"/>
           </a:xfrm>
           <a:prstGeom prst="rect">
             <a:avLst/>
@@ -13701,7 +13706,7 @@
         </p:spPr>
         <p:txBody>
           <a:bodyPr>
-            <a:spAutoFit/>
+            <a:noAutofit/>
           </a:bodyPr>
           <a:lstStyle>
             <a:lvl1pPr marL="0" indent="0">
@@ -13777,7 +13782,7 @@
         </p:spPr>
         <p:txBody>
           <a:bodyPr>
-            <a:spAutoFit/>
+            <a:noAutofit/>
           </a:bodyPr>
           <a:lstStyle>
             <a:lvl1pPr marL="0" indent="0">
@@ -13845,7 +13850,7 @@
         <p:spPr>
           <a:xfrm>
             <a:off x="352613" y="4901941"/>
-            <a:ext cx="3281082" cy="230832"/>
+            <a:ext cx="3281082" cy="1008788"/>
           </a:xfrm>
           <a:prstGeom prst="rect">
             <a:avLst/>
@@ -13853,7 +13858,7 @@
         </p:spPr>
         <p:txBody>
           <a:bodyPr>
-            <a:spAutoFit/>
+            <a:noAutofit/>
           </a:bodyPr>
           <a:lstStyle>
             <a:lvl1pPr marL="0" indent="0">
@@ -13929,7 +13934,7 @@
         </p:spPr>
         <p:txBody>
           <a:bodyPr>
-            <a:spAutoFit/>
+            <a:noAutofit/>
           </a:bodyPr>
           <a:lstStyle>
             <a:lvl1pPr marL="0" indent="0">
@@ -13997,7 +14002,7 @@
         <p:spPr>
           <a:xfrm>
             <a:off x="4138704" y="4901941"/>
-            <a:ext cx="3281082" cy="230832"/>
+            <a:ext cx="3281082" cy="1008788"/>
           </a:xfrm>
           <a:prstGeom prst="rect">
             <a:avLst/>
@@ -14005,7 +14010,7 @@
         </p:spPr>
         <p:txBody>
           <a:bodyPr>
-            <a:spAutoFit/>
+            <a:noAutofit/>
           </a:bodyPr>
           <a:lstStyle>
             <a:lvl1pPr marL="0" indent="0">
@@ -14598,6 +14603,265 @@
           <a:chExt cx="0" cy="0"/>
         </a:xfrm>
       </p:grpSpPr>
+      <p:sp>
+        <p:nvSpPr>
+          <p:cNvPr id="2" name="Text Placeholder 1">
+            <a:extLst>
+              <a:ext uri="{FF2B5EF4-FFF2-40B4-BE49-F238E27FC236}">
+                <a16:creationId xmlns:a16="http://schemas.microsoft.com/office/drawing/2014/main" id="{944EE7D4-422D-9FE1-4927-4374D6FBDCB3}"/>
+              </a:ext>
+            </a:extLst>
+          </p:cNvPr>
+          <p:cNvSpPr>
+            <a:spLocks noGrp="1"/>
+          </p:cNvSpPr>
+          <p:nvPr>
+            <p:ph type="body" sz="quarter" idx="12"/>
+          </p:nvPr>
+        </p:nvSpPr>
+        <p:spPr>
+          <a:xfrm>
+            <a:off x="3043238" y="3238499"/>
+            <a:ext cx="4422274" cy="1065174"/>
+          </a:xfrm>
+        </p:spPr>
+        <p:txBody>
+          <a:bodyPr>
+            <a:noAutofit/>
+          </a:bodyPr>
+          <a:lstStyle/>
+          <a:p>
+            <a:endParaRPr lang="en-US" dirty="0"/>
+          </a:p>
+        </p:txBody>
+      </p:sp>
+      <p:sp>
+        <p:nvSpPr>
+          <p:cNvPr id="3" name="Text Placeholder 2">
+            <a:extLst>
+              <a:ext uri="{FF2B5EF4-FFF2-40B4-BE49-F238E27FC236}">
+                <a16:creationId xmlns:a16="http://schemas.microsoft.com/office/drawing/2014/main" id="{AE33ED87-A063-AE96-3406-AD1BF5FD165E}"/>
+              </a:ext>
+            </a:extLst>
+          </p:cNvPr>
+          <p:cNvSpPr>
+            <a:spLocks noGrp="1"/>
+          </p:cNvSpPr>
+          <p:nvPr>
+            <p:ph type="body" sz="quarter" idx="13"/>
+          </p:nvPr>
+        </p:nvSpPr>
+        <p:spPr/>
+        <p:txBody>
+          <a:bodyPr>
+            <a:noAutofit/>
+          </a:bodyPr>
+          <a:lstStyle/>
+          <a:p>
+            <a:endParaRPr lang="en-US"/>
+          </a:p>
+        </p:txBody>
+      </p:sp>
+      <p:sp>
+        <p:nvSpPr>
+          <p:cNvPr id="4" name="Text Placeholder 3">
+            <a:extLst>
+              <a:ext uri="{FF2B5EF4-FFF2-40B4-BE49-F238E27FC236}">
+                <a16:creationId xmlns:a16="http://schemas.microsoft.com/office/drawing/2014/main" id="{460CBAE0-9383-F8A7-0B08-9078315D2968}"/>
+              </a:ext>
+            </a:extLst>
+          </p:cNvPr>
+          <p:cNvSpPr>
+            <a:spLocks noGrp="1"/>
+          </p:cNvSpPr>
+          <p:nvPr>
+            <p:ph type="body" sz="quarter" idx="14"/>
+          </p:nvPr>
+        </p:nvSpPr>
+        <p:spPr>
+          <a:xfrm>
+            <a:off x="3043238" y="4975415"/>
+            <a:ext cx="4422274" cy="1306388"/>
+          </a:xfrm>
+        </p:spPr>
+        <p:txBody>
+          <a:bodyPr>
+            <a:noAutofit/>
+          </a:bodyPr>
+          <a:lstStyle/>
+          <a:p>
+            <a:endParaRPr lang="en-US" dirty="0"/>
+          </a:p>
+        </p:txBody>
+      </p:sp>
+      <p:sp>
+        <p:nvSpPr>
+          <p:cNvPr id="5" name="Text Placeholder 4">
+            <a:extLst>
+              <a:ext uri="{FF2B5EF4-FFF2-40B4-BE49-F238E27FC236}">
+                <a16:creationId xmlns:a16="http://schemas.microsoft.com/office/drawing/2014/main" id="{4B12AB6C-0109-BA98-7A71-739ED1DF950F}"/>
+              </a:ext>
+            </a:extLst>
+          </p:cNvPr>
+          <p:cNvSpPr>
+            <a:spLocks noGrp="1"/>
+          </p:cNvSpPr>
+          <p:nvPr>
+            <p:ph type="body" sz="quarter" idx="15"/>
+          </p:nvPr>
+        </p:nvSpPr>
+        <p:spPr>
+          <a:xfrm>
+            <a:off x="3043238" y="1415470"/>
+            <a:ext cx="4422274" cy="708709"/>
+          </a:xfrm>
+        </p:spPr>
+        <p:txBody>
+          <a:bodyPr>
+            <a:noAutofit/>
+          </a:bodyPr>
+          <a:lstStyle/>
+          <a:p>
+            <a:endParaRPr lang="en-US"/>
+          </a:p>
+        </p:txBody>
+      </p:sp>
+      <p:sp>
+        <p:nvSpPr>
+          <p:cNvPr id="6" name="Picture Placeholder 5">
+            <a:extLst>
+              <a:ext uri="{FF2B5EF4-FFF2-40B4-BE49-F238E27FC236}">
+                <a16:creationId xmlns:a16="http://schemas.microsoft.com/office/drawing/2014/main" id="{268EB404-3696-7089-0F07-39716D11CAAC}"/>
+              </a:ext>
+            </a:extLst>
+          </p:cNvPr>
+          <p:cNvSpPr>
+            <a:spLocks noGrp="1"/>
+          </p:cNvSpPr>
+          <p:nvPr>
+            <p:ph type="pic" sz="quarter" idx="16"/>
+          </p:nvPr>
+        </p:nvSpPr>
+        <p:spPr/>
+        <p:txBody>
+          <a:bodyPr/>
+          <a:lstStyle/>
+          <a:p>
+            <a:endParaRPr lang="en-US"/>
+          </a:p>
+        </p:txBody>
+      </p:sp>
+      <p:sp>
+        <p:nvSpPr>
+          <p:cNvPr id="7" name="Text Placeholder 6">
+            <a:extLst>
+              <a:ext uri="{FF2B5EF4-FFF2-40B4-BE49-F238E27FC236}">
+                <a16:creationId xmlns:a16="http://schemas.microsoft.com/office/drawing/2014/main" id="{8EFB87C9-01D0-50CB-E02F-89F289B96A00}"/>
+              </a:ext>
+            </a:extLst>
+          </p:cNvPr>
+          <p:cNvSpPr>
+            <a:spLocks noGrp="1"/>
+          </p:cNvSpPr>
+          <p:nvPr>
+            <p:ph type="body" sz="quarter" idx="18"/>
+          </p:nvPr>
+        </p:nvSpPr>
+        <p:spPr/>
+        <p:txBody>
+          <a:bodyPr>
+            <a:noAutofit/>
+          </a:bodyPr>
+          <a:lstStyle/>
+          <a:p>
+            <a:endParaRPr lang="en-US"/>
+          </a:p>
+        </p:txBody>
+      </p:sp>
+      <p:sp>
+        <p:nvSpPr>
+          <p:cNvPr id="8" name="Text Placeholder 7">
+            <a:extLst>
+              <a:ext uri="{FF2B5EF4-FFF2-40B4-BE49-F238E27FC236}">
+                <a16:creationId xmlns:a16="http://schemas.microsoft.com/office/drawing/2014/main" id="{8B6C86AF-D8B8-A9C3-4FA8-666E95CC3431}"/>
+              </a:ext>
+            </a:extLst>
+          </p:cNvPr>
+          <p:cNvSpPr>
+            <a:spLocks noGrp="1"/>
+          </p:cNvSpPr>
+          <p:nvPr>
+            <p:ph type="body" sz="quarter" idx="19"/>
+          </p:nvPr>
+        </p:nvSpPr>
+        <p:spPr/>
+        <p:txBody>
+          <a:bodyPr>
+            <a:noAutofit/>
+          </a:bodyPr>
+          <a:lstStyle/>
+          <a:p>
+            <a:endParaRPr lang="en-US"/>
+          </a:p>
+        </p:txBody>
+      </p:sp>
+      <p:sp>
+        <p:nvSpPr>
+          <p:cNvPr id="9" name="Text Placeholder 8">
+            <a:extLst>
+              <a:ext uri="{FF2B5EF4-FFF2-40B4-BE49-F238E27FC236}">
+                <a16:creationId xmlns:a16="http://schemas.microsoft.com/office/drawing/2014/main" id="{C9A66C7C-8E44-17EE-12D3-721483A4A4B2}"/>
+              </a:ext>
+            </a:extLst>
+          </p:cNvPr>
+          <p:cNvSpPr>
+            <a:spLocks noGrp="1"/>
+          </p:cNvSpPr>
+          <p:nvPr>
+            <p:ph type="body" sz="quarter" idx="20"/>
+          </p:nvPr>
+        </p:nvSpPr>
+        <p:spPr/>
+        <p:txBody>
+          <a:bodyPr>
+            <a:noAutofit/>
+          </a:bodyPr>
+          <a:lstStyle/>
+          <a:p>
+            <a:endParaRPr lang="en-US"/>
+          </a:p>
+        </p:txBody>
+      </p:sp>
+    </p:spTree>
+    <p:extLst>
+      <p:ext uri="{BB962C8B-B14F-4D97-AF65-F5344CB8AC3E}">
+        <p14:creationId xmlns:p14="http://schemas.microsoft.com/office/powerpoint/2010/main" val="938836670"/>
+      </p:ext>
+    </p:extLst>
+  </p:cSld>
+  <p:clrMapOvr>
+    <a:masterClrMapping/>
+  </p:clrMapOvr>
+</p:sld>
+</file>
+
+<file path=ppt/slides/slide3.xml><?xml version="1.0" encoding="utf-8"?>
+<p:sld xmlns:a="http://schemas.openxmlformats.org/drawingml/2006/main" xmlns:r="http://schemas.openxmlformats.org/officeDocument/2006/relationships" xmlns:p="http://schemas.openxmlformats.org/presentationml/2006/main">
+  <p:cSld>
+    <p:spTree>
+      <p:nvGrpSpPr>
+        <p:cNvPr id="1" name=""/>
+        <p:cNvGrpSpPr/>
+        <p:nvPr/>
+      </p:nvGrpSpPr>
+      <p:grpSpPr>
+        <a:xfrm>
+          <a:off x="0" y="0"/>
+          <a:ext cx="0" cy="0"/>
+          <a:chOff x="0" y="0"/>
+          <a:chExt cx="0" cy="0"/>
+        </a:xfrm>
+      </p:grpSpPr>
       <p:pic>
         <p:nvPicPr>
           <p:cNvPr id="3" name="Picture 2" descr="Cloud upload, Black pictogram">
@@ -14713,7 +14977,7 @@
           </a:ln>
           <a:extLst>
             <a:ext uri="{C572A759-6A51-4108-AA02-DFA0A04FC94B}">
-              <ma14:wrappingTextBoxFlag xmlns="" xmlns:m="http://schemas.openxmlformats.org/officeDocument/2006/math" xmlns:a14="http://schemas.microsoft.com/office/drawing/2010/main" xmlns:ma14="http://schemas.microsoft.com/office/mac/drawingml/2011/main" val="1"/>
+              <ma14:wrappingTextBoxFlag xmlns:ma14="http://schemas.microsoft.com/office/mac/drawingml/2011/main" xmlns:a14="http://schemas.microsoft.com/office/drawing/2010/main" xmlns:m="http://schemas.openxmlformats.org/officeDocument/2006/math" xmlns="" val="1"/>
             </a:ext>
           </a:extLst>
         </p:spPr>
@@ -14761,7 +15025,7 @@
           </a:ln>
           <a:extLst>
             <a:ext uri="{C572A759-6A51-4108-AA02-DFA0A04FC94B}">
-              <ma14:wrappingTextBoxFlag xmlns="" xmlns:m="http://schemas.openxmlformats.org/officeDocument/2006/math" xmlns:a14="http://schemas.microsoft.com/office/drawing/2010/main" xmlns:ma14="http://schemas.microsoft.com/office/mac/drawingml/2011/main" val="1"/>
+              <ma14:wrappingTextBoxFlag xmlns:ma14="http://schemas.microsoft.com/office/mac/drawingml/2011/main" xmlns:a14="http://schemas.microsoft.com/office/drawing/2010/main" xmlns:m="http://schemas.openxmlformats.org/officeDocument/2006/math" xmlns="" val="1"/>
             </a:ext>
           </a:extLst>
         </p:spPr>
@@ -14838,7 +15102,7 @@
           </a:ln>
           <a:extLst>
             <a:ext uri="{C572A759-6A51-4108-AA02-DFA0A04FC94B}">
-              <ma14:wrappingTextBoxFlag xmlns="" xmlns:m="http://schemas.openxmlformats.org/officeDocument/2006/math" xmlns:a14="http://schemas.microsoft.com/office/drawing/2010/main" xmlns:ma14="http://schemas.microsoft.com/office/mac/drawingml/2011/main" val="1"/>
+              <ma14:wrappingTextBoxFlag xmlns:ma14="http://schemas.microsoft.com/office/mac/drawingml/2011/main" xmlns:a14="http://schemas.microsoft.com/office/drawing/2010/main" xmlns:m="http://schemas.openxmlformats.org/officeDocument/2006/math" xmlns="" val="1"/>
             </a:ext>
           </a:extLst>
         </p:spPr>
@@ -14915,7 +15179,7 @@
           </a:ln>
           <a:extLst>
             <a:ext uri="{C572A759-6A51-4108-AA02-DFA0A04FC94B}">
-              <ma14:wrappingTextBoxFlag xmlns="" xmlns:m="http://schemas.openxmlformats.org/officeDocument/2006/math" xmlns:a14="http://schemas.microsoft.com/office/drawing/2010/main" xmlns:ma14="http://schemas.microsoft.com/office/mac/drawingml/2011/main" val="1"/>
+              <ma14:wrappingTextBoxFlag xmlns:ma14="http://schemas.microsoft.com/office/mac/drawingml/2011/main" xmlns:a14="http://schemas.microsoft.com/office/drawing/2010/main" xmlns:m="http://schemas.openxmlformats.org/officeDocument/2006/math" xmlns="" val="1"/>
             </a:ext>
           </a:extLst>
         </p:spPr>
@@ -14992,7 +15256,7 @@
           </a:ln>
           <a:extLst>
             <a:ext uri="{C572A759-6A51-4108-AA02-DFA0A04FC94B}">
-              <ma14:wrappingTextBoxFlag xmlns="" xmlns:m="http://schemas.openxmlformats.org/officeDocument/2006/math" xmlns:a14="http://schemas.microsoft.com/office/drawing/2010/main" xmlns:ma14="http://schemas.microsoft.com/office/mac/drawingml/2011/main" val="1"/>
+              <ma14:wrappingTextBoxFlag xmlns:ma14="http://schemas.microsoft.com/office/mac/drawingml/2011/main" xmlns:a14="http://schemas.microsoft.com/office/drawing/2010/main" xmlns:m="http://schemas.openxmlformats.org/officeDocument/2006/math" xmlns="" val="1"/>
             </a:ext>
           </a:extLst>
         </p:spPr>
@@ -15078,7 +15342,7 @@
           </a:ln>
           <a:extLst>
             <a:ext uri="{C572A759-6A51-4108-AA02-DFA0A04FC94B}">
-              <ma14:wrappingTextBoxFlag xmlns="" xmlns:m="http://schemas.openxmlformats.org/officeDocument/2006/math" xmlns:a14="http://schemas.microsoft.com/office/drawing/2010/main" xmlns:ma14="http://schemas.microsoft.com/office/mac/drawingml/2011/main" val="1"/>
+              <ma14:wrappingTextBoxFlag xmlns:ma14="http://schemas.microsoft.com/office/mac/drawingml/2011/main" xmlns:a14="http://schemas.microsoft.com/office/drawing/2010/main" xmlns:m="http://schemas.openxmlformats.org/officeDocument/2006/math" xmlns="" val="1"/>
             </a:ext>
           </a:extLst>
         </p:spPr>
@@ -15143,7 +15407,7 @@
           </a:ln>
           <a:extLst>
             <a:ext uri="{C572A759-6A51-4108-AA02-DFA0A04FC94B}">
-              <ma14:wrappingTextBoxFlag xmlns="" xmlns:m="http://schemas.openxmlformats.org/officeDocument/2006/math" xmlns:a14="http://schemas.microsoft.com/office/drawing/2010/main" xmlns:ma14="http://schemas.microsoft.com/office/mac/drawingml/2011/main" val="1"/>
+              <ma14:wrappingTextBoxFlag xmlns:ma14="http://schemas.microsoft.com/office/mac/drawingml/2011/main" xmlns:a14="http://schemas.microsoft.com/office/drawing/2010/main" xmlns:m="http://schemas.openxmlformats.org/officeDocument/2006/math" xmlns="" val="1"/>
             </a:ext>
           </a:extLst>
         </p:spPr>
@@ -15613,7 +15877,7 @@
           </a:ln>
           <a:extLst>
             <a:ext uri="{C572A759-6A51-4108-AA02-DFA0A04FC94B}">
-              <ma14:wrappingTextBoxFlag xmlns="" xmlns:m="http://schemas.openxmlformats.org/officeDocument/2006/math" xmlns:a14="http://schemas.microsoft.com/office/drawing/2010/main" xmlns:ma14="http://schemas.microsoft.com/office/mac/drawingml/2011/main" val="1"/>
+              <ma14:wrappingTextBoxFlag xmlns:ma14="http://schemas.microsoft.com/office/mac/drawingml/2011/main" xmlns:a14="http://schemas.microsoft.com/office/drawing/2010/main" xmlns:m="http://schemas.openxmlformats.org/officeDocument/2006/math" xmlns="" val="1"/>
             </a:ext>
           </a:extLst>
         </p:spPr>
@@ -15661,7 +15925,7 @@
           </a:ln>
           <a:extLst>
             <a:ext uri="{C572A759-6A51-4108-AA02-DFA0A04FC94B}">
-              <ma14:wrappingTextBoxFlag xmlns="" xmlns:m="http://schemas.openxmlformats.org/officeDocument/2006/math" xmlns:a14="http://schemas.microsoft.com/office/drawing/2010/main" xmlns:ma14="http://schemas.microsoft.com/office/mac/drawingml/2011/main" val="1"/>
+              <ma14:wrappingTextBoxFlag xmlns:ma14="http://schemas.microsoft.com/office/mac/drawingml/2011/main" xmlns:a14="http://schemas.microsoft.com/office/drawing/2010/main" xmlns:m="http://schemas.openxmlformats.org/officeDocument/2006/math" xmlns="" val="1"/>
             </a:ext>
           </a:extLst>
         </p:spPr>
@@ -15745,7 +16009,7 @@
           </a:ln>
           <a:extLst>
             <a:ext uri="{C572A759-6A51-4108-AA02-DFA0A04FC94B}">
-              <ma14:wrappingTextBoxFlag xmlns="" xmlns:m="http://schemas.openxmlformats.org/officeDocument/2006/math" xmlns:a14="http://schemas.microsoft.com/office/drawing/2010/main" xmlns:ma14="http://schemas.microsoft.com/office/mac/drawingml/2011/main" val="1"/>
+              <ma14:wrappingTextBoxFlag xmlns:ma14="http://schemas.microsoft.com/office/mac/drawingml/2011/main" xmlns:a14="http://schemas.microsoft.com/office/drawing/2010/main" xmlns:m="http://schemas.openxmlformats.org/officeDocument/2006/math" xmlns="" val="1"/>
             </a:ext>
           </a:extLst>
         </p:spPr>
@@ -16779,7 +17043,7 @@
           </a:ln>
           <a:extLst>
             <a:ext uri="{C572A759-6A51-4108-AA02-DFA0A04FC94B}">
-              <ma14:wrappingTextBoxFlag xmlns="" xmlns:m="http://schemas.openxmlformats.org/officeDocument/2006/math" xmlns:a14="http://schemas.microsoft.com/office/drawing/2010/main" xmlns:ma14="http://schemas.microsoft.com/office/mac/drawingml/2011/main" val="1"/>
+              <ma14:wrappingTextBoxFlag xmlns:ma14="http://schemas.microsoft.com/office/mac/drawingml/2011/main" xmlns:a14="http://schemas.microsoft.com/office/drawing/2010/main" xmlns:m="http://schemas.openxmlformats.org/officeDocument/2006/math" xmlns="" val="1"/>
             </a:ext>
           </a:extLst>
         </p:spPr>
@@ -16862,7 +17126,7 @@
           </a:ln>
           <a:extLst>
             <a:ext uri="{C572A759-6A51-4108-AA02-DFA0A04FC94B}">
-              <ma14:wrappingTextBoxFlag xmlns="" xmlns:m="http://schemas.openxmlformats.org/officeDocument/2006/math" xmlns:a14="http://schemas.microsoft.com/office/drawing/2010/main" xmlns:ma14="http://schemas.microsoft.com/office/mac/drawingml/2011/main" val="1"/>
+              <ma14:wrappingTextBoxFlag xmlns:ma14="http://schemas.microsoft.com/office/mac/drawingml/2011/main" xmlns:a14="http://schemas.microsoft.com/office/drawing/2010/main" xmlns:m="http://schemas.openxmlformats.org/officeDocument/2006/math" xmlns="" val="1"/>
             </a:ext>
           </a:extLst>
         </p:spPr>
@@ -16950,7 +17214,7 @@
           </a:ln>
           <a:extLst>
             <a:ext uri="{C572A759-6A51-4108-AA02-DFA0A04FC94B}">
-              <ma14:wrappingTextBoxFlag xmlns="" xmlns:m="http://schemas.openxmlformats.org/officeDocument/2006/math" xmlns:a14="http://schemas.microsoft.com/office/drawing/2010/main" xmlns:ma14="http://schemas.microsoft.com/office/mac/drawingml/2011/main" val="1"/>
+              <ma14:wrappingTextBoxFlag xmlns:ma14="http://schemas.microsoft.com/office/mac/drawingml/2011/main" xmlns:a14="http://schemas.microsoft.com/office/drawing/2010/main" xmlns:m="http://schemas.openxmlformats.org/officeDocument/2006/math" xmlns="" val="1"/>
             </a:ext>
           </a:extLst>
         </p:spPr>
@@ -17038,7 +17302,7 @@
           </a:ln>
           <a:extLst>
             <a:ext uri="{C572A759-6A51-4108-AA02-DFA0A04FC94B}">
-              <ma14:wrappingTextBoxFlag xmlns="" xmlns:m="http://schemas.openxmlformats.org/officeDocument/2006/math" xmlns:a14="http://schemas.microsoft.com/office/drawing/2010/main" xmlns:ma14="http://schemas.microsoft.com/office/mac/drawingml/2011/main" val="1"/>
+              <ma14:wrappingTextBoxFlag xmlns:ma14="http://schemas.microsoft.com/office/mac/drawingml/2011/main" xmlns:a14="http://schemas.microsoft.com/office/drawing/2010/main" xmlns:m="http://schemas.openxmlformats.org/officeDocument/2006/math" xmlns="" val="1"/>
             </a:ext>
           </a:extLst>
         </p:spPr>
@@ -17121,7 +17385,7 @@
           </a:ln>
           <a:extLst>
             <a:ext uri="{C572A759-6A51-4108-AA02-DFA0A04FC94B}">
-              <ma14:wrappingTextBoxFlag xmlns="" xmlns:m="http://schemas.openxmlformats.org/officeDocument/2006/math" xmlns:a14="http://schemas.microsoft.com/office/drawing/2010/main" xmlns:ma14="http://schemas.microsoft.com/office/mac/drawingml/2011/main" val="1"/>
+              <ma14:wrappingTextBoxFlag xmlns:ma14="http://schemas.microsoft.com/office/mac/drawingml/2011/main" xmlns:a14="http://schemas.microsoft.com/office/drawing/2010/main" xmlns:m="http://schemas.openxmlformats.org/officeDocument/2006/math" xmlns="" val="1"/>
             </a:ext>
           </a:extLst>
         </p:spPr>
@@ -17209,7 +17473,7 @@
           </a:ln>
           <a:extLst>
             <a:ext uri="{C572A759-6A51-4108-AA02-DFA0A04FC94B}">
-              <ma14:wrappingTextBoxFlag xmlns="" xmlns:m="http://schemas.openxmlformats.org/officeDocument/2006/math" xmlns:a14="http://schemas.microsoft.com/office/drawing/2010/main" xmlns:ma14="http://schemas.microsoft.com/office/mac/drawingml/2011/main" val="1"/>
+              <ma14:wrappingTextBoxFlag xmlns:ma14="http://schemas.microsoft.com/office/mac/drawingml/2011/main" xmlns:a14="http://schemas.microsoft.com/office/drawing/2010/main" xmlns:m="http://schemas.openxmlformats.org/officeDocument/2006/math" xmlns="" val="1"/>
             </a:ext>
           </a:extLst>
         </p:spPr>
@@ -18638,7 +18902,7 @@
           </a:ln>
           <a:extLst>
             <a:ext uri="{C572A759-6A51-4108-AA02-DFA0A04FC94B}">
-              <ma14:wrappingTextBoxFlag xmlns="" xmlns:m="http://schemas.openxmlformats.org/officeDocument/2006/math" xmlns:a14="http://schemas.microsoft.com/office/drawing/2010/main" xmlns:ma14="http://schemas.microsoft.com/office/mac/drawingml/2011/main" val="1"/>
+              <ma14:wrappingTextBoxFlag xmlns:ma14="http://schemas.microsoft.com/office/mac/drawingml/2011/main" xmlns:a14="http://schemas.microsoft.com/office/drawing/2010/main" xmlns:m="http://schemas.openxmlformats.org/officeDocument/2006/math" xmlns="" val="1"/>
             </a:ext>
           </a:extLst>
         </p:spPr>
@@ -18690,7 +18954,7 @@
           </a:ln>
           <a:extLst>
             <a:ext uri="{C572A759-6A51-4108-AA02-DFA0A04FC94B}">
-              <ma14:wrappingTextBoxFlag xmlns="" xmlns:m="http://schemas.openxmlformats.org/officeDocument/2006/math" xmlns:a14="http://schemas.microsoft.com/office/drawing/2010/main" xmlns:ma14="http://schemas.microsoft.com/office/mac/drawingml/2011/main" val="1"/>
+              <ma14:wrappingTextBoxFlag xmlns:ma14="http://schemas.microsoft.com/office/mac/drawingml/2011/main" xmlns:a14="http://schemas.microsoft.com/office/drawing/2010/main" xmlns:m="http://schemas.openxmlformats.org/officeDocument/2006/math" xmlns="" val="1"/>
             </a:ext>
           </a:extLst>
         </p:spPr>
@@ -18978,7 +19242,7 @@
           </a:ln>
           <a:extLst>
             <a:ext uri="{C572A759-6A51-4108-AA02-DFA0A04FC94B}">
-              <ma14:wrappingTextBoxFlag xmlns="" xmlns:m="http://schemas.openxmlformats.org/officeDocument/2006/math" xmlns:a14="http://schemas.microsoft.com/office/drawing/2010/main" xmlns:ma14="http://schemas.microsoft.com/office/mac/drawingml/2011/main" val="1"/>
+              <ma14:wrappingTextBoxFlag xmlns:ma14="http://schemas.microsoft.com/office/mac/drawingml/2011/main" xmlns:a14="http://schemas.microsoft.com/office/drawing/2010/main" xmlns:m="http://schemas.openxmlformats.org/officeDocument/2006/math" xmlns="" val="1"/>
             </a:ext>
           </a:extLst>
         </p:spPr>
@@ -19066,7 +19330,7 @@
           </a:ln>
           <a:extLst>
             <a:ext uri="{C572A759-6A51-4108-AA02-DFA0A04FC94B}">
-              <ma14:wrappingTextBoxFlag xmlns="" xmlns:m="http://schemas.openxmlformats.org/officeDocument/2006/math" xmlns:a14="http://schemas.microsoft.com/office/drawing/2010/main" xmlns:ma14="http://schemas.microsoft.com/office/mac/drawingml/2011/main" val="1"/>
+              <ma14:wrappingTextBoxFlag xmlns:ma14="http://schemas.microsoft.com/office/mac/drawingml/2011/main" xmlns:a14="http://schemas.microsoft.com/office/drawing/2010/main" xmlns:m="http://schemas.openxmlformats.org/officeDocument/2006/math" xmlns="" val="1"/>
             </a:ext>
           </a:extLst>
         </p:spPr>
@@ -19118,7 +19382,7 @@
           </a:ln>
           <a:extLst>
             <a:ext uri="{C572A759-6A51-4108-AA02-DFA0A04FC94B}">
-              <ma14:wrappingTextBoxFlag xmlns="" xmlns:m="http://schemas.openxmlformats.org/officeDocument/2006/math" xmlns:a14="http://schemas.microsoft.com/office/drawing/2010/main" xmlns:ma14="http://schemas.microsoft.com/office/mac/drawingml/2011/main" val="1"/>
+              <ma14:wrappingTextBoxFlag xmlns:ma14="http://schemas.microsoft.com/office/mac/drawingml/2011/main" xmlns:a14="http://schemas.microsoft.com/office/drawing/2010/main" xmlns:m="http://schemas.openxmlformats.org/officeDocument/2006/math" xmlns="" val="1"/>
             </a:ext>
           </a:extLst>
         </p:spPr>
@@ -19163,7 +19427,7 @@
           </a:ln>
           <a:extLst>
             <a:ext uri="{C572A759-6A51-4108-AA02-DFA0A04FC94B}">
-              <ma14:wrappingTextBoxFlag xmlns="" xmlns:m="http://schemas.openxmlformats.org/officeDocument/2006/math" xmlns:a14="http://schemas.microsoft.com/office/drawing/2010/main" xmlns:ma14="http://schemas.microsoft.com/office/mac/drawingml/2011/main" val="1"/>
+              <ma14:wrappingTextBoxFlag xmlns:ma14="http://schemas.microsoft.com/office/mac/drawingml/2011/main" xmlns:a14="http://schemas.microsoft.com/office/drawing/2010/main" xmlns:m="http://schemas.openxmlformats.org/officeDocument/2006/math" xmlns="" val="1"/>
             </a:ext>
           </a:extLst>
         </p:spPr>
@@ -19215,7 +19479,7 @@
           </a:ln>
           <a:extLst>
             <a:ext uri="{C572A759-6A51-4108-AA02-DFA0A04FC94B}">
-              <ma14:wrappingTextBoxFlag xmlns="" xmlns:m="http://schemas.openxmlformats.org/officeDocument/2006/math" xmlns:a14="http://schemas.microsoft.com/office/drawing/2010/main" xmlns:ma14="http://schemas.microsoft.com/office/mac/drawingml/2011/main" val="1"/>
+              <ma14:wrappingTextBoxFlag xmlns:ma14="http://schemas.microsoft.com/office/mac/drawingml/2011/main" xmlns:a14="http://schemas.microsoft.com/office/drawing/2010/main" xmlns:m="http://schemas.openxmlformats.org/officeDocument/2006/math" xmlns="" val="1"/>
             </a:ext>
           </a:extLst>
         </p:spPr>
@@ -19267,7 +19531,7 @@
           </a:ln>
           <a:extLst>
             <a:ext uri="{C572A759-6A51-4108-AA02-DFA0A04FC94B}">
-              <ma14:wrappingTextBoxFlag xmlns="" xmlns:m="http://schemas.openxmlformats.org/officeDocument/2006/math" xmlns:a14="http://schemas.microsoft.com/office/drawing/2010/main" xmlns:ma14="http://schemas.microsoft.com/office/mac/drawingml/2011/main" val="1"/>
+              <ma14:wrappingTextBoxFlag xmlns:ma14="http://schemas.microsoft.com/office/mac/drawingml/2011/main" xmlns:a14="http://schemas.microsoft.com/office/drawing/2010/main" xmlns:m="http://schemas.openxmlformats.org/officeDocument/2006/math" xmlns="" val="1"/>
             </a:ext>
           </a:extLst>
         </p:spPr>
@@ -19319,7 +19583,7 @@
           </a:ln>
           <a:extLst>
             <a:ext uri="{C572A759-6A51-4108-AA02-DFA0A04FC94B}">
-              <ma14:wrappingTextBoxFlag xmlns="" xmlns:m="http://schemas.openxmlformats.org/officeDocument/2006/math" xmlns:a14="http://schemas.microsoft.com/office/drawing/2010/main" xmlns:ma14="http://schemas.microsoft.com/office/mac/drawingml/2011/main" val="1"/>
+              <ma14:wrappingTextBoxFlag xmlns:ma14="http://schemas.microsoft.com/office/mac/drawingml/2011/main" xmlns:a14="http://schemas.microsoft.com/office/drawing/2010/main" xmlns:m="http://schemas.openxmlformats.org/officeDocument/2006/math" xmlns="" val="1"/>
             </a:ext>
           </a:extLst>
         </p:spPr>
@@ -19371,7 +19635,7 @@
           </a:ln>
           <a:extLst>
             <a:ext uri="{C572A759-6A51-4108-AA02-DFA0A04FC94B}">
-              <ma14:wrappingTextBoxFlag xmlns="" xmlns:m="http://schemas.openxmlformats.org/officeDocument/2006/math" xmlns:a14="http://schemas.microsoft.com/office/drawing/2010/main" xmlns:ma14="http://schemas.microsoft.com/office/mac/drawingml/2011/main" val="1"/>
+              <ma14:wrappingTextBoxFlag xmlns:ma14="http://schemas.microsoft.com/office/mac/drawingml/2011/main" xmlns:a14="http://schemas.microsoft.com/office/drawing/2010/main" xmlns:m="http://schemas.openxmlformats.org/officeDocument/2006/math" xmlns="" val="1"/>
             </a:ext>
           </a:extLst>
         </p:spPr>
@@ -19423,7 +19687,7 @@
           </a:ln>
           <a:extLst>
             <a:ext uri="{C572A759-6A51-4108-AA02-DFA0A04FC94B}">
-              <ma14:wrappingTextBoxFlag xmlns="" xmlns:m="http://schemas.openxmlformats.org/officeDocument/2006/math" xmlns:a14="http://schemas.microsoft.com/office/drawing/2010/main" xmlns:ma14="http://schemas.microsoft.com/office/mac/drawingml/2011/main" val="1"/>
+              <ma14:wrappingTextBoxFlag xmlns:ma14="http://schemas.microsoft.com/office/mac/drawingml/2011/main" xmlns:a14="http://schemas.microsoft.com/office/drawing/2010/main" xmlns:m="http://schemas.openxmlformats.org/officeDocument/2006/math" xmlns="" val="1"/>
             </a:ext>
           </a:extLst>
         </p:spPr>
@@ -19482,7 +19746,7 @@
           </a:ln>
           <a:extLst>
             <a:ext uri="{C572A759-6A51-4108-AA02-DFA0A04FC94B}">
-              <ma14:wrappingTextBoxFlag xmlns="" xmlns:m="http://schemas.openxmlformats.org/officeDocument/2006/math" xmlns:a14="http://schemas.microsoft.com/office/drawing/2010/main" xmlns:ma14="http://schemas.microsoft.com/office/mac/drawingml/2011/main" val="1"/>
+              <ma14:wrappingTextBoxFlag xmlns:ma14="http://schemas.microsoft.com/office/mac/drawingml/2011/main" xmlns:a14="http://schemas.microsoft.com/office/drawing/2010/main" xmlns:m="http://schemas.openxmlformats.org/officeDocument/2006/math" xmlns="" val="1"/>
             </a:ext>
           </a:extLst>
         </p:spPr>
@@ -19534,7 +19798,7 @@
           </a:ln>
           <a:extLst>
             <a:ext uri="{C572A759-6A51-4108-AA02-DFA0A04FC94B}">
-              <ma14:wrappingTextBoxFlag xmlns="" xmlns:m="http://schemas.openxmlformats.org/officeDocument/2006/math" xmlns:a14="http://schemas.microsoft.com/office/drawing/2010/main" xmlns:ma14="http://schemas.microsoft.com/office/mac/drawingml/2011/main" val="1"/>
+              <ma14:wrappingTextBoxFlag xmlns:ma14="http://schemas.microsoft.com/office/mac/drawingml/2011/main" xmlns:a14="http://schemas.microsoft.com/office/drawing/2010/main" xmlns:m="http://schemas.openxmlformats.org/officeDocument/2006/math" xmlns="" val="1"/>
             </a:ext>
           </a:extLst>
         </p:spPr>
@@ -19586,7 +19850,7 @@
           </a:ln>
           <a:extLst>
             <a:ext uri="{C572A759-6A51-4108-AA02-DFA0A04FC94B}">
-              <ma14:wrappingTextBoxFlag xmlns="" xmlns:m="http://schemas.openxmlformats.org/officeDocument/2006/math" xmlns:a14="http://schemas.microsoft.com/office/drawing/2010/main" xmlns:ma14="http://schemas.microsoft.com/office/mac/drawingml/2011/main" val="1"/>
+              <ma14:wrappingTextBoxFlag xmlns:ma14="http://schemas.microsoft.com/office/mac/drawingml/2011/main" xmlns:a14="http://schemas.microsoft.com/office/drawing/2010/main" xmlns:m="http://schemas.openxmlformats.org/officeDocument/2006/math" xmlns="" val="1"/>
             </a:ext>
           </a:extLst>
         </p:spPr>
@@ -19638,7 +19902,7 @@
           </a:ln>
           <a:extLst>
             <a:ext uri="{C572A759-6A51-4108-AA02-DFA0A04FC94B}">
-              <ma14:wrappingTextBoxFlag xmlns="" xmlns:m="http://schemas.openxmlformats.org/officeDocument/2006/math" xmlns:a14="http://schemas.microsoft.com/office/drawing/2010/main" xmlns:ma14="http://schemas.microsoft.com/office/mac/drawingml/2011/main" val="1"/>
+              <ma14:wrappingTextBoxFlag xmlns:ma14="http://schemas.microsoft.com/office/mac/drawingml/2011/main" xmlns:a14="http://schemas.microsoft.com/office/drawing/2010/main" xmlns:m="http://schemas.openxmlformats.org/officeDocument/2006/math" xmlns="" val="1"/>
             </a:ext>
           </a:extLst>
         </p:spPr>
@@ -20913,7 +21177,7 @@
           </a:ln>
           <a:extLst>
             <a:ext uri="{C572A759-6A51-4108-AA02-DFA0A04FC94B}">
-              <ma14:wrappingTextBoxFlag xmlns="" xmlns:m="http://schemas.openxmlformats.org/officeDocument/2006/math" xmlns:a14="http://schemas.microsoft.com/office/drawing/2010/main" xmlns:ma14="http://schemas.microsoft.com/office/mac/drawingml/2011/main" val="1"/>
+              <ma14:wrappingTextBoxFlag xmlns:ma14="http://schemas.microsoft.com/office/mac/drawingml/2011/main" xmlns:a14="http://schemas.microsoft.com/office/drawing/2010/main" xmlns:m="http://schemas.openxmlformats.org/officeDocument/2006/math" xmlns="" val="1"/>
             </a:ext>
           </a:extLst>
         </p:spPr>
@@ -21862,7 +22126,7 @@
           </a:ln>
           <a:extLst>
             <a:ext uri="{C572A759-6A51-4108-AA02-DFA0A04FC94B}">
-              <ma14:wrappingTextBoxFlag xmlns="" xmlns:m="http://schemas.openxmlformats.org/officeDocument/2006/math" xmlns:a14="http://schemas.microsoft.com/office/drawing/2010/main" xmlns:ma14="http://schemas.microsoft.com/office/mac/drawingml/2011/main" val="1"/>
+              <ma14:wrappingTextBoxFlag xmlns:ma14="http://schemas.microsoft.com/office/mac/drawingml/2011/main" xmlns:a14="http://schemas.microsoft.com/office/drawing/2010/main" xmlns:m="http://schemas.openxmlformats.org/officeDocument/2006/math" xmlns="" val="1"/>
             </a:ext>
           </a:extLst>
         </p:spPr>
@@ -23160,7 +23424,7 @@
           </a:ln>
           <a:extLst>
             <a:ext uri="{C572A759-6A51-4108-AA02-DFA0A04FC94B}">
-              <ma14:wrappingTextBoxFlag xmlns="" xmlns:m="http://schemas.openxmlformats.org/officeDocument/2006/math" xmlns:a14="http://schemas.microsoft.com/office/drawing/2010/main" xmlns:ma14="http://schemas.microsoft.com/office/mac/drawingml/2011/main" val="1"/>
+              <ma14:wrappingTextBoxFlag xmlns:ma14="http://schemas.microsoft.com/office/mac/drawingml/2011/main" xmlns:a14="http://schemas.microsoft.com/office/drawing/2010/main" xmlns:m="http://schemas.openxmlformats.org/officeDocument/2006/math" xmlns="" val="1"/>
             </a:ext>
           </a:extLst>
         </p:spPr>
@@ -23247,7 +23511,7 @@
           </a:ln>
           <a:extLst>
             <a:ext uri="{C572A759-6A51-4108-AA02-DFA0A04FC94B}">
-              <ma14:wrappingTextBoxFlag xmlns="" xmlns:m="http://schemas.openxmlformats.org/officeDocument/2006/math" xmlns:a14="http://schemas.microsoft.com/office/drawing/2010/main" xmlns:ma14="http://schemas.microsoft.com/office/mac/drawingml/2011/main" val="1"/>
+              <ma14:wrappingTextBoxFlag xmlns:ma14="http://schemas.microsoft.com/office/mac/drawingml/2011/main" xmlns:a14="http://schemas.microsoft.com/office/drawing/2010/main" xmlns:m="http://schemas.openxmlformats.org/officeDocument/2006/math" xmlns="" val="1"/>
             </a:ext>
           </a:extLst>
         </p:spPr>
@@ -23335,7 +23599,7 @@
           </a:ln>
           <a:extLst>
             <a:ext uri="{C572A759-6A51-4108-AA02-DFA0A04FC94B}">
-              <ma14:wrappingTextBoxFlag xmlns="" xmlns:m="http://schemas.openxmlformats.org/officeDocument/2006/math" xmlns:a14="http://schemas.microsoft.com/office/drawing/2010/main" xmlns:ma14="http://schemas.microsoft.com/office/mac/drawingml/2011/main" val="1"/>
+              <ma14:wrappingTextBoxFlag xmlns:ma14="http://schemas.microsoft.com/office/mac/drawingml/2011/main" xmlns:a14="http://schemas.microsoft.com/office/drawing/2010/main" xmlns:m="http://schemas.openxmlformats.org/officeDocument/2006/math" xmlns="" val="1"/>
             </a:ext>
           </a:extLst>
         </p:spPr>
@@ -23422,7 +23686,7 @@
           </a:ln>
           <a:extLst>
             <a:ext uri="{C572A759-6A51-4108-AA02-DFA0A04FC94B}">
-              <ma14:wrappingTextBoxFlag xmlns="" xmlns:m="http://schemas.openxmlformats.org/officeDocument/2006/math" xmlns:a14="http://schemas.microsoft.com/office/drawing/2010/main" xmlns:ma14="http://schemas.microsoft.com/office/mac/drawingml/2011/main" val="1"/>
+              <ma14:wrappingTextBoxFlag xmlns:ma14="http://schemas.microsoft.com/office/mac/drawingml/2011/main" xmlns:a14="http://schemas.microsoft.com/office/drawing/2010/main" xmlns:m="http://schemas.openxmlformats.org/officeDocument/2006/math" xmlns="" val="1"/>
             </a:ext>
           </a:extLst>
         </p:spPr>
@@ -23754,7 +24018,7 @@
           </a:ln>
           <a:extLst>
             <a:ext uri="{C572A759-6A51-4108-AA02-DFA0A04FC94B}">
-              <ma14:wrappingTextBoxFlag xmlns="" xmlns:m="http://schemas.openxmlformats.org/officeDocument/2006/math" xmlns:a14="http://schemas.microsoft.com/office/drawing/2010/main" xmlns:ma14="http://schemas.microsoft.com/office/mac/drawingml/2011/main" val="1"/>
+              <ma14:wrappingTextBoxFlag xmlns:ma14="http://schemas.microsoft.com/office/mac/drawingml/2011/main" xmlns:a14="http://schemas.microsoft.com/office/drawing/2010/main" xmlns:m="http://schemas.openxmlformats.org/officeDocument/2006/math" xmlns="" val="1"/>
             </a:ext>
           </a:extLst>
         </p:spPr>
@@ -23806,7 +24070,7 @@
           </a:ln>
           <a:extLst>
             <a:ext uri="{C572A759-6A51-4108-AA02-DFA0A04FC94B}">
-              <ma14:wrappingTextBoxFlag xmlns="" xmlns:m="http://schemas.openxmlformats.org/officeDocument/2006/math" xmlns:a14="http://schemas.microsoft.com/office/drawing/2010/main" xmlns:ma14="http://schemas.microsoft.com/office/mac/drawingml/2011/main" val="1"/>
+              <ma14:wrappingTextBoxFlag xmlns:ma14="http://schemas.microsoft.com/office/mac/drawingml/2011/main" xmlns:a14="http://schemas.microsoft.com/office/drawing/2010/main" xmlns:m="http://schemas.openxmlformats.org/officeDocument/2006/math" xmlns="" val="1"/>
             </a:ext>
           </a:extLst>
         </p:spPr>
@@ -23858,7 +24122,7 @@
           </a:ln>
           <a:extLst>
             <a:ext uri="{C572A759-6A51-4108-AA02-DFA0A04FC94B}">
-              <ma14:wrappingTextBoxFlag xmlns="" xmlns:m="http://schemas.openxmlformats.org/officeDocument/2006/math" xmlns:a14="http://schemas.microsoft.com/office/drawing/2010/main" xmlns:ma14="http://schemas.microsoft.com/office/mac/drawingml/2011/main" val="1"/>
+              <ma14:wrappingTextBoxFlag xmlns:ma14="http://schemas.microsoft.com/office/mac/drawingml/2011/main" xmlns:a14="http://schemas.microsoft.com/office/drawing/2010/main" xmlns:m="http://schemas.openxmlformats.org/officeDocument/2006/math" xmlns="" val="1"/>
             </a:ext>
           </a:extLst>
         </p:spPr>
@@ -23910,7 +24174,7 @@
           </a:ln>
           <a:extLst>
             <a:ext uri="{C572A759-6A51-4108-AA02-DFA0A04FC94B}">
-              <ma14:wrappingTextBoxFlag xmlns="" xmlns:m="http://schemas.openxmlformats.org/officeDocument/2006/math" xmlns:a14="http://schemas.microsoft.com/office/drawing/2010/main" xmlns:ma14="http://schemas.microsoft.com/office/mac/drawingml/2011/main" val="1"/>
+              <ma14:wrappingTextBoxFlag xmlns:ma14="http://schemas.microsoft.com/office/mac/drawingml/2011/main" xmlns:a14="http://schemas.microsoft.com/office/drawing/2010/main" xmlns:m="http://schemas.openxmlformats.org/officeDocument/2006/math" xmlns="" val="1"/>
             </a:ext>
           </a:extLst>
         </p:spPr>
@@ -23962,7 +24226,7 @@
           </a:ln>
           <a:extLst>
             <a:ext uri="{C572A759-6A51-4108-AA02-DFA0A04FC94B}">
-              <ma14:wrappingTextBoxFlag xmlns="" xmlns:m="http://schemas.openxmlformats.org/officeDocument/2006/math" xmlns:a14="http://schemas.microsoft.com/office/drawing/2010/main" xmlns:ma14="http://schemas.microsoft.com/office/mac/drawingml/2011/main" val="1"/>
+              <ma14:wrappingTextBoxFlag xmlns:ma14="http://schemas.microsoft.com/office/mac/drawingml/2011/main" xmlns:a14="http://schemas.microsoft.com/office/drawing/2010/main" xmlns:m="http://schemas.openxmlformats.org/officeDocument/2006/math" xmlns="" val="1"/>
             </a:ext>
           </a:extLst>
         </p:spPr>
@@ -24014,7 +24278,7 @@
           </a:ln>
           <a:extLst>
             <a:ext uri="{C572A759-6A51-4108-AA02-DFA0A04FC94B}">
-              <ma14:wrappingTextBoxFlag xmlns="" xmlns:m="http://schemas.openxmlformats.org/officeDocument/2006/math" xmlns:a14="http://schemas.microsoft.com/office/drawing/2010/main" xmlns:ma14="http://schemas.microsoft.com/office/mac/drawingml/2011/main" val="1"/>
+              <ma14:wrappingTextBoxFlag xmlns:ma14="http://schemas.microsoft.com/office/mac/drawingml/2011/main" xmlns:a14="http://schemas.microsoft.com/office/drawing/2010/main" xmlns:m="http://schemas.openxmlformats.org/officeDocument/2006/math" xmlns="" val="1"/>
             </a:ext>
           </a:extLst>
         </p:spPr>
@@ -24066,7 +24330,7 @@
           </a:ln>
           <a:extLst>
             <a:ext uri="{C572A759-6A51-4108-AA02-DFA0A04FC94B}">
-              <ma14:wrappingTextBoxFlag xmlns="" xmlns:m="http://schemas.openxmlformats.org/officeDocument/2006/math" xmlns:a14="http://schemas.microsoft.com/office/drawing/2010/main" xmlns:ma14="http://schemas.microsoft.com/office/mac/drawingml/2011/main" val="1"/>
+              <ma14:wrappingTextBoxFlag xmlns:ma14="http://schemas.microsoft.com/office/mac/drawingml/2011/main" xmlns:a14="http://schemas.microsoft.com/office/drawing/2010/main" xmlns:m="http://schemas.openxmlformats.org/officeDocument/2006/math" xmlns="" val="1"/>
             </a:ext>
           </a:extLst>
         </p:spPr>
@@ -24118,7 +24382,7 @@
           </a:ln>
           <a:extLst>
             <a:ext uri="{C572A759-6A51-4108-AA02-DFA0A04FC94B}">
-              <ma14:wrappingTextBoxFlag xmlns="" xmlns:m="http://schemas.openxmlformats.org/officeDocument/2006/math" xmlns:a14="http://schemas.microsoft.com/office/drawing/2010/main" xmlns:ma14="http://schemas.microsoft.com/office/mac/drawingml/2011/main" val="1"/>
+              <ma14:wrappingTextBoxFlag xmlns:ma14="http://schemas.microsoft.com/office/mac/drawingml/2011/main" xmlns:a14="http://schemas.microsoft.com/office/drawing/2010/main" xmlns:m="http://schemas.openxmlformats.org/officeDocument/2006/math" xmlns="" val="1"/>
             </a:ext>
           </a:extLst>
         </p:spPr>
@@ -24205,7 +24469,7 @@
           </a:ln>
           <a:extLst>
             <a:ext uri="{C572A759-6A51-4108-AA02-DFA0A04FC94B}">
-              <ma14:wrappingTextBoxFlag xmlns="" xmlns:m="http://schemas.openxmlformats.org/officeDocument/2006/math" xmlns:a14="http://schemas.microsoft.com/office/drawing/2010/main" xmlns:ma14="http://schemas.microsoft.com/office/mac/drawingml/2011/main" val="1"/>
+              <ma14:wrappingTextBoxFlag xmlns:ma14="http://schemas.microsoft.com/office/mac/drawingml/2011/main" xmlns:a14="http://schemas.microsoft.com/office/drawing/2010/main" xmlns:m="http://schemas.openxmlformats.org/officeDocument/2006/math" xmlns="" val="1"/>
             </a:ext>
           </a:extLst>
         </p:spPr>
@@ -24292,7 +24556,7 @@
           </a:ln>
           <a:extLst>
             <a:ext uri="{C572A759-6A51-4108-AA02-DFA0A04FC94B}">
-              <ma14:wrappingTextBoxFlag xmlns="" xmlns:m="http://schemas.openxmlformats.org/officeDocument/2006/math" xmlns:a14="http://schemas.microsoft.com/office/drawing/2010/main" xmlns:ma14="http://schemas.microsoft.com/office/mac/drawingml/2011/main" val="1"/>
+              <ma14:wrappingTextBoxFlag xmlns:ma14="http://schemas.microsoft.com/office/mac/drawingml/2011/main" xmlns:a14="http://schemas.microsoft.com/office/drawing/2010/main" xmlns:m="http://schemas.openxmlformats.org/officeDocument/2006/math" xmlns="" val="1"/>
             </a:ext>
           </a:extLst>
         </p:spPr>
@@ -24375,7 +24639,7 @@
           </a:ln>
           <a:extLst>
             <a:ext uri="{C572A759-6A51-4108-AA02-DFA0A04FC94B}">
-              <ma14:wrappingTextBoxFlag xmlns="" xmlns:m="http://schemas.openxmlformats.org/officeDocument/2006/math" xmlns:a14="http://schemas.microsoft.com/office/drawing/2010/main" xmlns:ma14="http://schemas.microsoft.com/office/mac/drawingml/2011/main" val="1"/>
+              <ma14:wrappingTextBoxFlag xmlns:ma14="http://schemas.microsoft.com/office/mac/drawingml/2011/main" xmlns:a14="http://schemas.microsoft.com/office/drawing/2010/main" xmlns:m="http://schemas.openxmlformats.org/officeDocument/2006/math" xmlns="" val="1"/>
             </a:ext>
           </a:extLst>
         </p:spPr>
@@ -24427,7 +24691,7 @@
           </a:ln>
           <a:extLst>
             <a:ext uri="{C572A759-6A51-4108-AA02-DFA0A04FC94B}">
-              <ma14:wrappingTextBoxFlag xmlns="" xmlns:m="http://schemas.openxmlformats.org/officeDocument/2006/math" xmlns:a14="http://schemas.microsoft.com/office/drawing/2010/main" xmlns:ma14="http://schemas.microsoft.com/office/mac/drawingml/2011/main" val="1"/>
+              <ma14:wrappingTextBoxFlag xmlns:ma14="http://schemas.microsoft.com/office/mac/drawingml/2011/main" xmlns:a14="http://schemas.microsoft.com/office/drawing/2010/main" xmlns:m="http://schemas.openxmlformats.org/officeDocument/2006/math" xmlns="" val="1"/>
             </a:ext>
           </a:extLst>
         </p:spPr>
@@ -24475,7 +24739,7 @@
           </a:ln>
           <a:extLst>
             <a:ext uri="{C572A759-6A51-4108-AA02-DFA0A04FC94B}">
-              <ma14:wrappingTextBoxFlag xmlns="" xmlns:m="http://schemas.openxmlformats.org/officeDocument/2006/math" xmlns:a14="http://schemas.microsoft.com/office/drawing/2010/main" xmlns:ma14="http://schemas.microsoft.com/office/mac/drawingml/2011/main" val="1"/>
+              <ma14:wrappingTextBoxFlag xmlns:ma14="http://schemas.microsoft.com/office/mac/drawingml/2011/main" xmlns:a14="http://schemas.microsoft.com/office/drawing/2010/main" xmlns:m="http://schemas.openxmlformats.org/officeDocument/2006/math" xmlns="" val="1"/>
             </a:ext>
           </a:extLst>
         </p:spPr>
@@ -24612,7 +24876,7 @@
 </p:sld>
 </file>
 
-<file path=ppt/slides/slide3.xml><?xml version="1.0" encoding="utf-8"?>
+<file path=ppt/slides/slide4.xml><?xml version="1.0" encoding="utf-8"?>
 <p:sld xmlns:a="http://schemas.openxmlformats.org/drawingml/2006/main" xmlns:r="http://schemas.openxmlformats.org/officeDocument/2006/relationships" xmlns:p="http://schemas.openxmlformats.org/presentationml/2006/main">
   <p:cSld>
     <p:spTree>
@@ -24660,7 +24924,7 @@
           </a:ln>
           <a:extLst>
             <a:ext uri="{C572A759-6A51-4108-AA02-DFA0A04FC94B}">
-              <ma14:wrappingTextBoxFlag xmlns:ma14="http://schemas.microsoft.com/office/mac/drawingml/2011/main" xmlns:a14="http://schemas.microsoft.com/office/drawing/2010/main" xmlns:m="http://schemas.openxmlformats.org/officeDocument/2006/math" xmlns="" val="1"/>
+              <ma14:wrappingTextBoxFlag xmlns="" xmlns:m="http://schemas.openxmlformats.org/officeDocument/2006/math" xmlns:a14="http://schemas.microsoft.com/office/drawing/2010/main" xmlns:ma14="http://schemas.microsoft.com/office/mac/drawingml/2011/main" val="1"/>
             </a:ext>
           </a:extLst>
         </p:spPr>
@@ -24737,7 +25001,7 @@
           </a:ln>
           <a:extLst>
             <a:ext uri="{C572A759-6A51-4108-AA02-DFA0A04FC94B}">
-              <ma14:wrappingTextBoxFlag xmlns:ma14="http://schemas.microsoft.com/office/mac/drawingml/2011/main" xmlns:a14="http://schemas.microsoft.com/office/drawing/2010/main" xmlns:m="http://schemas.openxmlformats.org/officeDocument/2006/math" xmlns="" val="1"/>
+              <ma14:wrappingTextBoxFlag xmlns="" xmlns:m="http://schemas.openxmlformats.org/officeDocument/2006/math" xmlns:a14="http://schemas.microsoft.com/office/drawing/2010/main" xmlns:ma14="http://schemas.microsoft.com/office/mac/drawingml/2011/main" val="1"/>
             </a:ext>
           </a:extLst>
         </p:spPr>
@@ -25735,7 +25999,7 @@
           </a:ln>
           <a:extLst>
             <a:ext uri="{C572A759-6A51-4108-AA02-DFA0A04FC94B}">
-              <ma14:wrappingTextBoxFlag xmlns:ma14="http://schemas.microsoft.com/office/mac/drawingml/2011/main" xmlns:a14="http://schemas.microsoft.com/office/drawing/2010/main" xmlns:m="http://schemas.openxmlformats.org/officeDocument/2006/math" xmlns="" val="1"/>
+              <ma14:wrappingTextBoxFlag xmlns="" xmlns:m="http://schemas.openxmlformats.org/officeDocument/2006/math" xmlns:a14="http://schemas.microsoft.com/office/drawing/2010/main" xmlns:ma14="http://schemas.microsoft.com/office/mac/drawingml/2011/main" val="1"/>
             </a:ext>
           </a:extLst>
         </p:spPr>
@@ -25823,7 +26087,7 @@
           </a:ln>
           <a:extLst>
             <a:ext uri="{C572A759-6A51-4108-AA02-DFA0A04FC94B}">
-              <ma14:wrappingTextBoxFlag xmlns:ma14="http://schemas.microsoft.com/office/mac/drawingml/2011/main" xmlns:a14="http://schemas.microsoft.com/office/drawing/2010/main" xmlns:m="http://schemas.openxmlformats.org/officeDocument/2006/math" xmlns="" val="1"/>
+              <ma14:wrappingTextBoxFlag xmlns="" xmlns:m="http://schemas.openxmlformats.org/officeDocument/2006/math" xmlns:a14="http://schemas.microsoft.com/office/drawing/2010/main" xmlns:ma14="http://schemas.microsoft.com/office/mac/drawingml/2011/main" val="1"/>
             </a:ext>
           </a:extLst>
         </p:spPr>
@@ -25902,7 +26166,7 @@
           </a:ln>
           <a:extLst>
             <a:ext uri="{C572A759-6A51-4108-AA02-DFA0A04FC94B}">
-              <ma14:wrappingTextBoxFlag xmlns:ma14="http://schemas.microsoft.com/office/mac/drawingml/2011/main" xmlns:a14="http://schemas.microsoft.com/office/drawing/2010/main" xmlns:m="http://schemas.openxmlformats.org/officeDocument/2006/math" xmlns="" val="1"/>
+              <ma14:wrappingTextBoxFlag xmlns="" xmlns:m="http://schemas.openxmlformats.org/officeDocument/2006/math" xmlns:a14="http://schemas.microsoft.com/office/drawing/2010/main" xmlns:ma14="http://schemas.microsoft.com/office/mac/drawingml/2011/main" val="1"/>
             </a:ext>
           </a:extLst>
         </p:spPr>
@@ -25986,7 +26250,7 @@
           </a:ln>
           <a:extLst>
             <a:ext uri="{C572A759-6A51-4108-AA02-DFA0A04FC94B}">
-              <ma14:wrappingTextBoxFlag xmlns:ma14="http://schemas.microsoft.com/office/mac/drawingml/2011/main" xmlns:a14="http://schemas.microsoft.com/office/drawing/2010/main" xmlns:m="http://schemas.openxmlformats.org/officeDocument/2006/math" xmlns="" val="1"/>
+              <ma14:wrappingTextBoxFlag xmlns="" xmlns:m="http://schemas.openxmlformats.org/officeDocument/2006/math" xmlns:a14="http://schemas.microsoft.com/office/drawing/2010/main" xmlns:ma14="http://schemas.microsoft.com/office/mac/drawingml/2011/main" val="1"/>
             </a:ext>
           </a:extLst>
         </p:spPr>
@@ -26065,7 +26329,7 @@
           </a:ln>
           <a:extLst>
             <a:ext uri="{C572A759-6A51-4108-AA02-DFA0A04FC94B}">
-              <ma14:wrappingTextBoxFlag xmlns:ma14="http://schemas.microsoft.com/office/mac/drawingml/2011/main" xmlns:a14="http://schemas.microsoft.com/office/drawing/2010/main" xmlns:m="http://schemas.openxmlformats.org/officeDocument/2006/math" xmlns="" val="1"/>
+              <ma14:wrappingTextBoxFlag xmlns="" xmlns:m="http://schemas.openxmlformats.org/officeDocument/2006/math" xmlns:a14="http://schemas.microsoft.com/office/drawing/2010/main" xmlns:ma14="http://schemas.microsoft.com/office/mac/drawingml/2011/main" val="1"/>
             </a:ext>
           </a:extLst>
         </p:spPr>
@@ -26142,7 +26406,7 @@
           </a:ln>
           <a:extLst>
             <a:ext uri="{C572A759-6A51-4108-AA02-DFA0A04FC94B}">
-              <ma14:wrappingTextBoxFlag xmlns:ma14="http://schemas.microsoft.com/office/mac/drawingml/2011/main" xmlns:a14="http://schemas.microsoft.com/office/drawing/2010/main" xmlns:m="http://schemas.openxmlformats.org/officeDocument/2006/math" xmlns="" val="1"/>
+              <ma14:wrappingTextBoxFlag xmlns="" xmlns:m="http://schemas.openxmlformats.org/officeDocument/2006/math" xmlns:a14="http://schemas.microsoft.com/office/drawing/2010/main" xmlns:ma14="http://schemas.microsoft.com/office/mac/drawingml/2011/main" val="1"/>
             </a:ext>
           </a:extLst>
         </p:spPr>
@@ -26221,7 +26485,7 @@
           </a:ln>
           <a:extLst>
             <a:ext uri="{C572A759-6A51-4108-AA02-DFA0A04FC94B}">
-              <ma14:wrappingTextBoxFlag xmlns:ma14="http://schemas.microsoft.com/office/mac/drawingml/2011/main" xmlns:a14="http://schemas.microsoft.com/office/drawing/2010/main" xmlns:m="http://schemas.openxmlformats.org/officeDocument/2006/math" xmlns="" val="1"/>
+              <ma14:wrappingTextBoxFlag xmlns="" xmlns:m="http://schemas.openxmlformats.org/officeDocument/2006/math" xmlns:a14="http://schemas.microsoft.com/office/drawing/2010/main" xmlns:ma14="http://schemas.microsoft.com/office/mac/drawingml/2011/main" val="1"/>
             </a:ext>
           </a:extLst>
         </p:spPr>
@@ -26304,7 +26568,7 @@
           </a:ln>
           <a:extLst>
             <a:ext uri="{C572A759-6A51-4108-AA02-DFA0A04FC94B}">
-              <ma14:wrappingTextBoxFlag xmlns:ma14="http://schemas.microsoft.com/office/mac/drawingml/2011/main" xmlns:a14="http://schemas.microsoft.com/office/drawing/2010/main" xmlns:m="http://schemas.openxmlformats.org/officeDocument/2006/math" xmlns="" val="1"/>
+              <ma14:wrappingTextBoxFlag xmlns="" xmlns:m="http://schemas.openxmlformats.org/officeDocument/2006/math" xmlns:a14="http://schemas.microsoft.com/office/drawing/2010/main" xmlns:ma14="http://schemas.microsoft.com/office/mac/drawingml/2011/main" val="1"/>
             </a:ext>
           </a:extLst>
         </p:spPr>
@@ -26352,7 +26616,7 @@
           </a:ln>
           <a:extLst>
             <a:ext uri="{C572A759-6A51-4108-AA02-DFA0A04FC94B}">
-              <ma14:wrappingTextBoxFlag xmlns:ma14="http://schemas.microsoft.com/office/mac/drawingml/2011/main" xmlns:a14="http://schemas.microsoft.com/office/drawing/2010/main" xmlns:m="http://schemas.openxmlformats.org/officeDocument/2006/math" xmlns="" val="1"/>
+              <ma14:wrappingTextBoxFlag xmlns="" xmlns:m="http://schemas.openxmlformats.org/officeDocument/2006/math" xmlns:a14="http://schemas.microsoft.com/office/drawing/2010/main" xmlns:ma14="http://schemas.microsoft.com/office/mac/drawingml/2011/main" val="1"/>
             </a:ext>
           </a:extLst>
         </p:spPr>
@@ -27821,7 +28085,7 @@
           </a:ln>
           <a:extLst>
             <a:ext uri="{C572A759-6A51-4108-AA02-DFA0A04FC94B}">
-              <ma14:wrappingTextBoxFlag xmlns:ma14="http://schemas.microsoft.com/office/mac/drawingml/2011/main" xmlns:a14="http://schemas.microsoft.com/office/drawing/2010/main" xmlns:m="http://schemas.openxmlformats.org/officeDocument/2006/math" xmlns="" val="1"/>
+              <ma14:wrappingTextBoxFlag xmlns="" xmlns:m="http://schemas.openxmlformats.org/officeDocument/2006/math" xmlns:a14="http://schemas.microsoft.com/office/drawing/2010/main" xmlns:ma14="http://schemas.microsoft.com/office/mac/drawingml/2011/main" val="1"/>
             </a:ext>
           </a:extLst>
         </p:spPr>
@@ -28330,7 +28594,7 @@
           </a:ln>
           <a:extLst>
             <a:ext uri="{C572A759-6A51-4108-AA02-DFA0A04FC94B}">
-              <ma14:wrappingTextBoxFlag xmlns:ma14="http://schemas.microsoft.com/office/mac/drawingml/2011/main" xmlns:a14="http://schemas.microsoft.com/office/drawing/2010/main" xmlns:m="http://schemas.openxmlformats.org/officeDocument/2006/math" xmlns="" val="1"/>
+              <ma14:wrappingTextBoxFlag xmlns="" xmlns:m="http://schemas.openxmlformats.org/officeDocument/2006/math" xmlns:a14="http://schemas.microsoft.com/office/drawing/2010/main" xmlns:ma14="http://schemas.microsoft.com/office/mac/drawingml/2011/main" val="1"/>
             </a:ext>
           </a:extLst>
         </p:spPr>
@@ -28418,7 +28682,7 @@
           </a:ln>
           <a:extLst>
             <a:ext uri="{C572A759-6A51-4108-AA02-DFA0A04FC94B}">
-              <ma14:wrappingTextBoxFlag xmlns:ma14="http://schemas.microsoft.com/office/mac/drawingml/2011/main" xmlns:a14="http://schemas.microsoft.com/office/drawing/2010/main" xmlns:m="http://schemas.openxmlformats.org/officeDocument/2006/math" xmlns="" val="1"/>
+              <ma14:wrappingTextBoxFlag xmlns="" xmlns:m="http://schemas.openxmlformats.org/officeDocument/2006/math" xmlns:a14="http://schemas.microsoft.com/office/drawing/2010/main" xmlns:ma14="http://schemas.microsoft.com/office/mac/drawingml/2011/main" val="1"/>
             </a:ext>
           </a:extLst>
         </p:spPr>
@@ -28470,7 +28734,7 @@
           </a:ln>
           <a:extLst>
             <a:ext uri="{C572A759-6A51-4108-AA02-DFA0A04FC94B}">
-              <ma14:wrappingTextBoxFlag xmlns:ma14="http://schemas.microsoft.com/office/mac/drawingml/2011/main" xmlns:a14="http://schemas.microsoft.com/office/drawing/2010/main" xmlns:m="http://schemas.openxmlformats.org/officeDocument/2006/math" xmlns="" val="1"/>
+              <ma14:wrappingTextBoxFlag xmlns="" xmlns:m="http://schemas.openxmlformats.org/officeDocument/2006/math" xmlns:a14="http://schemas.microsoft.com/office/drawing/2010/main" xmlns:ma14="http://schemas.microsoft.com/office/mac/drawingml/2011/main" val="1"/>
             </a:ext>
           </a:extLst>
         </p:spPr>
@@ -29647,7 +29911,7 @@
           </a:ln>
           <a:extLst>
             <a:ext uri="{C572A759-6A51-4108-AA02-DFA0A04FC94B}">
-              <ma14:wrappingTextBoxFlag xmlns:ma14="http://schemas.microsoft.com/office/mac/drawingml/2011/main" xmlns:a14="http://schemas.microsoft.com/office/drawing/2010/main" xmlns:m="http://schemas.openxmlformats.org/officeDocument/2006/math" xmlns="" val="1"/>
+              <ma14:wrappingTextBoxFlag xmlns="" xmlns:m="http://schemas.openxmlformats.org/officeDocument/2006/math" xmlns:a14="http://schemas.microsoft.com/office/drawing/2010/main" xmlns:ma14="http://schemas.microsoft.com/office/mac/drawingml/2011/main" val="1"/>
             </a:ext>
           </a:extLst>
         </p:spPr>
@@ -29699,7 +29963,7 @@
           </a:ln>
           <a:extLst>
             <a:ext uri="{C572A759-6A51-4108-AA02-DFA0A04FC94B}">
-              <ma14:wrappingTextBoxFlag xmlns:ma14="http://schemas.microsoft.com/office/mac/drawingml/2011/main" xmlns:a14="http://schemas.microsoft.com/office/drawing/2010/main" xmlns:m="http://schemas.openxmlformats.org/officeDocument/2006/math" xmlns="" val="1"/>
+              <ma14:wrappingTextBoxFlag xmlns="" xmlns:m="http://schemas.openxmlformats.org/officeDocument/2006/math" xmlns:a14="http://schemas.microsoft.com/office/drawing/2010/main" xmlns:ma14="http://schemas.microsoft.com/office/mac/drawingml/2011/main" val="1"/>
             </a:ext>
           </a:extLst>
         </p:spPr>
@@ -29751,7 +30015,7 @@
           </a:ln>
           <a:extLst>
             <a:ext uri="{C572A759-6A51-4108-AA02-DFA0A04FC94B}">
-              <ma14:wrappingTextBoxFlag xmlns:ma14="http://schemas.microsoft.com/office/mac/drawingml/2011/main" xmlns:a14="http://schemas.microsoft.com/office/drawing/2010/main" xmlns:m="http://schemas.openxmlformats.org/officeDocument/2006/math" xmlns="" val="1"/>
+              <ma14:wrappingTextBoxFlag xmlns="" xmlns:m="http://schemas.openxmlformats.org/officeDocument/2006/math" xmlns:a14="http://schemas.microsoft.com/office/drawing/2010/main" xmlns:ma14="http://schemas.microsoft.com/office/mac/drawingml/2011/main" val="1"/>
             </a:ext>
           </a:extLst>
         </p:spPr>
@@ -29803,7 +30067,7 @@
           </a:ln>
           <a:extLst>
             <a:ext uri="{C572A759-6A51-4108-AA02-DFA0A04FC94B}">
-              <ma14:wrappingTextBoxFlag xmlns:ma14="http://schemas.microsoft.com/office/mac/drawingml/2011/main" xmlns:a14="http://schemas.microsoft.com/office/drawing/2010/main" xmlns:m="http://schemas.openxmlformats.org/officeDocument/2006/math" xmlns="" val="1"/>
+              <ma14:wrappingTextBoxFlag xmlns="" xmlns:m="http://schemas.openxmlformats.org/officeDocument/2006/math" xmlns:a14="http://schemas.microsoft.com/office/drawing/2010/main" xmlns:ma14="http://schemas.microsoft.com/office/mac/drawingml/2011/main" val="1"/>
             </a:ext>
           </a:extLst>
         </p:spPr>
@@ -29855,7 +30119,7 @@
           </a:ln>
           <a:extLst>
             <a:ext uri="{C572A759-6A51-4108-AA02-DFA0A04FC94B}">
-              <ma14:wrappingTextBoxFlag xmlns:ma14="http://schemas.microsoft.com/office/mac/drawingml/2011/main" xmlns:a14="http://schemas.microsoft.com/office/drawing/2010/main" xmlns:m="http://schemas.openxmlformats.org/officeDocument/2006/math" xmlns="" val="1"/>
+              <ma14:wrappingTextBoxFlag xmlns="" xmlns:m="http://schemas.openxmlformats.org/officeDocument/2006/math" xmlns:a14="http://schemas.microsoft.com/office/drawing/2010/main" xmlns:ma14="http://schemas.microsoft.com/office/mac/drawingml/2011/main" val="1"/>
             </a:ext>
           </a:extLst>
         </p:spPr>
@@ -29907,7 +30171,7 @@
           </a:ln>
           <a:extLst>
             <a:ext uri="{C572A759-6A51-4108-AA02-DFA0A04FC94B}">
-              <ma14:wrappingTextBoxFlag xmlns:ma14="http://schemas.microsoft.com/office/mac/drawingml/2011/main" xmlns:a14="http://schemas.microsoft.com/office/drawing/2010/main" xmlns:m="http://schemas.openxmlformats.org/officeDocument/2006/math" xmlns="" val="1"/>
+              <ma14:wrappingTextBoxFlag xmlns="" xmlns:m="http://schemas.openxmlformats.org/officeDocument/2006/math" xmlns:a14="http://schemas.microsoft.com/office/drawing/2010/main" xmlns:ma14="http://schemas.microsoft.com/office/mac/drawingml/2011/main" val="1"/>
             </a:ext>
           </a:extLst>
         </p:spPr>
@@ -29959,7 +30223,7 @@
           </a:ln>
           <a:extLst>
             <a:ext uri="{C572A759-6A51-4108-AA02-DFA0A04FC94B}">
-              <ma14:wrappingTextBoxFlag xmlns:ma14="http://schemas.microsoft.com/office/mac/drawingml/2011/main" xmlns:a14="http://schemas.microsoft.com/office/drawing/2010/main" xmlns:m="http://schemas.openxmlformats.org/officeDocument/2006/math" xmlns="" val="1"/>
+              <ma14:wrappingTextBoxFlag xmlns="" xmlns:m="http://schemas.openxmlformats.org/officeDocument/2006/math" xmlns:a14="http://schemas.microsoft.com/office/drawing/2010/main" xmlns:ma14="http://schemas.microsoft.com/office/mac/drawingml/2011/main" val="1"/>
             </a:ext>
           </a:extLst>
         </p:spPr>
@@ -30011,7 +30275,7 @@
           </a:ln>
           <a:extLst>
             <a:ext uri="{C572A759-6A51-4108-AA02-DFA0A04FC94B}">
-              <ma14:wrappingTextBoxFlag xmlns:ma14="http://schemas.microsoft.com/office/mac/drawingml/2011/main" xmlns:a14="http://schemas.microsoft.com/office/drawing/2010/main" xmlns:m="http://schemas.openxmlformats.org/officeDocument/2006/math" xmlns="" val="1"/>
+              <ma14:wrappingTextBoxFlag xmlns="" xmlns:m="http://schemas.openxmlformats.org/officeDocument/2006/math" xmlns:a14="http://schemas.microsoft.com/office/drawing/2010/main" xmlns:ma14="http://schemas.microsoft.com/office/mac/drawingml/2011/main" val="1"/>
             </a:ext>
           </a:extLst>
         </p:spPr>
@@ -30063,7 +30327,7 @@
           </a:ln>
           <a:extLst>
             <a:ext uri="{C572A759-6A51-4108-AA02-DFA0A04FC94B}">
-              <ma14:wrappingTextBoxFlag xmlns:ma14="http://schemas.microsoft.com/office/mac/drawingml/2011/main" xmlns:a14="http://schemas.microsoft.com/office/drawing/2010/main" xmlns:m="http://schemas.openxmlformats.org/officeDocument/2006/math" xmlns="" val="1"/>
+              <ma14:wrappingTextBoxFlag xmlns="" xmlns:m="http://schemas.openxmlformats.org/officeDocument/2006/math" xmlns:a14="http://schemas.microsoft.com/office/drawing/2010/main" xmlns:ma14="http://schemas.microsoft.com/office/mac/drawingml/2011/main" val="1"/>
             </a:ext>
           </a:extLst>
         </p:spPr>
@@ -30115,7 +30379,7 @@
           </a:ln>
           <a:extLst>
             <a:ext uri="{C572A759-6A51-4108-AA02-DFA0A04FC94B}">
-              <ma14:wrappingTextBoxFlag xmlns:ma14="http://schemas.microsoft.com/office/mac/drawingml/2011/main" xmlns:a14="http://schemas.microsoft.com/office/drawing/2010/main" xmlns:m="http://schemas.openxmlformats.org/officeDocument/2006/math" xmlns="" val="1"/>
+              <ma14:wrappingTextBoxFlag xmlns="" xmlns:m="http://schemas.openxmlformats.org/officeDocument/2006/math" xmlns:a14="http://schemas.microsoft.com/office/drawing/2010/main" xmlns:ma14="http://schemas.microsoft.com/office/mac/drawingml/2011/main" val="1"/>
             </a:ext>
           </a:extLst>
         </p:spPr>
@@ -30167,7 +30431,7 @@
           </a:ln>
           <a:extLst>
             <a:ext uri="{C572A759-6A51-4108-AA02-DFA0A04FC94B}">
-              <ma14:wrappingTextBoxFlag xmlns:ma14="http://schemas.microsoft.com/office/mac/drawingml/2011/main" xmlns:a14="http://schemas.microsoft.com/office/drawing/2010/main" xmlns:m="http://schemas.openxmlformats.org/officeDocument/2006/math" xmlns="" val="1"/>
+              <ma14:wrappingTextBoxFlag xmlns="" xmlns:m="http://schemas.openxmlformats.org/officeDocument/2006/math" xmlns:a14="http://schemas.microsoft.com/office/drawing/2010/main" xmlns:ma14="http://schemas.microsoft.com/office/mac/drawingml/2011/main" val="1"/>
             </a:ext>
           </a:extLst>
         </p:spPr>
@@ -30219,7 +30483,7 @@
           </a:ln>
           <a:extLst>
             <a:ext uri="{C572A759-6A51-4108-AA02-DFA0A04FC94B}">
-              <ma14:wrappingTextBoxFlag xmlns:ma14="http://schemas.microsoft.com/office/mac/drawingml/2011/main" xmlns:a14="http://schemas.microsoft.com/office/drawing/2010/main" xmlns:m="http://schemas.openxmlformats.org/officeDocument/2006/math" xmlns="" val="1"/>
+              <ma14:wrappingTextBoxFlag xmlns="" xmlns:m="http://schemas.openxmlformats.org/officeDocument/2006/math" xmlns:a14="http://schemas.microsoft.com/office/drawing/2010/main" xmlns:ma14="http://schemas.microsoft.com/office/mac/drawingml/2011/main" val="1"/>
             </a:ext>
           </a:extLst>
         </p:spPr>
@@ -30271,7 +30535,7 @@
           </a:ln>
           <a:extLst>
             <a:ext uri="{C572A759-6A51-4108-AA02-DFA0A04FC94B}">
-              <ma14:wrappingTextBoxFlag xmlns:ma14="http://schemas.microsoft.com/office/mac/drawingml/2011/main" xmlns:a14="http://schemas.microsoft.com/office/drawing/2010/main" xmlns:m="http://schemas.openxmlformats.org/officeDocument/2006/math" xmlns="" val="1"/>
+              <ma14:wrappingTextBoxFlag xmlns="" xmlns:m="http://schemas.openxmlformats.org/officeDocument/2006/math" xmlns:a14="http://schemas.microsoft.com/office/drawing/2010/main" xmlns:ma14="http://schemas.microsoft.com/office/mac/drawingml/2011/main" val="1"/>
             </a:ext>
           </a:extLst>
         </p:spPr>
@@ -30323,7 +30587,7 @@
           </a:ln>
           <a:extLst>
             <a:ext uri="{C572A759-6A51-4108-AA02-DFA0A04FC94B}">
-              <ma14:wrappingTextBoxFlag xmlns:ma14="http://schemas.microsoft.com/office/mac/drawingml/2011/main" xmlns:a14="http://schemas.microsoft.com/office/drawing/2010/main" xmlns:m="http://schemas.openxmlformats.org/officeDocument/2006/math" xmlns="" val="1"/>
+              <ma14:wrappingTextBoxFlag xmlns="" xmlns:m="http://schemas.openxmlformats.org/officeDocument/2006/math" xmlns:a14="http://schemas.microsoft.com/office/drawing/2010/main" xmlns:ma14="http://schemas.microsoft.com/office/mac/drawingml/2011/main" val="1"/>
             </a:ext>
           </a:extLst>
         </p:spPr>
@@ -30375,7 +30639,7 @@
           </a:ln>
           <a:extLst>
             <a:ext uri="{C572A759-6A51-4108-AA02-DFA0A04FC94B}">
-              <ma14:wrappingTextBoxFlag xmlns:ma14="http://schemas.microsoft.com/office/mac/drawingml/2011/main" xmlns:a14="http://schemas.microsoft.com/office/drawing/2010/main" xmlns:m="http://schemas.openxmlformats.org/officeDocument/2006/math" xmlns="" val="1"/>
+              <ma14:wrappingTextBoxFlag xmlns="" xmlns:m="http://schemas.openxmlformats.org/officeDocument/2006/math" xmlns:a14="http://schemas.microsoft.com/office/drawing/2010/main" xmlns:ma14="http://schemas.microsoft.com/office/mac/drawingml/2011/main" val="1"/>
             </a:ext>
           </a:extLst>
         </p:spPr>
@@ -30427,7 +30691,7 @@
           </a:ln>
           <a:extLst>
             <a:ext uri="{C572A759-6A51-4108-AA02-DFA0A04FC94B}">
-              <ma14:wrappingTextBoxFlag xmlns:ma14="http://schemas.microsoft.com/office/mac/drawingml/2011/main" xmlns:a14="http://schemas.microsoft.com/office/drawing/2010/main" xmlns:m="http://schemas.openxmlformats.org/officeDocument/2006/math" xmlns="" val="1"/>
+              <ma14:wrappingTextBoxFlag xmlns="" xmlns:m="http://schemas.openxmlformats.org/officeDocument/2006/math" xmlns:a14="http://schemas.microsoft.com/office/drawing/2010/main" xmlns:ma14="http://schemas.microsoft.com/office/mac/drawingml/2011/main" val="1"/>
             </a:ext>
           </a:extLst>
         </p:spPr>
@@ -30479,7 +30743,7 @@
           </a:ln>
           <a:extLst>
             <a:ext uri="{C572A759-6A51-4108-AA02-DFA0A04FC94B}">
-              <ma14:wrappingTextBoxFlag xmlns:ma14="http://schemas.microsoft.com/office/mac/drawingml/2011/main" xmlns:a14="http://schemas.microsoft.com/office/drawing/2010/main" xmlns:m="http://schemas.openxmlformats.org/officeDocument/2006/math" xmlns="" val="1"/>
+              <ma14:wrappingTextBoxFlag xmlns="" xmlns:m="http://schemas.openxmlformats.org/officeDocument/2006/math" xmlns:a14="http://schemas.microsoft.com/office/drawing/2010/main" xmlns:ma14="http://schemas.microsoft.com/office/mac/drawingml/2011/main" val="1"/>
             </a:ext>
           </a:extLst>
         </p:spPr>
@@ -30531,7 +30795,7 @@
           </a:ln>
           <a:extLst>
             <a:ext uri="{C572A759-6A51-4108-AA02-DFA0A04FC94B}">
-              <ma14:wrappingTextBoxFlag xmlns:ma14="http://schemas.microsoft.com/office/mac/drawingml/2011/main" xmlns:a14="http://schemas.microsoft.com/office/drawing/2010/main" xmlns:m="http://schemas.openxmlformats.org/officeDocument/2006/math" xmlns="" val="1"/>
+              <ma14:wrappingTextBoxFlag xmlns="" xmlns:m="http://schemas.openxmlformats.org/officeDocument/2006/math" xmlns:a14="http://schemas.microsoft.com/office/drawing/2010/main" xmlns:ma14="http://schemas.microsoft.com/office/mac/drawingml/2011/main" val="1"/>
             </a:ext>
           </a:extLst>
         </p:spPr>
@@ -30583,7 +30847,7 @@
           </a:ln>
           <a:extLst>
             <a:ext uri="{C572A759-6A51-4108-AA02-DFA0A04FC94B}">
-              <ma14:wrappingTextBoxFlag xmlns:ma14="http://schemas.microsoft.com/office/mac/drawingml/2011/main" xmlns:a14="http://schemas.microsoft.com/office/drawing/2010/main" xmlns:m="http://schemas.openxmlformats.org/officeDocument/2006/math" xmlns="" val="1"/>
+              <ma14:wrappingTextBoxFlag xmlns="" xmlns:m="http://schemas.openxmlformats.org/officeDocument/2006/math" xmlns:a14="http://schemas.microsoft.com/office/drawing/2010/main" xmlns:ma14="http://schemas.microsoft.com/office/mac/drawingml/2011/main" val="1"/>
             </a:ext>
           </a:extLst>
         </p:spPr>
@@ -30635,7 +30899,7 @@
           </a:ln>
           <a:extLst>
             <a:ext uri="{C572A759-6A51-4108-AA02-DFA0A04FC94B}">
-              <ma14:wrappingTextBoxFlag xmlns:ma14="http://schemas.microsoft.com/office/mac/drawingml/2011/main" xmlns:a14="http://schemas.microsoft.com/office/drawing/2010/main" xmlns:m="http://schemas.openxmlformats.org/officeDocument/2006/math" xmlns="" val="1"/>
+              <ma14:wrappingTextBoxFlag xmlns="" xmlns:m="http://schemas.openxmlformats.org/officeDocument/2006/math" xmlns:a14="http://schemas.microsoft.com/office/drawing/2010/main" xmlns:ma14="http://schemas.microsoft.com/office/mac/drawingml/2011/main" val="1"/>
             </a:ext>
           </a:extLst>
         </p:spPr>
@@ -30687,7 +30951,7 @@
           </a:ln>
           <a:extLst>
             <a:ext uri="{C572A759-6A51-4108-AA02-DFA0A04FC94B}">
-              <ma14:wrappingTextBoxFlag xmlns:ma14="http://schemas.microsoft.com/office/mac/drawingml/2011/main" xmlns:a14="http://schemas.microsoft.com/office/drawing/2010/main" xmlns:m="http://schemas.openxmlformats.org/officeDocument/2006/math" xmlns="" val="1"/>
+              <ma14:wrappingTextBoxFlag xmlns="" xmlns:m="http://schemas.openxmlformats.org/officeDocument/2006/math" xmlns:a14="http://schemas.microsoft.com/office/drawing/2010/main" xmlns:ma14="http://schemas.microsoft.com/office/mac/drawingml/2011/main" val="1"/>
             </a:ext>
           </a:extLst>
         </p:spPr>
@@ -30739,7 +31003,7 @@
           </a:ln>
           <a:extLst>
             <a:ext uri="{C572A759-6A51-4108-AA02-DFA0A04FC94B}">
-              <ma14:wrappingTextBoxFlag xmlns:ma14="http://schemas.microsoft.com/office/mac/drawingml/2011/main" xmlns:a14="http://schemas.microsoft.com/office/drawing/2010/main" xmlns:m="http://schemas.openxmlformats.org/officeDocument/2006/math" xmlns="" val="1"/>
+              <ma14:wrappingTextBoxFlag xmlns="" xmlns:m="http://schemas.openxmlformats.org/officeDocument/2006/math" xmlns:a14="http://schemas.microsoft.com/office/drawing/2010/main" xmlns:ma14="http://schemas.microsoft.com/office/mac/drawingml/2011/main" val="1"/>
             </a:ext>
           </a:extLst>
         </p:spPr>
@@ -30791,7 +31055,7 @@
           </a:ln>
           <a:extLst>
             <a:ext uri="{C572A759-6A51-4108-AA02-DFA0A04FC94B}">
-              <ma14:wrappingTextBoxFlag xmlns:ma14="http://schemas.microsoft.com/office/mac/drawingml/2011/main" xmlns:a14="http://schemas.microsoft.com/office/drawing/2010/main" xmlns:m="http://schemas.openxmlformats.org/officeDocument/2006/math" xmlns="" val="1"/>
+              <ma14:wrappingTextBoxFlag xmlns="" xmlns:m="http://schemas.openxmlformats.org/officeDocument/2006/math" xmlns:a14="http://schemas.microsoft.com/office/drawing/2010/main" xmlns:ma14="http://schemas.microsoft.com/office/mac/drawingml/2011/main" val="1"/>
             </a:ext>
           </a:extLst>
         </p:spPr>
@@ -30843,7 +31107,7 @@
           </a:ln>
           <a:extLst>
             <a:ext uri="{C572A759-6A51-4108-AA02-DFA0A04FC94B}">
-              <ma14:wrappingTextBoxFlag xmlns:ma14="http://schemas.microsoft.com/office/mac/drawingml/2011/main" xmlns:a14="http://schemas.microsoft.com/office/drawing/2010/main" xmlns:m="http://schemas.openxmlformats.org/officeDocument/2006/math" xmlns="" val="1"/>
+              <ma14:wrappingTextBoxFlag xmlns="" xmlns:m="http://schemas.openxmlformats.org/officeDocument/2006/math" xmlns:a14="http://schemas.microsoft.com/office/drawing/2010/main" xmlns:ma14="http://schemas.microsoft.com/office/mac/drawingml/2011/main" val="1"/>
             </a:ext>
           </a:extLst>
         </p:spPr>
@@ -30895,7 +31159,7 @@
           </a:ln>
           <a:extLst>
             <a:ext uri="{C572A759-6A51-4108-AA02-DFA0A04FC94B}">
-              <ma14:wrappingTextBoxFlag xmlns:ma14="http://schemas.microsoft.com/office/mac/drawingml/2011/main" xmlns:a14="http://schemas.microsoft.com/office/drawing/2010/main" xmlns:m="http://schemas.openxmlformats.org/officeDocument/2006/math" xmlns="" val="1"/>
+              <ma14:wrappingTextBoxFlag xmlns="" xmlns:m="http://schemas.openxmlformats.org/officeDocument/2006/math" xmlns:a14="http://schemas.microsoft.com/office/drawing/2010/main" xmlns:ma14="http://schemas.microsoft.com/office/mac/drawingml/2011/main" val="1"/>
             </a:ext>
           </a:extLst>
         </p:spPr>
@@ -30947,7 +31211,7 @@
           </a:ln>
           <a:extLst>
             <a:ext uri="{C572A759-6A51-4108-AA02-DFA0A04FC94B}">
-              <ma14:wrappingTextBoxFlag xmlns:ma14="http://schemas.microsoft.com/office/mac/drawingml/2011/main" xmlns:a14="http://schemas.microsoft.com/office/drawing/2010/main" xmlns:m="http://schemas.openxmlformats.org/officeDocument/2006/math" xmlns="" val="1"/>
+              <ma14:wrappingTextBoxFlag xmlns="" xmlns:m="http://schemas.openxmlformats.org/officeDocument/2006/math" xmlns:a14="http://schemas.microsoft.com/office/drawing/2010/main" xmlns:ma14="http://schemas.microsoft.com/office/mac/drawingml/2011/main" val="1"/>
             </a:ext>
           </a:extLst>
         </p:spPr>
@@ -30999,7 +31263,7 @@
           </a:ln>
           <a:extLst>
             <a:ext uri="{C572A759-6A51-4108-AA02-DFA0A04FC94B}">
-              <ma14:wrappingTextBoxFlag xmlns:ma14="http://schemas.microsoft.com/office/mac/drawingml/2011/main" xmlns:a14="http://schemas.microsoft.com/office/drawing/2010/main" xmlns:m="http://schemas.openxmlformats.org/officeDocument/2006/math" xmlns="" val="1"/>
+              <ma14:wrappingTextBoxFlag xmlns="" xmlns:m="http://schemas.openxmlformats.org/officeDocument/2006/math" xmlns:a14="http://schemas.microsoft.com/office/drawing/2010/main" xmlns:ma14="http://schemas.microsoft.com/office/mac/drawingml/2011/main" val="1"/>
             </a:ext>
           </a:extLst>
         </p:spPr>
@@ -31051,7 +31315,7 @@
           </a:ln>
           <a:extLst>
             <a:ext uri="{C572A759-6A51-4108-AA02-DFA0A04FC94B}">
-              <ma14:wrappingTextBoxFlag xmlns:ma14="http://schemas.microsoft.com/office/mac/drawingml/2011/main" xmlns:a14="http://schemas.microsoft.com/office/drawing/2010/main" xmlns:m="http://schemas.openxmlformats.org/officeDocument/2006/math" xmlns="" val="1"/>
+              <ma14:wrappingTextBoxFlag xmlns="" xmlns:m="http://schemas.openxmlformats.org/officeDocument/2006/math" xmlns:a14="http://schemas.microsoft.com/office/drawing/2010/main" xmlns:ma14="http://schemas.microsoft.com/office/mac/drawingml/2011/main" val="1"/>
             </a:ext>
           </a:extLst>
         </p:spPr>
@@ -31103,7 +31367,7 @@
           </a:ln>
           <a:extLst>
             <a:ext uri="{C572A759-6A51-4108-AA02-DFA0A04FC94B}">
-              <ma14:wrappingTextBoxFlag xmlns:ma14="http://schemas.microsoft.com/office/mac/drawingml/2011/main" xmlns:a14="http://schemas.microsoft.com/office/drawing/2010/main" xmlns:m="http://schemas.openxmlformats.org/officeDocument/2006/math" xmlns="" val="1"/>
+              <ma14:wrappingTextBoxFlag xmlns="" xmlns:m="http://schemas.openxmlformats.org/officeDocument/2006/math" xmlns:a14="http://schemas.microsoft.com/office/drawing/2010/main" xmlns:ma14="http://schemas.microsoft.com/office/mac/drawingml/2011/main" val="1"/>
             </a:ext>
           </a:extLst>
         </p:spPr>
@@ -31155,7 +31419,7 @@
           </a:ln>
           <a:extLst>
             <a:ext uri="{C572A759-6A51-4108-AA02-DFA0A04FC94B}">
-              <ma14:wrappingTextBoxFlag xmlns:ma14="http://schemas.microsoft.com/office/mac/drawingml/2011/main" xmlns:a14="http://schemas.microsoft.com/office/drawing/2010/main" xmlns:m="http://schemas.openxmlformats.org/officeDocument/2006/math" xmlns="" val="1"/>
+              <ma14:wrappingTextBoxFlag xmlns="" xmlns:m="http://schemas.openxmlformats.org/officeDocument/2006/math" xmlns:a14="http://schemas.microsoft.com/office/drawing/2010/main" xmlns:ma14="http://schemas.microsoft.com/office/mac/drawingml/2011/main" val="1"/>
             </a:ext>
           </a:extLst>
         </p:spPr>
@@ -31207,7 +31471,7 @@
           </a:ln>
           <a:extLst>
             <a:ext uri="{C572A759-6A51-4108-AA02-DFA0A04FC94B}">
-              <ma14:wrappingTextBoxFlag xmlns:ma14="http://schemas.microsoft.com/office/mac/drawingml/2011/main" xmlns:a14="http://schemas.microsoft.com/office/drawing/2010/main" xmlns:m="http://schemas.openxmlformats.org/officeDocument/2006/math" xmlns="" val="1"/>
+              <ma14:wrappingTextBoxFlag xmlns="" xmlns:m="http://schemas.openxmlformats.org/officeDocument/2006/math" xmlns:a14="http://schemas.microsoft.com/office/drawing/2010/main" xmlns:ma14="http://schemas.microsoft.com/office/mac/drawingml/2011/main" val="1"/>
             </a:ext>
           </a:extLst>
         </p:spPr>
@@ -31259,7 +31523,7 @@
           </a:ln>
           <a:extLst>
             <a:ext uri="{C572A759-6A51-4108-AA02-DFA0A04FC94B}">
-              <ma14:wrappingTextBoxFlag xmlns:ma14="http://schemas.microsoft.com/office/mac/drawingml/2011/main" xmlns:a14="http://schemas.microsoft.com/office/drawing/2010/main" xmlns:m="http://schemas.openxmlformats.org/officeDocument/2006/math" xmlns="" val="1"/>
+              <ma14:wrappingTextBoxFlag xmlns="" xmlns:m="http://schemas.openxmlformats.org/officeDocument/2006/math" xmlns:a14="http://schemas.microsoft.com/office/drawing/2010/main" xmlns:ma14="http://schemas.microsoft.com/office/mac/drawingml/2011/main" val="1"/>
             </a:ext>
           </a:extLst>
         </p:spPr>
@@ -31345,7 +31609,7 @@
           </a:ln>
           <a:extLst>
             <a:ext uri="{C572A759-6A51-4108-AA02-DFA0A04FC94B}">
-              <ma14:wrappingTextBoxFlag xmlns:ma14="http://schemas.microsoft.com/office/mac/drawingml/2011/main" xmlns:a14="http://schemas.microsoft.com/office/drawing/2010/main" xmlns:m="http://schemas.openxmlformats.org/officeDocument/2006/math" xmlns="" val="1"/>
+              <ma14:wrappingTextBoxFlag xmlns="" xmlns:m="http://schemas.openxmlformats.org/officeDocument/2006/math" xmlns:a14="http://schemas.microsoft.com/office/drawing/2010/main" xmlns:ma14="http://schemas.microsoft.com/office/mac/drawingml/2011/main" val="1"/>
             </a:ext>
           </a:extLst>
         </p:spPr>
@@ -31432,7 +31696,7 @@
           </a:ln>
           <a:extLst>
             <a:ext uri="{C572A759-6A51-4108-AA02-DFA0A04FC94B}">
-              <ma14:wrappingTextBoxFlag xmlns:ma14="http://schemas.microsoft.com/office/mac/drawingml/2011/main" xmlns:a14="http://schemas.microsoft.com/office/drawing/2010/main" xmlns:m="http://schemas.openxmlformats.org/officeDocument/2006/math" xmlns="" val="1"/>
+              <ma14:wrappingTextBoxFlag xmlns="" xmlns:m="http://schemas.openxmlformats.org/officeDocument/2006/math" xmlns:a14="http://schemas.microsoft.com/office/drawing/2010/main" xmlns:ma14="http://schemas.microsoft.com/office/mac/drawingml/2011/main" val="1"/>
             </a:ext>
           </a:extLst>
         </p:spPr>
@@ -31519,7 +31783,7 @@
           </a:ln>
           <a:extLst>
             <a:ext uri="{C572A759-6A51-4108-AA02-DFA0A04FC94B}">
-              <ma14:wrappingTextBoxFlag xmlns:ma14="http://schemas.microsoft.com/office/mac/drawingml/2011/main" xmlns:a14="http://schemas.microsoft.com/office/drawing/2010/main" xmlns:m="http://schemas.openxmlformats.org/officeDocument/2006/math" xmlns="" val="1"/>
+              <ma14:wrappingTextBoxFlag xmlns="" xmlns:m="http://schemas.openxmlformats.org/officeDocument/2006/math" xmlns:a14="http://schemas.microsoft.com/office/drawing/2010/main" xmlns:ma14="http://schemas.microsoft.com/office/mac/drawingml/2011/main" val="1"/>
             </a:ext>
           </a:extLst>
         </p:spPr>
@@ -32597,7 +32861,7 @@
           </a:ln>
           <a:extLst>
             <a:ext uri="{C572A759-6A51-4108-AA02-DFA0A04FC94B}">
-              <ma14:wrappingTextBoxFlag xmlns:ma14="http://schemas.microsoft.com/office/mac/drawingml/2011/main" xmlns:a14="http://schemas.microsoft.com/office/drawing/2010/main" xmlns:m="http://schemas.openxmlformats.org/officeDocument/2006/math" xmlns="" val="1"/>
+              <ma14:wrappingTextBoxFlag xmlns="" xmlns:m="http://schemas.openxmlformats.org/officeDocument/2006/math" xmlns:a14="http://schemas.microsoft.com/office/drawing/2010/main" xmlns:ma14="http://schemas.microsoft.com/office/mac/drawingml/2011/main" val="1"/>
             </a:ext>
           </a:extLst>
         </p:spPr>
@@ -33358,7 +33622,7 @@
           </a:ln>
           <a:extLst>
             <a:ext uri="{C572A759-6A51-4108-AA02-DFA0A04FC94B}">
-              <ma14:wrappingTextBoxFlag xmlns:ma14="http://schemas.microsoft.com/office/mac/drawingml/2011/main" xmlns:a14="http://schemas.microsoft.com/office/drawing/2010/main" xmlns:m="http://schemas.openxmlformats.org/officeDocument/2006/math" xmlns="" val="1"/>
+              <ma14:wrappingTextBoxFlag xmlns="" xmlns:m="http://schemas.openxmlformats.org/officeDocument/2006/math" xmlns:a14="http://schemas.microsoft.com/office/drawing/2010/main" xmlns:ma14="http://schemas.microsoft.com/office/mac/drawingml/2011/main" val="1"/>
             </a:ext>
           </a:extLst>
         </p:spPr>
@@ -34171,7 +34435,7 @@
           </a:ln>
           <a:extLst>
             <a:ext uri="{C572A759-6A51-4108-AA02-DFA0A04FC94B}">
-              <ma14:wrappingTextBoxFlag xmlns:ma14="http://schemas.microsoft.com/office/mac/drawingml/2011/main" xmlns:a14="http://schemas.microsoft.com/office/drawing/2010/main" xmlns:m="http://schemas.openxmlformats.org/officeDocument/2006/math" xmlns="" val="1"/>
+              <ma14:wrappingTextBoxFlag xmlns="" xmlns:m="http://schemas.openxmlformats.org/officeDocument/2006/math" xmlns:a14="http://schemas.microsoft.com/office/drawing/2010/main" xmlns:ma14="http://schemas.microsoft.com/office/mac/drawingml/2011/main" val="1"/>
             </a:ext>
           </a:extLst>
         </p:spPr>
@@ -34986,7 +35250,7 @@
           </a:ln>
           <a:extLst>
             <a:ext uri="{C572A759-6A51-4108-AA02-DFA0A04FC94B}">
-              <ma14:wrappingTextBoxFlag xmlns:ma14="http://schemas.microsoft.com/office/mac/drawingml/2011/main" xmlns:a14="http://schemas.microsoft.com/office/drawing/2010/main" xmlns:m="http://schemas.openxmlformats.org/officeDocument/2006/math" xmlns="" val="1"/>
+              <ma14:wrappingTextBoxFlag xmlns="" xmlns:m="http://schemas.openxmlformats.org/officeDocument/2006/math" xmlns:a14="http://schemas.microsoft.com/office/drawing/2010/main" xmlns:ma14="http://schemas.microsoft.com/office/mac/drawingml/2011/main" val="1"/>
             </a:ext>
           </a:extLst>
         </p:spPr>
@@ -35038,7 +35302,7 @@
           </a:ln>
           <a:extLst>
             <a:ext uri="{C572A759-6A51-4108-AA02-DFA0A04FC94B}">
-              <ma14:wrappingTextBoxFlag xmlns:ma14="http://schemas.microsoft.com/office/mac/drawingml/2011/main" xmlns:a14="http://schemas.microsoft.com/office/drawing/2010/main" xmlns:m="http://schemas.openxmlformats.org/officeDocument/2006/math" xmlns="" val="1"/>
+              <ma14:wrappingTextBoxFlag xmlns="" xmlns:m="http://schemas.openxmlformats.org/officeDocument/2006/math" xmlns:a14="http://schemas.microsoft.com/office/drawing/2010/main" xmlns:ma14="http://schemas.microsoft.com/office/mac/drawingml/2011/main" val="1"/>
             </a:ext>
           </a:extLst>
         </p:spPr>
@@ -35104,7 +35368,7 @@
           </a:ln>
           <a:extLst>
             <a:ext uri="{C572A759-6A51-4108-AA02-DFA0A04FC94B}">
-              <ma14:wrappingTextBoxFlag xmlns:ma14="http://schemas.microsoft.com/office/mac/drawingml/2011/main" xmlns:a14="http://schemas.microsoft.com/office/drawing/2010/main" xmlns:m="http://schemas.openxmlformats.org/officeDocument/2006/math" xmlns="" val="1"/>
+              <ma14:wrappingTextBoxFlag xmlns="" xmlns:m="http://schemas.openxmlformats.org/officeDocument/2006/math" xmlns:a14="http://schemas.microsoft.com/office/drawing/2010/main" xmlns:ma14="http://schemas.microsoft.com/office/mac/drawingml/2011/main" val="1"/>
             </a:ext>
           </a:extLst>
         </p:spPr>
@@ -35156,7 +35420,7 @@
           </a:ln>
           <a:extLst>
             <a:ext uri="{C572A759-6A51-4108-AA02-DFA0A04FC94B}">
-              <ma14:wrappingTextBoxFlag xmlns:ma14="http://schemas.microsoft.com/office/mac/drawingml/2011/main" xmlns:a14="http://schemas.microsoft.com/office/drawing/2010/main" xmlns:m="http://schemas.openxmlformats.org/officeDocument/2006/math" xmlns="" val="1"/>
+              <ma14:wrappingTextBoxFlag xmlns="" xmlns:m="http://schemas.openxmlformats.org/officeDocument/2006/math" xmlns:a14="http://schemas.microsoft.com/office/drawing/2010/main" xmlns:ma14="http://schemas.microsoft.com/office/mac/drawingml/2011/main" val="1"/>
             </a:ext>
           </a:extLst>
         </p:spPr>
@@ -35353,7 +35617,7 @@
           </a:ln>
           <a:extLst>
             <a:ext uri="{C572A759-6A51-4108-AA02-DFA0A04FC94B}">
-              <ma14:wrappingTextBoxFlag xmlns:ma14="http://schemas.microsoft.com/office/mac/drawingml/2011/main" xmlns:a14="http://schemas.microsoft.com/office/drawing/2010/main" xmlns:m="http://schemas.openxmlformats.org/officeDocument/2006/math" xmlns="" val="1"/>
+              <ma14:wrappingTextBoxFlag xmlns="" xmlns:m="http://schemas.openxmlformats.org/officeDocument/2006/math" xmlns:a14="http://schemas.microsoft.com/office/drawing/2010/main" xmlns:ma14="http://schemas.microsoft.com/office/mac/drawingml/2011/main" val="1"/>
             </a:ext>
           </a:extLst>
         </p:spPr>

--- a/Templates/Asset Solution Brief Template.pptx
+++ b/Templates/Asset Solution Brief Template.pptx
@@ -882,8 +882,8 @@
         </p:nvSpPr>
         <p:spPr>
           <a:xfrm>
-            <a:off x="259976" y="911416"/>
-            <a:ext cx="7201648" cy="1096683"/>
+            <a:off x="259976" y="911417"/>
+            <a:ext cx="7201648" cy="1024960"/>
           </a:xfrm>
           <a:prstGeom prst="rect">
             <a:avLst/>
@@ -1042,7 +1042,7 @@
         <p:spPr>
           <a:xfrm>
             <a:off x="259976" y="2006329"/>
-            <a:ext cx="7201648" cy="3570208"/>
+            <a:ext cx="7201648" cy="3647152"/>
           </a:xfrm>
           <a:prstGeom prst="rect">
             <a:avLst/>
@@ -1054,38 +1054,6 @@
             <a:spAutoFit/>
           </a:bodyPr>
           <a:lstStyle/>
-          <a:p>
-            <a:endParaRPr kumimoji="0" lang="en-US" sz="1400" b="1" i="0" u="none" strike="noStrike" kern="1200" cap="none" spc="0" normalizeH="0" baseline="0" noProof="0" dirty="0">
-              <a:ln>
-                <a:noFill/>
-              </a:ln>
-              <a:solidFill>
-                <a:prstClr val="black"/>
-              </a:solidFill>
-              <a:effectLst/>
-              <a:uLnTx/>
-              <a:uFillTx/>
-              <a:latin typeface="IBM Plex Sans" panose="020B0503050203000203" pitchFamily="34" charset="0"/>
-              <a:ea typeface="+mn-ea"/>
-              <a:cs typeface="+mn-cs"/>
-            </a:endParaRPr>
-          </a:p>
-          <a:p>
-            <a:endParaRPr kumimoji="0" lang="en-US" sz="1400" b="1" i="0" u="none" strike="noStrike" kern="1200" cap="none" spc="0" normalizeH="0" baseline="0" noProof="0" dirty="0">
-              <a:ln>
-                <a:noFill/>
-              </a:ln>
-              <a:solidFill>
-                <a:prstClr val="black"/>
-              </a:solidFill>
-              <a:effectLst/>
-              <a:uLnTx/>
-              <a:uFillTx/>
-              <a:latin typeface="IBM Plex Sans" panose="020B0503050203000203" pitchFamily="34" charset="0"/>
-              <a:ea typeface="+mn-ea"/>
-              <a:cs typeface="+mn-cs"/>
-            </a:endParaRPr>
-          </a:p>
           <a:p>
             <a:r>
               <a:rPr kumimoji="0" lang="en-US" sz="1400" b="1" i="0" u="none" strike="noStrike" kern="1200" cap="none" spc="0" normalizeH="0" baseline="0" noProof="0" dirty="0">
@@ -1106,7 +1074,7 @@
             </a:r>
           </a:p>
           <a:p>
-            <a:pPr marL="400050" indent="-173038">
+            <a:pPr marL="227013" indent="-112713">
               <a:spcBef>
                 <a:spcPts val="600"/>
               </a:spcBef>
@@ -1132,7 +1100,7 @@
             </a:r>
           </a:p>
           <a:p>
-            <a:pPr marL="400050" indent="-173038">
+            <a:pPr marL="227013" indent="-112713">
               <a:spcBef>
                 <a:spcPts val="600"/>
               </a:spcBef>
@@ -1158,7 +1126,7 @@
             </a:r>
           </a:p>
           <a:p>
-            <a:pPr marL="400050" indent="-173038">
+            <a:pPr marL="227013" indent="-112713">
               <a:spcBef>
                 <a:spcPts val="600"/>
               </a:spcBef>
@@ -1180,11 +1148,11 @@
                 <a:ea typeface="+mn-ea"/>
                 <a:cs typeface="+mn-cs"/>
               </a:rPr>
-              <a:t>Spacing between text or image elements may need adjusting if copy goes over/under the recommended length</a:t>
+              <a:t>Spacing between text or image elements may need adjusting if copy goes over/under the recommended length.</a:t>
             </a:r>
           </a:p>
           <a:p>
-            <a:pPr marL="400050" indent="-173038">
+            <a:pPr marL="227013" indent="-112713">
               <a:spcBef>
                 <a:spcPts val="600"/>
               </a:spcBef>
@@ -1206,11 +1174,11 @@
                 <a:ea typeface="+mn-ea"/>
                 <a:cs typeface="+mn-cs"/>
               </a:rPr>
-              <a:t>You will need to either manually add images/screenshots and adjust placement/cropping, or delete the image placeholders.</a:t>
+              <a:t>If an agent generated this, the tool changes text setting to “Shrink on overflow”. If you encounter this, either change to “Don’t autofit” or enlarge the bounding shape.</a:t>
             </a:r>
           </a:p>
           <a:p>
-            <a:pPr marL="400050" indent="-173038">
+            <a:pPr marL="227013" indent="-112713">
               <a:spcBef>
                 <a:spcPts val="600"/>
               </a:spcBef>
@@ -1232,11 +1200,11 @@
                 <a:ea typeface="+mn-ea"/>
                 <a:cs typeface="+mn-cs"/>
               </a:rPr>
-              <a:t>Find pictograms for the Benefits page on the last two slides.</a:t>
+              <a:t>You will need to either manually add images/screenshots and adjust placement/cropping, or delete the image placeholders.</a:t>
             </a:r>
           </a:p>
           <a:p>
-            <a:pPr marL="400050" indent="-173038">
+            <a:pPr marL="227013" indent="-112713">
               <a:spcBef>
                 <a:spcPts val="600"/>
               </a:spcBef>
@@ -1258,6 +1226,32 @@
                 <a:ea typeface="+mn-ea"/>
                 <a:cs typeface="+mn-cs"/>
               </a:rPr>
+              <a:t>Find pictograms for the Benefits page on the last two slides.</a:t>
+            </a:r>
+          </a:p>
+          <a:p>
+            <a:pPr marL="227013" indent="-112713">
+              <a:spcBef>
+                <a:spcPts val="600"/>
+              </a:spcBef>
+              <a:buFont typeface="Arial" panose="020B0604020202020204" pitchFamily="34" charset="0"/>
+              <a:buChar char="•"/>
+            </a:pPr>
+            <a:r>
+              <a:rPr kumimoji="0" lang="en-US" sz="1400" b="0" i="0" u="none" strike="noStrike" kern="1200" cap="none" spc="0" normalizeH="0" baseline="0" noProof="0" dirty="0">
+                <a:ln>
+                  <a:noFill/>
+                </a:ln>
+                <a:solidFill>
+                  <a:prstClr val="black"/>
+                </a:solidFill>
+                <a:effectLst/>
+                <a:uLnTx/>
+                <a:uFillTx/>
+                <a:latin typeface="IBM Plex Sans" panose="020B0503050203000203" pitchFamily="34" charset="0"/>
+                <a:ea typeface="+mn-ea"/>
+                <a:cs typeface="+mn-cs"/>
+              </a:rPr>
               <a:t>If you need to move a fixed element on a page, go to View-&gt;Slide Master and move it on the master.</a:t>
             </a:r>
             <a:endParaRPr lang="en-US" dirty="0"/>
@@ -1278,7 +1272,7 @@
         </p:nvSpPr>
         <p:spPr>
           <a:xfrm>
-            <a:off x="310776" y="5602537"/>
+            <a:off x="346541" y="5716062"/>
             <a:ext cx="3887124" cy="307777"/>
           </a:xfrm>
           <a:prstGeom prst="rect">
@@ -2468,7 +2462,7 @@
         <p:spPr>
           <a:xfrm>
             <a:off x="3045486" y="3574717"/>
-            <a:ext cx="415178" cy="107722"/>
+            <a:ext cx="4344230" cy="107722"/>
           </a:xfrm>
           <a:prstGeom prst="rect">
             <a:avLst/>
@@ -2476,7 +2470,7 @@
           <a:noFill/>
         </p:spPr>
         <p:txBody>
-          <a:bodyPr wrap="none" lIns="0" tIns="0" rIns="0" bIns="0" rtlCol="0">
+          <a:bodyPr wrap="square" lIns="0" tIns="0" rIns="0" bIns="0" rtlCol="0">
             <a:spAutoFit/>
           </a:bodyPr>
           <a:lstStyle/>
@@ -2513,8 +2507,8 @@
         </p:nvSpPr>
         <p:spPr>
           <a:xfrm>
-            <a:off x="3045486" y="605123"/>
-            <a:ext cx="4439753" cy="1259536"/>
+            <a:off x="3045486" y="605122"/>
+            <a:ext cx="4344233" cy="1640699"/>
           </a:xfrm>
           <a:prstGeom prst="rect">
             <a:avLst/>
@@ -2563,7 +2557,7 @@
         <p:spPr>
           <a:xfrm>
             <a:off x="3045483" y="2280775"/>
-            <a:ext cx="4439753" cy="276999"/>
+            <a:ext cx="4344233" cy="763245"/>
           </a:xfrm>
           <a:prstGeom prst="rect">
             <a:avLst/>
@@ -2611,8 +2605,8 @@
         </p:nvSpPr>
         <p:spPr>
           <a:xfrm>
-            <a:off x="3045485" y="3779791"/>
-            <a:ext cx="4439751" cy="654750"/>
+            <a:off x="3045485" y="3779790"/>
+            <a:ext cx="4344231" cy="1249410"/>
           </a:xfrm>
           <a:prstGeom prst="rect">
             <a:avLst/>
@@ -3756,7 +3750,7 @@
         <p:spPr>
           <a:xfrm>
             <a:off x="3045485" y="369271"/>
-            <a:ext cx="688314" cy="138499"/>
+            <a:ext cx="673505" cy="138499"/>
           </a:xfrm>
           <a:prstGeom prst="rect">
             <a:avLst/>
@@ -5116,7 +5110,7 @@
         <p:spPr>
           <a:xfrm>
             <a:off x="3043238" y="3704658"/>
-            <a:ext cx="4422274" cy="1065174"/>
+            <a:ext cx="4346480" cy="1065174"/>
           </a:xfrm>
           <a:prstGeom prst="rect">
             <a:avLst/>
@@ -5194,7 +5188,7 @@
         <p:spPr>
           <a:xfrm>
             <a:off x="3043238" y="4897954"/>
-            <a:ext cx="4422274" cy="415498"/>
+            <a:ext cx="4346480" cy="415498"/>
           </a:xfrm>
           <a:prstGeom prst="rect">
             <a:avLst/>
@@ -5272,7 +5266,7 @@
         <p:spPr>
           <a:xfrm>
             <a:off x="3043238" y="5441573"/>
-            <a:ext cx="4422274" cy="1401479"/>
+            <a:ext cx="4346480" cy="1401479"/>
           </a:xfrm>
           <a:prstGeom prst="rect">
             <a:avLst/>
@@ -5349,7 +5343,7 @@
         <p:spPr>
           <a:xfrm>
             <a:off x="3043238" y="1415470"/>
-            <a:ext cx="4422274" cy="708709"/>
+            <a:ext cx="4346480" cy="708709"/>
           </a:xfrm>
           <a:prstGeom prst="rect">
             <a:avLst/>
@@ -5410,7 +5404,7 @@
         <p:spPr>
           <a:xfrm>
             <a:off x="3043238" y="7053722"/>
-            <a:ext cx="4422274" cy="2489200"/>
+            <a:ext cx="4346480" cy="2489200"/>
           </a:xfrm>
           <a:prstGeom prst="rect">
             <a:avLst/>
@@ -5443,7 +5437,7 @@
         <p:spPr>
           <a:xfrm>
             <a:off x="343244" y="563300"/>
-            <a:ext cx="2057056" cy="138499"/>
+            <a:ext cx="2057056" cy="494535"/>
           </a:xfrm>
           <a:prstGeom prst="rect">
             <a:avLst/>
@@ -5521,7 +5515,7 @@
         <p:spPr>
           <a:xfrm>
             <a:off x="382682" y="4119670"/>
-            <a:ext cx="2057056" cy="415498"/>
+            <a:ext cx="2057056" cy="2024142"/>
           </a:xfrm>
           <a:prstGeom prst="rect">
             <a:avLst/>
@@ -5599,7 +5593,7 @@
         <p:spPr>
           <a:xfrm>
             <a:off x="3043238" y="2252302"/>
-            <a:ext cx="4422274" cy="646331"/>
+            <a:ext cx="4346480" cy="646331"/>
           </a:xfrm>
           <a:prstGeom prst="rect">
             <a:avLst/>
@@ -5722,7 +5716,7 @@
         </p:nvSpPr>
         <p:spPr>
           <a:xfrm>
-            <a:off x="382681" y="1393530"/>
+            <a:off x="382681" y="1447314"/>
             <a:ext cx="429768" cy="429768"/>
           </a:xfrm>
           <a:prstGeom prst="rect">
@@ -5798,7 +5792,7 @@
         <p:spPr>
           <a:xfrm>
             <a:off x="3045486" y="961836"/>
-            <a:ext cx="4439753" cy="636639"/>
+            <a:ext cx="4344233" cy="821147"/>
           </a:xfrm>
           <a:prstGeom prst="rect">
             <a:avLst/>
@@ -5923,7 +5917,7 @@
         <p:spPr>
           <a:xfrm>
             <a:off x="382680" y="961836"/>
-            <a:ext cx="2278457" cy="382870"/>
+            <a:ext cx="2278457" cy="503406"/>
           </a:xfrm>
           <a:prstGeom prst="rect">
             <a:avLst/>
@@ -5971,7 +5965,7 @@
         </p:nvSpPr>
         <p:spPr>
           <a:xfrm>
-            <a:off x="382681" y="2858759"/>
+            <a:off x="382681" y="2912543"/>
             <a:ext cx="429768" cy="429768"/>
           </a:xfrm>
           <a:prstGeom prst="rect">
@@ -6005,7 +5999,7 @@
         <p:spPr>
           <a:xfrm>
             <a:off x="3045486" y="2429659"/>
-            <a:ext cx="4439753" cy="636639"/>
+            <a:ext cx="4344233" cy="821147"/>
           </a:xfrm>
           <a:prstGeom prst="rect">
             <a:avLst/>
@@ -6057,7 +6051,7 @@
         <p:spPr>
           <a:xfrm>
             <a:off x="382680" y="2429659"/>
-            <a:ext cx="2278457" cy="382870"/>
+            <a:ext cx="2278457" cy="503406"/>
           </a:xfrm>
           <a:prstGeom prst="rect">
             <a:avLst/>
@@ -6105,7 +6099,7 @@
         </p:nvSpPr>
         <p:spPr>
           <a:xfrm>
-            <a:off x="382681" y="4306060"/>
+            <a:off x="382681" y="4359844"/>
             <a:ext cx="429768" cy="429768"/>
           </a:xfrm>
           <a:prstGeom prst="rect">
@@ -6139,7 +6133,7 @@
         <p:spPr>
           <a:xfrm>
             <a:off x="3045486" y="3862685"/>
-            <a:ext cx="4439753" cy="636639"/>
+            <a:ext cx="4344233" cy="821147"/>
           </a:xfrm>
           <a:prstGeom prst="rect">
             <a:avLst/>
@@ -6191,7 +6185,7 @@
         <p:spPr>
           <a:xfrm>
             <a:off x="382680" y="3862685"/>
-            <a:ext cx="2278457" cy="382870"/>
+            <a:ext cx="2278457" cy="503406"/>
           </a:xfrm>
           <a:prstGeom prst="rect">
             <a:avLst/>
@@ -6239,7 +6233,7 @@
         </p:nvSpPr>
         <p:spPr>
           <a:xfrm>
-            <a:off x="382681" y="5753360"/>
+            <a:off x="382681" y="5807144"/>
             <a:ext cx="429768" cy="429768"/>
           </a:xfrm>
           <a:prstGeom prst="rect">
@@ -6273,7 +6267,7 @@
         <p:spPr>
           <a:xfrm>
             <a:off x="3045486" y="5309949"/>
-            <a:ext cx="4439753" cy="636639"/>
+            <a:ext cx="4344233" cy="821147"/>
           </a:xfrm>
           <a:prstGeom prst="rect">
             <a:avLst/>
@@ -6325,7 +6319,7 @@
         <p:spPr>
           <a:xfrm>
             <a:off x="382680" y="5309949"/>
-            <a:ext cx="2278457" cy="382870"/>
+            <a:ext cx="2278457" cy="503406"/>
           </a:xfrm>
           <a:prstGeom prst="rect">
             <a:avLst/>
@@ -6373,7 +6367,7 @@
         </p:nvSpPr>
         <p:spPr>
           <a:xfrm>
-            <a:off x="382681" y="7200660"/>
+            <a:off x="382681" y="7254444"/>
             <a:ext cx="429768" cy="429768"/>
           </a:xfrm>
           <a:prstGeom prst="rect">
@@ -6407,7 +6401,7 @@
         <p:spPr>
           <a:xfrm>
             <a:off x="3045486" y="6751038"/>
-            <a:ext cx="4439753" cy="636639"/>
+            <a:ext cx="4344233" cy="821147"/>
           </a:xfrm>
           <a:prstGeom prst="rect">
             <a:avLst/>
@@ -6459,7 +6453,7 @@
         <p:spPr>
           <a:xfrm>
             <a:off x="382680" y="6751038"/>
-            <a:ext cx="2278457" cy="382870"/>
+            <a:ext cx="2278457" cy="503406"/>
           </a:xfrm>
           <a:prstGeom prst="rect">
             <a:avLst/>
@@ -6507,8 +6501,8 @@
         </p:nvSpPr>
         <p:spPr>
           <a:xfrm>
-            <a:off x="3045485" y="8412714"/>
-            <a:ext cx="4439753" cy="492261"/>
+            <a:off x="3045485" y="8319248"/>
+            <a:ext cx="4344233" cy="585728"/>
           </a:xfrm>
           <a:prstGeom prst="rect">
             <a:avLst/>
@@ -6562,13 +6556,15 @@
               </a:ext>
             </a:extLst>
           </p:cNvPr>
-          <p:cNvCxnSpPr/>
+          <p:cNvCxnSpPr>
+            <a:cxnSpLocks/>
+          </p:cNvCxnSpPr>
           <p:nvPr userDrawn="1"/>
         </p:nvCxnSpPr>
         <p:spPr>
           <a:xfrm>
-            <a:off x="2996514" y="8235778"/>
-            <a:ext cx="4547286" cy="0"/>
+            <a:off x="2996514" y="8164062"/>
+            <a:ext cx="4449452" cy="0"/>
           </a:xfrm>
           <a:prstGeom prst="line">
             <a:avLst/>
@@ -6612,8 +6608,8 @@
         </p:nvSpPr>
         <p:spPr>
           <a:xfrm>
-            <a:off x="3045484" y="8784222"/>
-            <a:ext cx="4439753" cy="492261"/>
+            <a:off x="3045484" y="8730437"/>
+            <a:ext cx="4344233" cy="646647"/>
           </a:xfrm>
           <a:prstGeom prst="rect">
             <a:avLst/>
@@ -6709,7 +6705,7 @@
         </p:nvSpPr>
         <p:spPr>
           <a:xfrm>
-            <a:off x="382681" y="1393528"/>
+            <a:off x="382681" y="1471219"/>
             <a:ext cx="429768" cy="429768"/>
           </a:xfrm>
           <a:prstGeom prst="rect">
@@ -6785,7 +6781,7 @@
         <p:spPr>
           <a:xfrm>
             <a:off x="3045486" y="961836"/>
-            <a:ext cx="4439753" cy="669739"/>
+            <a:ext cx="4344233" cy="833874"/>
           </a:xfrm>
           <a:prstGeom prst="rect">
             <a:avLst/>
@@ -6910,7 +6906,7 @@
         <p:spPr>
           <a:xfrm>
             <a:off x="382680" y="961835"/>
-            <a:ext cx="2278457" cy="370917"/>
+            <a:ext cx="2240991" cy="509384"/>
           </a:xfrm>
           <a:prstGeom prst="rect">
             <a:avLst/>
@@ -6958,7 +6954,7 @@
         </p:nvSpPr>
         <p:spPr>
           <a:xfrm>
-            <a:off x="382681" y="2912543"/>
+            <a:off x="382681" y="2990234"/>
             <a:ext cx="429768" cy="429768"/>
           </a:xfrm>
           <a:prstGeom prst="rect">
@@ -6992,7 +6988,7 @@
         <p:spPr>
           <a:xfrm>
             <a:off x="3045486" y="2501373"/>
-            <a:ext cx="4439753" cy="669739"/>
+            <a:ext cx="4344233" cy="833874"/>
           </a:xfrm>
           <a:prstGeom prst="rect">
             <a:avLst/>
@@ -7044,7 +7040,7 @@
         <p:spPr>
           <a:xfrm>
             <a:off x="382680" y="2501372"/>
-            <a:ext cx="2278457" cy="370917"/>
+            <a:ext cx="2240991" cy="509384"/>
           </a:xfrm>
           <a:prstGeom prst="rect">
             <a:avLst/>
@@ -7092,7 +7088,7 @@
         </p:nvSpPr>
         <p:spPr>
           <a:xfrm>
-            <a:off x="382681" y="4425581"/>
+            <a:off x="382681" y="4503272"/>
             <a:ext cx="429768" cy="429768"/>
           </a:xfrm>
           <a:prstGeom prst="rect">
@@ -7126,7 +7122,7 @@
         <p:spPr>
           <a:xfrm>
             <a:off x="3045486" y="4000136"/>
-            <a:ext cx="4439753" cy="669739"/>
+            <a:ext cx="4344233" cy="833874"/>
           </a:xfrm>
           <a:prstGeom prst="rect">
             <a:avLst/>
@@ -7178,7 +7174,7 @@
         <p:spPr>
           <a:xfrm>
             <a:off x="382680" y="4000135"/>
-            <a:ext cx="2278457" cy="370917"/>
+            <a:ext cx="2240991" cy="509384"/>
           </a:xfrm>
           <a:prstGeom prst="rect">
             <a:avLst/>
@@ -7226,7 +7222,7 @@
         </p:nvSpPr>
         <p:spPr>
           <a:xfrm>
-            <a:off x="382681" y="5944595"/>
+            <a:off x="382681" y="6022286"/>
             <a:ext cx="429768" cy="429768"/>
           </a:xfrm>
           <a:prstGeom prst="rect">
@@ -7260,7 +7256,7 @@
         <p:spPr>
           <a:xfrm>
             <a:off x="3045486" y="5519114"/>
-            <a:ext cx="4439753" cy="669739"/>
+            <a:ext cx="4344233" cy="833874"/>
           </a:xfrm>
           <a:prstGeom prst="rect">
             <a:avLst/>
@@ -7312,7 +7308,7 @@
         <p:spPr>
           <a:xfrm>
             <a:off x="382680" y="5519113"/>
-            <a:ext cx="2278457" cy="370917"/>
+            <a:ext cx="2240991" cy="509384"/>
           </a:xfrm>
           <a:prstGeom prst="rect">
             <a:avLst/>
@@ -7351,13 +7347,15 @@
               </a:ext>
             </a:extLst>
           </p:cNvPr>
-          <p:cNvCxnSpPr/>
+          <p:cNvCxnSpPr>
+            <a:cxnSpLocks/>
+          </p:cNvCxnSpPr>
           <p:nvPr userDrawn="1"/>
         </p:nvCxnSpPr>
         <p:spPr>
           <a:xfrm>
             <a:off x="2996514" y="7422982"/>
-            <a:ext cx="4547286" cy="0"/>
+            <a:ext cx="4449452" cy="0"/>
           </a:xfrm>
           <a:prstGeom prst="line">
             <a:avLst/>
@@ -7402,7 +7400,7 @@
         <p:spPr>
           <a:xfrm>
             <a:off x="3045485" y="7552105"/>
-            <a:ext cx="4439753" cy="476893"/>
+            <a:ext cx="4344233" cy="575337"/>
           </a:xfrm>
           <a:prstGeom prst="rect">
             <a:avLst/>
@@ -7464,8 +7462,8 @@
         </p:nvSpPr>
         <p:spPr>
           <a:xfrm>
-            <a:off x="3045484" y="7917637"/>
-            <a:ext cx="4439753" cy="476893"/>
+            <a:off x="3045484" y="7983375"/>
+            <a:ext cx="4344233" cy="831919"/>
           </a:xfrm>
           <a:prstGeom prst="rect">
             <a:avLst/>
@@ -7630,8 +7628,8 @@
         </p:nvSpPr>
         <p:spPr>
           <a:xfrm>
-            <a:off x="2976562" y="949573"/>
-            <a:ext cx="4500003" cy="261610"/>
+            <a:off x="2976563" y="949573"/>
+            <a:ext cx="4392426" cy="261610"/>
           </a:xfrm>
           <a:prstGeom prst="rect">
             <a:avLst/>
@@ -7706,8 +7704,8 @@
         </p:nvSpPr>
         <p:spPr>
           <a:xfrm>
-            <a:off x="2976562" y="1218516"/>
-            <a:ext cx="4500003" cy="261610"/>
+            <a:off x="2976563" y="1218515"/>
+            <a:ext cx="4392426" cy="432085"/>
           </a:xfrm>
           <a:prstGeom prst="rect">
             <a:avLst/>
@@ -7782,8 +7780,8 @@
         </p:nvSpPr>
         <p:spPr>
           <a:xfrm>
-            <a:off x="2976562" y="1487459"/>
-            <a:ext cx="4500003" cy="761386"/>
+            <a:off x="2976563" y="1690657"/>
+            <a:ext cx="4392426" cy="761386"/>
           </a:xfrm>
           <a:prstGeom prst="rect">
             <a:avLst/>
@@ -8345,8 +8343,8 @@
         </p:nvSpPr>
         <p:spPr>
           <a:xfrm>
-            <a:off x="2976562" y="2670479"/>
-            <a:ext cx="4500003" cy="261610"/>
+            <a:off x="2976563" y="2670479"/>
+            <a:ext cx="4392426" cy="261610"/>
           </a:xfrm>
           <a:prstGeom prst="rect">
             <a:avLst/>
@@ -8421,8 +8419,8 @@
         </p:nvSpPr>
         <p:spPr>
           <a:xfrm>
-            <a:off x="2976562" y="2939422"/>
-            <a:ext cx="4500003" cy="261610"/>
+            <a:off x="2976563" y="2939421"/>
+            <a:ext cx="4392426" cy="432085"/>
           </a:xfrm>
           <a:prstGeom prst="rect">
             <a:avLst/>
@@ -8497,8 +8495,8 @@
         </p:nvSpPr>
         <p:spPr>
           <a:xfrm>
-            <a:off x="2976562" y="3208365"/>
-            <a:ext cx="4500003" cy="761386"/>
+            <a:off x="2976563" y="3411563"/>
+            <a:ext cx="4392426" cy="761386"/>
           </a:xfrm>
           <a:prstGeom prst="rect">
             <a:avLst/>
@@ -8573,8 +8571,8 @@
         </p:nvSpPr>
         <p:spPr>
           <a:xfrm>
-            <a:off x="2976562" y="4400676"/>
-            <a:ext cx="4500003" cy="261610"/>
+            <a:off x="2976563" y="4400676"/>
+            <a:ext cx="4392426" cy="261610"/>
           </a:xfrm>
           <a:prstGeom prst="rect">
             <a:avLst/>
@@ -8649,8 +8647,8 @@
         </p:nvSpPr>
         <p:spPr>
           <a:xfrm>
-            <a:off x="2976562" y="4669619"/>
-            <a:ext cx="4500003" cy="261610"/>
+            <a:off x="2976563" y="4669618"/>
+            <a:ext cx="4392426" cy="432085"/>
           </a:xfrm>
           <a:prstGeom prst="rect">
             <a:avLst/>
@@ -8725,8 +8723,8 @@
         </p:nvSpPr>
         <p:spPr>
           <a:xfrm>
-            <a:off x="2976562" y="4938562"/>
-            <a:ext cx="4500003" cy="761386"/>
+            <a:off x="2976563" y="5141760"/>
+            <a:ext cx="4392426" cy="761386"/>
           </a:xfrm>
           <a:prstGeom prst="rect">
             <a:avLst/>
@@ -8801,8 +8799,8 @@
         </p:nvSpPr>
         <p:spPr>
           <a:xfrm>
-            <a:off x="2976562" y="6124896"/>
-            <a:ext cx="4500003" cy="261610"/>
+            <a:off x="2976563" y="6124896"/>
+            <a:ext cx="4392426" cy="261610"/>
           </a:xfrm>
           <a:prstGeom prst="rect">
             <a:avLst/>
@@ -8877,8 +8875,8 @@
         </p:nvSpPr>
         <p:spPr>
           <a:xfrm>
-            <a:off x="2976562" y="6393839"/>
-            <a:ext cx="4500003" cy="261610"/>
+            <a:off x="2976563" y="6393838"/>
+            <a:ext cx="4392426" cy="432085"/>
           </a:xfrm>
           <a:prstGeom prst="rect">
             <a:avLst/>
@@ -8953,8 +8951,8 @@
         </p:nvSpPr>
         <p:spPr>
           <a:xfrm>
-            <a:off x="2976562" y="6662782"/>
-            <a:ext cx="4500003" cy="761386"/>
+            <a:off x="2976563" y="6865980"/>
+            <a:ext cx="4392426" cy="761386"/>
           </a:xfrm>
           <a:prstGeom prst="rect">
             <a:avLst/>
@@ -9029,8 +9027,8 @@
         </p:nvSpPr>
         <p:spPr>
           <a:xfrm>
-            <a:off x="2976562" y="7855094"/>
-            <a:ext cx="4500003" cy="261610"/>
+            <a:off x="2976563" y="7855094"/>
+            <a:ext cx="4392426" cy="261610"/>
           </a:xfrm>
           <a:prstGeom prst="rect">
             <a:avLst/>
@@ -9105,8 +9103,8 @@
         </p:nvSpPr>
         <p:spPr>
           <a:xfrm>
-            <a:off x="2976562" y="8124037"/>
-            <a:ext cx="4500003" cy="261610"/>
+            <a:off x="2976563" y="8124036"/>
+            <a:ext cx="4392426" cy="432085"/>
           </a:xfrm>
           <a:prstGeom prst="rect">
             <a:avLst/>
@@ -9181,8 +9179,8 @@
         </p:nvSpPr>
         <p:spPr>
           <a:xfrm>
-            <a:off x="2976562" y="8392980"/>
-            <a:ext cx="4500003" cy="761386"/>
+            <a:off x="2976563" y="8596178"/>
+            <a:ext cx="4392426" cy="761386"/>
           </a:xfrm>
           <a:prstGeom prst="rect">
             <a:avLst/>
@@ -9403,7 +9401,7 @@
         <p:spPr>
           <a:xfrm>
             <a:off x="2976562" y="501368"/>
-            <a:ext cx="4500003" cy="261610"/>
+            <a:ext cx="4439751" cy="261610"/>
           </a:xfrm>
           <a:prstGeom prst="rect">
             <a:avLst/>
@@ -9478,8 +9476,8 @@
         </p:nvSpPr>
         <p:spPr>
           <a:xfrm>
-            <a:off x="2976562" y="770311"/>
-            <a:ext cx="4500003" cy="261610"/>
+            <a:off x="2976562" y="770310"/>
+            <a:ext cx="4439751" cy="513975"/>
           </a:xfrm>
           <a:prstGeom prst="rect">
             <a:avLst/>
@@ -9554,8 +9552,8 @@
         </p:nvSpPr>
         <p:spPr>
           <a:xfrm>
-            <a:off x="2976562" y="1039254"/>
-            <a:ext cx="4500003" cy="786884"/>
+            <a:off x="2976562" y="1230499"/>
+            <a:ext cx="4439751" cy="786884"/>
           </a:xfrm>
           <a:prstGeom prst="rect">
             <a:avLst/>
@@ -9631,7 +9629,7 @@
         <p:spPr>
           <a:xfrm>
             <a:off x="2976562" y="2323868"/>
-            <a:ext cx="4500003" cy="261610"/>
+            <a:ext cx="4439751" cy="261610"/>
           </a:xfrm>
           <a:prstGeom prst="rect">
             <a:avLst/>
@@ -9706,8 +9704,8 @@
         </p:nvSpPr>
         <p:spPr>
           <a:xfrm>
-            <a:off x="2976562" y="2592811"/>
-            <a:ext cx="4500003" cy="261610"/>
+            <a:off x="2976562" y="2592810"/>
+            <a:ext cx="4439751" cy="513975"/>
           </a:xfrm>
           <a:prstGeom prst="rect">
             <a:avLst/>
@@ -9782,8 +9780,8 @@
         </p:nvSpPr>
         <p:spPr>
           <a:xfrm>
-            <a:off x="2976562" y="2861754"/>
-            <a:ext cx="4500003" cy="786884"/>
+            <a:off x="2976562" y="3052999"/>
+            <a:ext cx="4439751" cy="786884"/>
           </a:xfrm>
           <a:prstGeom prst="rect">
             <a:avLst/>
@@ -9859,7 +9857,7 @@
         <p:spPr>
           <a:xfrm>
             <a:off x="2976562" y="4149682"/>
-            <a:ext cx="4500003" cy="261610"/>
+            <a:ext cx="4439751" cy="261610"/>
           </a:xfrm>
           <a:prstGeom prst="rect">
             <a:avLst/>
@@ -9934,8 +9932,8 @@
         </p:nvSpPr>
         <p:spPr>
           <a:xfrm>
-            <a:off x="2976562" y="4418625"/>
-            <a:ext cx="4500003" cy="261610"/>
+            <a:off x="2976562" y="4418624"/>
+            <a:ext cx="4439751" cy="513975"/>
           </a:xfrm>
           <a:prstGeom prst="rect">
             <a:avLst/>
@@ -10010,8 +10008,8 @@
         </p:nvSpPr>
         <p:spPr>
           <a:xfrm>
-            <a:off x="2976562" y="4687568"/>
-            <a:ext cx="4500003" cy="786884"/>
+            <a:off x="2976562" y="4878813"/>
+            <a:ext cx="4439751" cy="786884"/>
           </a:xfrm>
           <a:prstGeom prst="rect">
             <a:avLst/>
@@ -10087,7 +10085,7 @@
         <p:spPr>
           <a:xfrm>
             <a:off x="2976562" y="5975496"/>
-            <a:ext cx="4500003" cy="261610"/>
+            <a:ext cx="4439751" cy="261610"/>
           </a:xfrm>
           <a:prstGeom prst="rect">
             <a:avLst/>
@@ -10162,8 +10160,8 @@
         </p:nvSpPr>
         <p:spPr>
           <a:xfrm>
-            <a:off x="2976562" y="6244439"/>
-            <a:ext cx="4500003" cy="261610"/>
+            <a:off x="2976562" y="6244438"/>
+            <a:ext cx="4439751" cy="513975"/>
           </a:xfrm>
           <a:prstGeom prst="rect">
             <a:avLst/>
@@ -10238,8 +10236,8 @@
         </p:nvSpPr>
         <p:spPr>
           <a:xfrm>
-            <a:off x="2976562" y="6513382"/>
-            <a:ext cx="4500003" cy="786884"/>
+            <a:off x="2976562" y="6704627"/>
+            <a:ext cx="4439751" cy="786884"/>
           </a:xfrm>
           <a:prstGeom prst="rect">
             <a:avLst/>
@@ -10315,7 +10313,7 @@
         <p:spPr>
           <a:xfrm>
             <a:off x="2976562" y="7801310"/>
-            <a:ext cx="4500003" cy="261610"/>
+            <a:ext cx="4439751" cy="261610"/>
           </a:xfrm>
           <a:prstGeom prst="rect">
             <a:avLst/>
@@ -10390,8 +10388,8 @@
         </p:nvSpPr>
         <p:spPr>
           <a:xfrm>
-            <a:off x="2976562" y="8070253"/>
-            <a:ext cx="4500003" cy="261610"/>
+            <a:off x="2976562" y="8070252"/>
+            <a:ext cx="4439751" cy="513975"/>
           </a:xfrm>
           <a:prstGeom prst="rect">
             <a:avLst/>
@@ -10466,8 +10464,8 @@
         </p:nvSpPr>
         <p:spPr>
           <a:xfrm>
-            <a:off x="2976562" y="8339196"/>
-            <a:ext cx="4500003" cy="786884"/>
+            <a:off x="2976562" y="8530441"/>
+            <a:ext cx="4439751" cy="786884"/>
           </a:xfrm>
           <a:prstGeom prst="rect">
             <a:avLst/>
@@ -10688,7 +10686,7 @@
         <p:spPr>
           <a:xfrm>
             <a:off x="3430494" y="812133"/>
-            <a:ext cx="4046071" cy="261610"/>
+            <a:ext cx="3932517" cy="261610"/>
           </a:xfrm>
           <a:prstGeom prst="rect">
             <a:avLst/>
@@ -10763,8 +10761,8 @@
         </p:nvSpPr>
         <p:spPr>
           <a:xfrm>
-            <a:off x="3430494" y="1110957"/>
-            <a:ext cx="4046071" cy="261610"/>
+            <a:off x="3430494" y="1110956"/>
+            <a:ext cx="3932517" cy="476105"/>
           </a:xfrm>
           <a:prstGeom prst="rect">
             <a:avLst/>
@@ -10839,8 +10837,8 @@
         </p:nvSpPr>
         <p:spPr>
           <a:xfrm>
-            <a:off x="3430494" y="1487473"/>
-            <a:ext cx="4046071" cy="962222"/>
+            <a:off x="3430494" y="1571142"/>
+            <a:ext cx="3932517" cy="962222"/>
           </a:xfrm>
           <a:prstGeom prst="rect">
             <a:avLst/>
@@ -10989,7 +10987,7 @@
         <p:spPr>
           <a:xfrm>
             <a:off x="3430494" y="2884884"/>
-            <a:ext cx="4046071" cy="261610"/>
+            <a:ext cx="3932517" cy="261610"/>
           </a:xfrm>
           <a:prstGeom prst="rect">
             <a:avLst/>
@@ -11064,8 +11062,8 @@
         </p:nvSpPr>
         <p:spPr>
           <a:xfrm>
-            <a:off x="3430494" y="3183708"/>
-            <a:ext cx="4046071" cy="261610"/>
+            <a:off x="3430494" y="3183707"/>
+            <a:ext cx="3932517" cy="476105"/>
           </a:xfrm>
           <a:prstGeom prst="rect">
             <a:avLst/>
@@ -11140,8 +11138,8 @@
         </p:nvSpPr>
         <p:spPr>
           <a:xfrm>
-            <a:off x="3430494" y="3560224"/>
-            <a:ext cx="4046071" cy="962222"/>
+            <a:off x="3430494" y="3643893"/>
+            <a:ext cx="3932517" cy="962222"/>
           </a:xfrm>
           <a:prstGeom prst="rect">
             <a:avLst/>
@@ -11217,7 +11215,7 @@
         <p:spPr>
           <a:xfrm>
             <a:off x="3424518" y="4975520"/>
-            <a:ext cx="4046071" cy="261610"/>
+            <a:ext cx="3932517" cy="261610"/>
           </a:xfrm>
           <a:prstGeom prst="rect">
             <a:avLst/>
@@ -11292,8 +11290,8 @@
         </p:nvSpPr>
         <p:spPr>
           <a:xfrm>
-            <a:off x="3424518" y="5274344"/>
-            <a:ext cx="4046071" cy="261610"/>
+            <a:off x="3424518" y="5274343"/>
+            <a:ext cx="3932517" cy="476105"/>
           </a:xfrm>
           <a:prstGeom prst="rect">
             <a:avLst/>
@@ -11368,8 +11366,8 @@
         </p:nvSpPr>
         <p:spPr>
           <a:xfrm>
-            <a:off x="3424518" y="5650860"/>
-            <a:ext cx="4046071" cy="962222"/>
+            <a:off x="3424518" y="5734529"/>
+            <a:ext cx="3932517" cy="962222"/>
           </a:xfrm>
           <a:prstGeom prst="rect">
             <a:avLst/>
@@ -11445,7 +11443,7 @@
         <p:spPr>
           <a:xfrm>
             <a:off x="3424518" y="7048271"/>
-            <a:ext cx="4046071" cy="261610"/>
+            <a:ext cx="3932517" cy="261610"/>
           </a:xfrm>
           <a:prstGeom prst="rect">
             <a:avLst/>
@@ -11520,8 +11518,8 @@
         </p:nvSpPr>
         <p:spPr>
           <a:xfrm>
-            <a:off x="3424518" y="7347095"/>
-            <a:ext cx="4046071" cy="261610"/>
+            <a:off x="3424518" y="7347094"/>
+            <a:ext cx="3932517" cy="476105"/>
           </a:xfrm>
           <a:prstGeom prst="rect">
             <a:avLst/>
@@ -11596,8 +11594,8 @@
         </p:nvSpPr>
         <p:spPr>
           <a:xfrm>
-            <a:off x="3424518" y="7723611"/>
-            <a:ext cx="4046071" cy="962222"/>
+            <a:off x="3424518" y="7807280"/>
+            <a:ext cx="3932517" cy="962222"/>
           </a:xfrm>
           <a:prstGeom prst="rect">
             <a:avLst/>
@@ -14504,8 +14502,8 @@
         </p:nvSpPr>
         <p:spPr>
           <a:xfrm>
-            <a:off x="270433" y="2120012"/>
-            <a:ext cx="7182226" cy="307777"/>
+            <a:off x="3690039" y="356911"/>
+            <a:ext cx="3825577" cy="523220"/>
           </a:xfrm>
           <a:prstGeom prst="rect">
             <a:avLst/>
@@ -14518,7 +14516,7 @@
           </a:bodyPr>
           <a:lstStyle/>
           <a:p>
-            <a:pPr marL="0" algn="l" rtl="0" eaLnBrk="1" latinLnBrk="0" hangingPunct="1">
+            <a:pPr marL="0" algn="r" rtl="0" eaLnBrk="1" latinLnBrk="0" hangingPunct="1">
               <a:buNone/>
             </a:pPr>
             <a:r>

--- a/Templates/Asset Solution Brief Template.pptx
+++ b/Templates/Asset Solution Brief Template.pptx
@@ -6609,7 +6609,7 @@
         <p:spPr>
           <a:xfrm>
             <a:off x="3045484" y="8730437"/>
-            <a:ext cx="4344233" cy="646647"/>
+            <a:ext cx="4344233" cy="874712"/>
           </a:xfrm>
           <a:prstGeom prst="rect">
             <a:avLst/>
@@ -7463,7 +7463,7 @@
         <p:spPr>
           <a:xfrm>
             <a:off x="3045484" y="7983375"/>
-            <a:ext cx="4344233" cy="831919"/>
+            <a:ext cx="4344233" cy="1363825"/>
           </a:xfrm>
           <a:prstGeom prst="rect">
             <a:avLst/>

--- a/Templates/Asset Solution Brief Template.pptx
+++ b/Templates/Asset Solution Brief Template.pptx
@@ -236,7 +236,7 @@
           <a:p>
             <a:fld id="{46EA407C-5CB9-47CF-BBBB-3982928850A3}" type="datetimeFigureOut">
               <a:rPr lang="en-US" smtClean="0"/>
-              <a:t>10/1/2026</a:t>
+              <a:t>10/2/2026</a:t>
             </a:fld>
             <a:endParaRPr lang="en-US"/>
           </a:p>
@@ -413,7 +413,7 @@
           <a:p>
             <a:fld id="{CC9BF9C6-C4C5-429D-953C-A412904A62EE}" type="datetimeFigureOut">
               <a:rPr lang="en-US" smtClean="0"/>
-              <a:t>10/1/2026</a:t>
+              <a:t>10/2/2026</a:t>
             </a:fld>
             <a:endParaRPr lang="en-US"/>
           </a:p>
@@ -2454,6 +2454,9 @@
               <a:lnSpc>
                 <a:spcPct val="100000"/>
               </a:lnSpc>
+              <a:spcBef>
+                <a:spcPts val="0"/>
+              </a:spcBef>
               <a:buNone/>
               <a:defRPr sz="900">
                 <a:latin typeface="IBM Plex Sans" panose="020B0503050203000203" pitchFamily="34" charset="0"/>
@@ -3804,7 +3807,7 @@
           </a:ln>
           <a:extLst>
             <a:ext uri="{C572A759-6A51-4108-AA02-DFA0A04FC94B}">
-              <ma14:wrappingTextBoxFlag xmlns:ma14="http://schemas.microsoft.com/office/mac/drawingml/2011/main" xmlns:a14="http://schemas.microsoft.com/office/drawing/2010/main" xmlns:m="http://schemas.openxmlformats.org/officeDocument/2006/math" xmlns="" val="1"/>
+              <ma14:wrappingTextBoxFlag xmlns="" xmlns:m="http://schemas.openxmlformats.org/officeDocument/2006/math" xmlns:a14="http://schemas.microsoft.com/office/drawing/2010/main" xmlns:ma14="http://schemas.microsoft.com/office/mac/drawingml/2011/main" val="1"/>
             </a:ext>
           </a:extLst>
         </p:spPr>
@@ -3852,7 +3855,7 @@
           </a:ln>
           <a:extLst>
             <a:ext uri="{C572A759-6A51-4108-AA02-DFA0A04FC94B}">
-              <ma14:wrappingTextBoxFlag xmlns:ma14="http://schemas.microsoft.com/office/mac/drawingml/2011/main" xmlns:a14="http://schemas.microsoft.com/office/drawing/2010/main" xmlns:m="http://schemas.openxmlformats.org/officeDocument/2006/math" xmlns="" val="1"/>
+              <ma14:wrappingTextBoxFlag xmlns="" xmlns:m="http://schemas.openxmlformats.org/officeDocument/2006/math" xmlns:a14="http://schemas.microsoft.com/office/drawing/2010/main" xmlns:ma14="http://schemas.microsoft.com/office/mac/drawingml/2011/main" val="1"/>
             </a:ext>
           </a:extLst>
         </p:spPr>
@@ -3929,7 +3932,7 @@
           </a:ln>
           <a:extLst>
             <a:ext uri="{C572A759-6A51-4108-AA02-DFA0A04FC94B}">
-              <ma14:wrappingTextBoxFlag xmlns:ma14="http://schemas.microsoft.com/office/mac/drawingml/2011/main" xmlns:a14="http://schemas.microsoft.com/office/drawing/2010/main" xmlns:m="http://schemas.openxmlformats.org/officeDocument/2006/math" xmlns="" val="1"/>
+              <ma14:wrappingTextBoxFlag xmlns="" xmlns:m="http://schemas.openxmlformats.org/officeDocument/2006/math" xmlns:a14="http://schemas.microsoft.com/office/drawing/2010/main" xmlns:ma14="http://schemas.microsoft.com/office/mac/drawingml/2011/main" val="1"/>
             </a:ext>
           </a:extLst>
         </p:spPr>
@@ -4006,7 +4009,7 @@
           </a:ln>
           <a:extLst>
             <a:ext uri="{C572A759-6A51-4108-AA02-DFA0A04FC94B}">
-              <ma14:wrappingTextBoxFlag xmlns:ma14="http://schemas.microsoft.com/office/mac/drawingml/2011/main" xmlns:a14="http://schemas.microsoft.com/office/drawing/2010/main" xmlns:m="http://schemas.openxmlformats.org/officeDocument/2006/math" xmlns="" val="1"/>
+              <ma14:wrappingTextBoxFlag xmlns="" xmlns:m="http://schemas.openxmlformats.org/officeDocument/2006/math" xmlns:a14="http://schemas.microsoft.com/office/drawing/2010/main" xmlns:ma14="http://schemas.microsoft.com/office/mac/drawingml/2011/main" val="1"/>
             </a:ext>
           </a:extLst>
         </p:spPr>
@@ -4083,7 +4086,7 @@
           </a:ln>
           <a:extLst>
             <a:ext uri="{C572A759-6A51-4108-AA02-DFA0A04FC94B}">
-              <ma14:wrappingTextBoxFlag xmlns:ma14="http://schemas.microsoft.com/office/mac/drawingml/2011/main" xmlns:a14="http://schemas.microsoft.com/office/drawing/2010/main" xmlns:m="http://schemas.openxmlformats.org/officeDocument/2006/math" xmlns="" val="1"/>
+              <ma14:wrappingTextBoxFlag xmlns="" xmlns:m="http://schemas.openxmlformats.org/officeDocument/2006/math" xmlns:a14="http://schemas.microsoft.com/office/drawing/2010/main" xmlns:ma14="http://schemas.microsoft.com/office/mac/drawingml/2011/main" val="1"/>
             </a:ext>
           </a:extLst>
         </p:spPr>
@@ -4169,7 +4172,7 @@
           </a:ln>
           <a:extLst>
             <a:ext uri="{C572A759-6A51-4108-AA02-DFA0A04FC94B}">
-              <ma14:wrappingTextBoxFlag xmlns:ma14="http://schemas.microsoft.com/office/mac/drawingml/2011/main" xmlns:a14="http://schemas.microsoft.com/office/drawing/2010/main" xmlns:m="http://schemas.openxmlformats.org/officeDocument/2006/math" xmlns="" val="1"/>
+              <ma14:wrappingTextBoxFlag xmlns="" xmlns:m="http://schemas.openxmlformats.org/officeDocument/2006/math" xmlns:a14="http://schemas.microsoft.com/office/drawing/2010/main" xmlns:ma14="http://schemas.microsoft.com/office/mac/drawingml/2011/main" val="1"/>
             </a:ext>
           </a:extLst>
         </p:spPr>
@@ -4234,7 +4237,7 @@
           </a:ln>
           <a:extLst>
             <a:ext uri="{C572A759-6A51-4108-AA02-DFA0A04FC94B}">
-              <ma14:wrappingTextBoxFlag xmlns:ma14="http://schemas.microsoft.com/office/mac/drawingml/2011/main" xmlns:a14="http://schemas.microsoft.com/office/drawing/2010/main" xmlns:m="http://schemas.openxmlformats.org/officeDocument/2006/math" xmlns="" val="1"/>
+              <ma14:wrappingTextBoxFlag xmlns="" xmlns:m="http://schemas.openxmlformats.org/officeDocument/2006/math" xmlns:a14="http://schemas.microsoft.com/office/drawing/2010/main" xmlns:ma14="http://schemas.microsoft.com/office/mac/drawingml/2011/main" val="1"/>
             </a:ext>
           </a:extLst>
         </p:spPr>
@@ -4704,7 +4707,7 @@
           </a:ln>
           <a:extLst>
             <a:ext uri="{C572A759-6A51-4108-AA02-DFA0A04FC94B}">
-              <ma14:wrappingTextBoxFlag xmlns:ma14="http://schemas.microsoft.com/office/mac/drawingml/2011/main" xmlns:a14="http://schemas.microsoft.com/office/drawing/2010/main" xmlns:m="http://schemas.openxmlformats.org/officeDocument/2006/math" xmlns="" val="1"/>
+              <ma14:wrappingTextBoxFlag xmlns="" xmlns:m="http://schemas.openxmlformats.org/officeDocument/2006/math" xmlns:a14="http://schemas.microsoft.com/office/drawing/2010/main" xmlns:ma14="http://schemas.microsoft.com/office/mac/drawingml/2011/main" val="1"/>
             </a:ext>
           </a:extLst>
         </p:spPr>
@@ -4752,7 +4755,7 @@
           </a:ln>
           <a:extLst>
             <a:ext uri="{C572A759-6A51-4108-AA02-DFA0A04FC94B}">
-              <ma14:wrappingTextBoxFlag xmlns:ma14="http://schemas.microsoft.com/office/mac/drawingml/2011/main" xmlns:a14="http://schemas.microsoft.com/office/drawing/2010/main" xmlns:m="http://schemas.openxmlformats.org/officeDocument/2006/math" xmlns="" val="1"/>
+              <ma14:wrappingTextBoxFlag xmlns="" xmlns:m="http://schemas.openxmlformats.org/officeDocument/2006/math" xmlns:a14="http://schemas.microsoft.com/office/drawing/2010/main" xmlns:ma14="http://schemas.microsoft.com/office/mac/drawingml/2011/main" val="1"/>
             </a:ext>
           </a:extLst>
         </p:spPr>
@@ -4836,7 +4839,7 @@
           </a:ln>
           <a:extLst>
             <a:ext uri="{C572A759-6A51-4108-AA02-DFA0A04FC94B}">
-              <ma14:wrappingTextBoxFlag xmlns:ma14="http://schemas.microsoft.com/office/mac/drawingml/2011/main" xmlns:a14="http://schemas.microsoft.com/office/drawing/2010/main" xmlns:m="http://schemas.openxmlformats.org/officeDocument/2006/math" xmlns="" val="1"/>
+              <ma14:wrappingTextBoxFlag xmlns="" xmlns:m="http://schemas.openxmlformats.org/officeDocument/2006/math" xmlns:a14="http://schemas.microsoft.com/office/drawing/2010/main" xmlns:ma14="http://schemas.microsoft.com/office/mac/drawingml/2011/main" val="1"/>
             </a:ext>
           </a:extLst>
         </p:spPr>
@@ -5870,7 +5873,7 @@
           </a:ln>
           <a:extLst>
             <a:ext uri="{C572A759-6A51-4108-AA02-DFA0A04FC94B}">
-              <ma14:wrappingTextBoxFlag xmlns:ma14="http://schemas.microsoft.com/office/mac/drawingml/2011/main" xmlns:a14="http://schemas.microsoft.com/office/drawing/2010/main" xmlns:m="http://schemas.openxmlformats.org/officeDocument/2006/math" xmlns="" val="1"/>
+              <ma14:wrappingTextBoxFlag xmlns="" xmlns:m="http://schemas.openxmlformats.org/officeDocument/2006/math" xmlns:a14="http://schemas.microsoft.com/office/drawing/2010/main" xmlns:ma14="http://schemas.microsoft.com/office/mac/drawingml/2011/main" val="1"/>
             </a:ext>
           </a:extLst>
         </p:spPr>
@@ -5953,7 +5956,7 @@
           </a:ln>
           <a:extLst>
             <a:ext uri="{C572A759-6A51-4108-AA02-DFA0A04FC94B}">
-              <ma14:wrappingTextBoxFlag xmlns:ma14="http://schemas.microsoft.com/office/mac/drawingml/2011/main" xmlns:a14="http://schemas.microsoft.com/office/drawing/2010/main" xmlns:m="http://schemas.openxmlformats.org/officeDocument/2006/math" xmlns="" val="1"/>
+              <ma14:wrappingTextBoxFlag xmlns="" xmlns:m="http://schemas.openxmlformats.org/officeDocument/2006/math" xmlns:a14="http://schemas.microsoft.com/office/drawing/2010/main" xmlns:ma14="http://schemas.microsoft.com/office/mac/drawingml/2011/main" val="1"/>
             </a:ext>
           </a:extLst>
         </p:spPr>
@@ -6041,7 +6044,7 @@
           </a:ln>
           <a:extLst>
             <a:ext uri="{C572A759-6A51-4108-AA02-DFA0A04FC94B}">
-              <ma14:wrappingTextBoxFlag xmlns:ma14="http://schemas.microsoft.com/office/mac/drawingml/2011/main" xmlns:a14="http://schemas.microsoft.com/office/drawing/2010/main" xmlns:m="http://schemas.openxmlformats.org/officeDocument/2006/math" xmlns="" val="1"/>
+              <ma14:wrappingTextBoxFlag xmlns="" xmlns:m="http://schemas.openxmlformats.org/officeDocument/2006/math" xmlns:a14="http://schemas.microsoft.com/office/drawing/2010/main" xmlns:ma14="http://schemas.microsoft.com/office/mac/drawingml/2011/main" val="1"/>
             </a:ext>
           </a:extLst>
         </p:spPr>
@@ -6129,7 +6132,7 @@
           </a:ln>
           <a:extLst>
             <a:ext uri="{C572A759-6A51-4108-AA02-DFA0A04FC94B}">
-              <ma14:wrappingTextBoxFlag xmlns:ma14="http://schemas.microsoft.com/office/mac/drawingml/2011/main" xmlns:a14="http://schemas.microsoft.com/office/drawing/2010/main" xmlns:m="http://schemas.openxmlformats.org/officeDocument/2006/math" xmlns="" val="1"/>
+              <ma14:wrappingTextBoxFlag xmlns="" xmlns:m="http://schemas.openxmlformats.org/officeDocument/2006/math" xmlns:a14="http://schemas.microsoft.com/office/drawing/2010/main" xmlns:ma14="http://schemas.microsoft.com/office/mac/drawingml/2011/main" val="1"/>
             </a:ext>
           </a:extLst>
         </p:spPr>
@@ -6212,7 +6215,7 @@
           </a:ln>
           <a:extLst>
             <a:ext uri="{C572A759-6A51-4108-AA02-DFA0A04FC94B}">
-              <ma14:wrappingTextBoxFlag xmlns:ma14="http://schemas.microsoft.com/office/mac/drawingml/2011/main" xmlns:a14="http://schemas.microsoft.com/office/drawing/2010/main" xmlns:m="http://schemas.openxmlformats.org/officeDocument/2006/math" xmlns="" val="1"/>
+              <ma14:wrappingTextBoxFlag xmlns="" xmlns:m="http://schemas.openxmlformats.org/officeDocument/2006/math" xmlns:a14="http://schemas.microsoft.com/office/drawing/2010/main" xmlns:ma14="http://schemas.microsoft.com/office/mac/drawingml/2011/main" val="1"/>
             </a:ext>
           </a:extLst>
         </p:spPr>
@@ -6300,7 +6303,7 @@
           </a:ln>
           <a:extLst>
             <a:ext uri="{C572A759-6A51-4108-AA02-DFA0A04FC94B}">
-              <ma14:wrappingTextBoxFlag xmlns:ma14="http://schemas.microsoft.com/office/mac/drawingml/2011/main" xmlns:a14="http://schemas.microsoft.com/office/drawing/2010/main" xmlns:m="http://schemas.openxmlformats.org/officeDocument/2006/math" xmlns="" val="1"/>
+              <ma14:wrappingTextBoxFlag xmlns="" xmlns:m="http://schemas.openxmlformats.org/officeDocument/2006/math" xmlns:a14="http://schemas.microsoft.com/office/drawing/2010/main" xmlns:ma14="http://schemas.microsoft.com/office/mac/drawingml/2011/main" val="1"/>
             </a:ext>
           </a:extLst>
         </p:spPr>
@@ -7729,7 +7732,7 @@
           </a:ln>
           <a:extLst>
             <a:ext uri="{C572A759-6A51-4108-AA02-DFA0A04FC94B}">
-              <ma14:wrappingTextBoxFlag xmlns:ma14="http://schemas.microsoft.com/office/mac/drawingml/2011/main" xmlns:a14="http://schemas.microsoft.com/office/drawing/2010/main" xmlns:m="http://schemas.openxmlformats.org/officeDocument/2006/math" xmlns="" val="1"/>
+              <ma14:wrappingTextBoxFlag xmlns="" xmlns:m="http://schemas.openxmlformats.org/officeDocument/2006/math" xmlns:a14="http://schemas.microsoft.com/office/drawing/2010/main" xmlns:ma14="http://schemas.microsoft.com/office/mac/drawingml/2011/main" val="1"/>
             </a:ext>
           </a:extLst>
         </p:spPr>
@@ -7781,7 +7784,7 @@
           </a:ln>
           <a:extLst>
             <a:ext uri="{C572A759-6A51-4108-AA02-DFA0A04FC94B}">
-              <ma14:wrappingTextBoxFlag xmlns:ma14="http://schemas.microsoft.com/office/mac/drawingml/2011/main" xmlns:a14="http://schemas.microsoft.com/office/drawing/2010/main" xmlns:m="http://schemas.openxmlformats.org/officeDocument/2006/math" xmlns="" val="1"/>
+              <ma14:wrappingTextBoxFlag xmlns="" xmlns:m="http://schemas.openxmlformats.org/officeDocument/2006/math" xmlns:a14="http://schemas.microsoft.com/office/drawing/2010/main" xmlns:ma14="http://schemas.microsoft.com/office/mac/drawingml/2011/main" val="1"/>
             </a:ext>
           </a:extLst>
         </p:spPr>
@@ -8069,7 +8072,7 @@
           </a:ln>
           <a:extLst>
             <a:ext uri="{C572A759-6A51-4108-AA02-DFA0A04FC94B}">
-              <ma14:wrappingTextBoxFlag xmlns:ma14="http://schemas.microsoft.com/office/mac/drawingml/2011/main" xmlns:a14="http://schemas.microsoft.com/office/drawing/2010/main" xmlns:m="http://schemas.openxmlformats.org/officeDocument/2006/math" xmlns="" val="1"/>
+              <ma14:wrappingTextBoxFlag xmlns="" xmlns:m="http://schemas.openxmlformats.org/officeDocument/2006/math" xmlns:a14="http://schemas.microsoft.com/office/drawing/2010/main" xmlns:ma14="http://schemas.microsoft.com/office/mac/drawingml/2011/main" val="1"/>
             </a:ext>
           </a:extLst>
         </p:spPr>
@@ -8157,7 +8160,7 @@
           </a:ln>
           <a:extLst>
             <a:ext uri="{C572A759-6A51-4108-AA02-DFA0A04FC94B}">
-              <ma14:wrappingTextBoxFlag xmlns:ma14="http://schemas.microsoft.com/office/mac/drawingml/2011/main" xmlns:a14="http://schemas.microsoft.com/office/drawing/2010/main" xmlns:m="http://schemas.openxmlformats.org/officeDocument/2006/math" xmlns="" val="1"/>
+              <ma14:wrappingTextBoxFlag xmlns="" xmlns:m="http://schemas.openxmlformats.org/officeDocument/2006/math" xmlns:a14="http://schemas.microsoft.com/office/drawing/2010/main" xmlns:ma14="http://schemas.microsoft.com/office/mac/drawingml/2011/main" val="1"/>
             </a:ext>
           </a:extLst>
         </p:spPr>
@@ -8209,7 +8212,7 @@
           </a:ln>
           <a:extLst>
             <a:ext uri="{C572A759-6A51-4108-AA02-DFA0A04FC94B}">
-              <ma14:wrappingTextBoxFlag xmlns:ma14="http://schemas.microsoft.com/office/mac/drawingml/2011/main" xmlns:a14="http://schemas.microsoft.com/office/drawing/2010/main" xmlns:m="http://schemas.openxmlformats.org/officeDocument/2006/math" xmlns="" val="1"/>
+              <ma14:wrappingTextBoxFlag xmlns="" xmlns:m="http://schemas.openxmlformats.org/officeDocument/2006/math" xmlns:a14="http://schemas.microsoft.com/office/drawing/2010/main" xmlns:ma14="http://schemas.microsoft.com/office/mac/drawingml/2011/main" val="1"/>
             </a:ext>
           </a:extLst>
         </p:spPr>
@@ -8254,7 +8257,7 @@
           </a:ln>
           <a:extLst>
             <a:ext uri="{C572A759-6A51-4108-AA02-DFA0A04FC94B}">
-              <ma14:wrappingTextBoxFlag xmlns:ma14="http://schemas.microsoft.com/office/mac/drawingml/2011/main" xmlns:a14="http://schemas.microsoft.com/office/drawing/2010/main" xmlns:m="http://schemas.openxmlformats.org/officeDocument/2006/math" xmlns="" val="1"/>
+              <ma14:wrappingTextBoxFlag xmlns="" xmlns:m="http://schemas.openxmlformats.org/officeDocument/2006/math" xmlns:a14="http://schemas.microsoft.com/office/drawing/2010/main" xmlns:ma14="http://schemas.microsoft.com/office/mac/drawingml/2011/main" val="1"/>
             </a:ext>
           </a:extLst>
         </p:spPr>
@@ -8306,7 +8309,7 @@
           </a:ln>
           <a:extLst>
             <a:ext uri="{C572A759-6A51-4108-AA02-DFA0A04FC94B}">
-              <ma14:wrappingTextBoxFlag xmlns:ma14="http://schemas.microsoft.com/office/mac/drawingml/2011/main" xmlns:a14="http://schemas.microsoft.com/office/drawing/2010/main" xmlns:m="http://schemas.openxmlformats.org/officeDocument/2006/math" xmlns="" val="1"/>
+              <ma14:wrappingTextBoxFlag xmlns="" xmlns:m="http://schemas.openxmlformats.org/officeDocument/2006/math" xmlns:a14="http://schemas.microsoft.com/office/drawing/2010/main" xmlns:ma14="http://schemas.microsoft.com/office/mac/drawingml/2011/main" val="1"/>
             </a:ext>
           </a:extLst>
         </p:spPr>
@@ -8358,7 +8361,7 @@
           </a:ln>
           <a:extLst>
             <a:ext uri="{C572A759-6A51-4108-AA02-DFA0A04FC94B}">
-              <ma14:wrappingTextBoxFlag xmlns:ma14="http://schemas.microsoft.com/office/mac/drawingml/2011/main" xmlns:a14="http://schemas.microsoft.com/office/drawing/2010/main" xmlns:m="http://schemas.openxmlformats.org/officeDocument/2006/math" xmlns="" val="1"/>
+              <ma14:wrappingTextBoxFlag xmlns="" xmlns:m="http://schemas.openxmlformats.org/officeDocument/2006/math" xmlns:a14="http://schemas.microsoft.com/office/drawing/2010/main" xmlns:ma14="http://schemas.microsoft.com/office/mac/drawingml/2011/main" val="1"/>
             </a:ext>
           </a:extLst>
         </p:spPr>
@@ -8410,7 +8413,7 @@
           </a:ln>
           <a:extLst>
             <a:ext uri="{C572A759-6A51-4108-AA02-DFA0A04FC94B}">
-              <ma14:wrappingTextBoxFlag xmlns:ma14="http://schemas.microsoft.com/office/mac/drawingml/2011/main" xmlns:a14="http://schemas.microsoft.com/office/drawing/2010/main" xmlns:m="http://schemas.openxmlformats.org/officeDocument/2006/math" xmlns="" val="1"/>
+              <ma14:wrappingTextBoxFlag xmlns="" xmlns:m="http://schemas.openxmlformats.org/officeDocument/2006/math" xmlns:a14="http://schemas.microsoft.com/office/drawing/2010/main" xmlns:ma14="http://schemas.microsoft.com/office/mac/drawingml/2011/main" val="1"/>
             </a:ext>
           </a:extLst>
         </p:spPr>
@@ -8462,7 +8465,7 @@
           </a:ln>
           <a:extLst>
             <a:ext uri="{C572A759-6A51-4108-AA02-DFA0A04FC94B}">
-              <ma14:wrappingTextBoxFlag xmlns:ma14="http://schemas.microsoft.com/office/mac/drawingml/2011/main" xmlns:a14="http://schemas.microsoft.com/office/drawing/2010/main" xmlns:m="http://schemas.openxmlformats.org/officeDocument/2006/math" xmlns="" val="1"/>
+              <ma14:wrappingTextBoxFlag xmlns="" xmlns:m="http://schemas.openxmlformats.org/officeDocument/2006/math" xmlns:a14="http://schemas.microsoft.com/office/drawing/2010/main" xmlns:ma14="http://schemas.microsoft.com/office/mac/drawingml/2011/main" val="1"/>
             </a:ext>
           </a:extLst>
         </p:spPr>
@@ -8514,7 +8517,7 @@
           </a:ln>
           <a:extLst>
             <a:ext uri="{C572A759-6A51-4108-AA02-DFA0A04FC94B}">
-              <ma14:wrappingTextBoxFlag xmlns:ma14="http://schemas.microsoft.com/office/mac/drawingml/2011/main" xmlns:a14="http://schemas.microsoft.com/office/drawing/2010/main" xmlns:m="http://schemas.openxmlformats.org/officeDocument/2006/math" xmlns="" val="1"/>
+              <ma14:wrappingTextBoxFlag xmlns="" xmlns:m="http://schemas.openxmlformats.org/officeDocument/2006/math" xmlns:a14="http://schemas.microsoft.com/office/drawing/2010/main" xmlns:ma14="http://schemas.microsoft.com/office/mac/drawingml/2011/main" val="1"/>
             </a:ext>
           </a:extLst>
         </p:spPr>
@@ -8573,7 +8576,7 @@
           </a:ln>
           <a:extLst>
             <a:ext uri="{C572A759-6A51-4108-AA02-DFA0A04FC94B}">
-              <ma14:wrappingTextBoxFlag xmlns:ma14="http://schemas.microsoft.com/office/mac/drawingml/2011/main" xmlns:a14="http://schemas.microsoft.com/office/drawing/2010/main" xmlns:m="http://schemas.openxmlformats.org/officeDocument/2006/math" xmlns="" val="1"/>
+              <ma14:wrappingTextBoxFlag xmlns="" xmlns:m="http://schemas.openxmlformats.org/officeDocument/2006/math" xmlns:a14="http://schemas.microsoft.com/office/drawing/2010/main" xmlns:ma14="http://schemas.microsoft.com/office/mac/drawingml/2011/main" val="1"/>
             </a:ext>
           </a:extLst>
         </p:spPr>
@@ -8625,7 +8628,7 @@
           </a:ln>
           <a:extLst>
             <a:ext uri="{C572A759-6A51-4108-AA02-DFA0A04FC94B}">
-              <ma14:wrappingTextBoxFlag xmlns:ma14="http://schemas.microsoft.com/office/mac/drawingml/2011/main" xmlns:a14="http://schemas.microsoft.com/office/drawing/2010/main" xmlns:m="http://schemas.openxmlformats.org/officeDocument/2006/math" xmlns="" val="1"/>
+              <ma14:wrappingTextBoxFlag xmlns="" xmlns:m="http://schemas.openxmlformats.org/officeDocument/2006/math" xmlns:a14="http://schemas.microsoft.com/office/drawing/2010/main" xmlns:ma14="http://schemas.microsoft.com/office/mac/drawingml/2011/main" val="1"/>
             </a:ext>
           </a:extLst>
         </p:spPr>
@@ -8677,7 +8680,7 @@
           </a:ln>
           <a:extLst>
             <a:ext uri="{C572A759-6A51-4108-AA02-DFA0A04FC94B}">
-              <ma14:wrappingTextBoxFlag xmlns:ma14="http://schemas.microsoft.com/office/mac/drawingml/2011/main" xmlns:a14="http://schemas.microsoft.com/office/drawing/2010/main" xmlns:m="http://schemas.openxmlformats.org/officeDocument/2006/math" xmlns="" val="1"/>
+              <ma14:wrappingTextBoxFlag xmlns="" xmlns:m="http://schemas.openxmlformats.org/officeDocument/2006/math" xmlns:a14="http://schemas.microsoft.com/office/drawing/2010/main" xmlns:ma14="http://schemas.microsoft.com/office/mac/drawingml/2011/main" val="1"/>
             </a:ext>
           </a:extLst>
         </p:spPr>
@@ -8729,7 +8732,7 @@
           </a:ln>
           <a:extLst>
             <a:ext uri="{C572A759-6A51-4108-AA02-DFA0A04FC94B}">
-              <ma14:wrappingTextBoxFlag xmlns:ma14="http://schemas.microsoft.com/office/mac/drawingml/2011/main" xmlns:a14="http://schemas.microsoft.com/office/drawing/2010/main" xmlns:m="http://schemas.openxmlformats.org/officeDocument/2006/math" xmlns="" val="1"/>
+              <ma14:wrappingTextBoxFlag xmlns="" xmlns:m="http://schemas.openxmlformats.org/officeDocument/2006/math" xmlns:a14="http://schemas.microsoft.com/office/drawing/2010/main" xmlns:ma14="http://schemas.microsoft.com/office/mac/drawingml/2011/main" val="1"/>
             </a:ext>
           </a:extLst>
         </p:spPr>
@@ -10004,7 +10007,7 @@
           </a:ln>
           <a:extLst>
             <a:ext uri="{C572A759-6A51-4108-AA02-DFA0A04FC94B}">
-              <ma14:wrappingTextBoxFlag xmlns:ma14="http://schemas.microsoft.com/office/mac/drawingml/2011/main" xmlns:a14="http://schemas.microsoft.com/office/drawing/2010/main" xmlns:m="http://schemas.openxmlformats.org/officeDocument/2006/math" xmlns="" val="1"/>
+              <ma14:wrappingTextBoxFlag xmlns="" xmlns:m="http://schemas.openxmlformats.org/officeDocument/2006/math" xmlns:a14="http://schemas.microsoft.com/office/drawing/2010/main" xmlns:ma14="http://schemas.microsoft.com/office/mac/drawingml/2011/main" val="1"/>
             </a:ext>
           </a:extLst>
         </p:spPr>
@@ -10953,7 +10956,7 @@
           </a:ln>
           <a:extLst>
             <a:ext uri="{C572A759-6A51-4108-AA02-DFA0A04FC94B}">
-              <ma14:wrappingTextBoxFlag xmlns:ma14="http://schemas.microsoft.com/office/mac/drawingml/2011/main" xmlns:a14="http://schemas.microsoft.com/office/drawing/2010/main" xmlns:m="http://schemas.openxmlformats.org/officeDocument/2006/math" xmlns="" val="1"/>
+              <ma14:wrappingTextBoxFlag xmlns="" xmlns:m="http://schemas.openxmlformats.org/officeDocument/2006/math" xmlns:a14="http://schemas.microsoft.com/office/drawing/2010/main" xmlns:ma14="http://schemas.microsoft.com/office/mac/drawingml/2011/main" val="1"/>
             </a:ext>
           </a:extLst>
         </p:spPr>
@@ -12251,7 +12254,7 @@
           </a:ln>
           <a:extLst>
             <a:ext uri="{C572A759-6A51-4108-AA02-DFA0A04FC94B}">
-              <ma14:wrappingTextBoxFlag xmlns:ma14="http://schemas.microsoft.com/office/mac/drawingml/2011/main" xmlns:a14="http://schemas.microsoft.com/office/drawing/2010/main" xmlns:m="http://schemas.openxmlformats.org/officeDocument/2006/math" xmlns="" val="1"/>
+              <ma14:wrappingTextBoxFlag xmlns="" xmlns:m="http://schemas.openxmlformats.org/officeDocument/2006/math" xmlns:a14="http://schemas.microsoft.com/office/drawing/2010/main" xmlns:ma14="http://schemas.microsoft.com/office/mac/drawingml/2011/main" val="1"/>
             </a:ext>
           </a:extLst>
         </p:spPr>
@@ -12338,7 +12341,7 @@
           </a:ln>
           <a:extLst>
             <a:ext uri="{C572A759-6A51-4108-AA02-DFA0A04FC94B}">
-              <ma14:wrappingTextBoxFlag xmlns:ma14="http://schemas.microsoft.com/office/mac/drawingml/2011/main" xmlns:a14="http://schemas.microsoft.com/office/drawing/2010/main" xmlns:m="http://schemas.openxmlformats.org/officeDocument/2006/math" xmlns="" val="1"/>
+              <ma14:wrappingTextBoxFlag xmlns="" xmlns:m="http://schemas.openxmlformats.org/officeDocument/2006/math" xmlns:a14="http://schemas.microsoft.com/office/drawing/2010/main" xmlns:ma14="http://schemas.microsoft.com/office/mac/drawingml/2011/main" val="1"/>
             </a:ext>
           </a:extLst>
         </p:spPr>
@@ -12426,7 +12429,7 @@
           </a:ln>
           <a:extLst>
             <a:ext uri="{C572A759-6A51-4108-AA02-DFA0A04FC94B}">
-              <ma14:wrappingTextBoxFlag xmlns:ma14="http://schemas.microsoft.com/office/mac/drawingml/2011/main" xmlns:a14="http://schemas.microsoft.com/office/drawing/2010/main" xmlns:m="http://schemas.openxmlformats.org/officeDocument/2006/math" xmlns="" val="1"/>
+              <ma14:wrappingTextBoxFlag xmlns="" xmlns:m="http://schemas.openxmlformats.org/officeDocument/2006/math" xmlns:a14="http://schemas.microsoft.com/office/drawing/2010/main" xmlns:ma14="http://schemas.microsoft.com/office/mac/drawingml/2011/main" val="1"/>
             </a:ext>
           </a:extLst>
         </p:spPr>
@@ -12513,7 +12516,7 @@
           </a:ln>
           <a:extLst>
             <a:ext uri="{C572A759-6A51-4108-AA02-DFA0A04FC94B}">
-              <ma14:wrappingTextBoxFlag xmlns:ma14="http://schemas.microsoft.com/office/mac/drawingml/2011/main" xmlns:a14="http://schemas.microsoft.com/office/drawing/2010/main" xmlns:m="http://schemas.openxmlformats.org/officeDocument/2006/math" xmlns="" val="1"/>
+              <ma14:wrappingTextBoxFlag xmlns="" xmlns:m="http://schemas.openxmlformats.org/officeDocument/2006/math" xmlns:a14="http://schemas.microsoft.com/office/drawing/2010/main" xmlns:ma14="http://schemas.microsoft.com/office/mac/drawingml/2011/main" val="1"/>
             </a:ext>
           </a:extLst>
         </p:spPr>
@@ -12845,7 +12848,7 @@
           </a:ln>
           <a:extLst>
             <a:ext uri="{C572A759-6A51-4108-AA02-DFA0A04FC94B}">
-              <ma14:wrappingTextBoxFlag xmlns:ma14="http://schemas.microsoft.com/office/mac/drawingml/2011/main" xmlns:a14="http://schemas.microsoft.com/office/drawing/2010/main" xmlns:m="http://schemas.openxmlformats.org/officeDocument/2006/math" xmlns="" val="1"/>
+              <ma14:wrappingTextBoxFlag xmlns="" xmlns:m="http://schemas.openxmlformats.org/officeDocument/2006/math" xmlns:a14="http://schemas.microsoft.com/office/drawing/2010/main" xmlns:ma14="http://schemas.microsoft.com/office/mac/drawingml/2011/main" val="1"/>
             </a:ext>
           </a:extLst>
         </p:spPr>
@@ -12897,7 +12900,7 @@
           </a:ln>
           <a:extLst>
             <a:ext uri="{C572A759-6A51-4108-AA02-DFA0A04FC94B}">
-              <ma14:wrappingTextBoxFlag xmlns:ma14="http://schemas.microsoft.com/office/mac/drawingml/2011/main" xmlns:a14="http://schemas.microsoft.com/office/drawing/2010/main" xmlns:m="http://schemas.openxmlformats.org/officeDocument/2006/math" xmlns="" val="1"/>
+              <ma14:wrappingTextBoxFlag xmlns="" xmlns:m="http://schemas.openxmlformats.org/officeDocument/2006/math" xmlns:a14="http://schemas.microsoft.com/office/drawing/2010/main" xmlns:ma14="http://schemas.microsoft.com/office/mac/drawingml/2011/main" val="1"/>
             </a:ext>
           </a:extLst>
         </p:spPr>
@@ -12949,7 +12952,7 @@
           </a:ln>
           <a:extLst>
             <a:ext uri="{C572A759-6A51-4108-AA02-DFA0A04FC94B}">
-              <ma14:wrappingTextBoxFlag xmlns:ma14="http://schemas.microsoft.com/office/mac/drawingml/2011/main" xmlns:a14="http://schemas.microsoft.com/office/drawing/2010/main" xmlns:m="http://schemas.openxmlformats.org/officeDocument/2006/math" xmlns="" val="1"/>
+              <ma14:wrappingTextBoxFlag xmlns="" xmlns:m="http://schemas.openxmlformats.org/officeDocument/2006/math" xmlns:a14="http://schemas.microsoft.com/office/drawing/2010/main" xmlns:ma14="http://schemas.microsoft.com/office/mac/drawingml/2011/main" val="1"/>
             </a:ext>
           </a:extLst>
         </p:spPr>
@@ -13001,7 +13004,7 @@
           </a:ln>
           <a:extLst>
             <a:ext uri="{C572A759-6A51-4108-AA02-DFA0A04FC94B}">
-              <ma14:wrappingTextBoxFlag xmlns:ma14="http://schemas.microsoft.com/office/mac/drawingml/2011/main" xmlns:a14="http://schemas.microsoft.com/office/drawing/2010/main" xmlns:m="http://schemas.openxmlformats.org/officeDocument/2006/math" xmlns="" val="1"/>
+              <ma14:wrappingTextBoxFlag xmlns="" xmlns:m="http://schemas.openxmlformats.org/officeDocument/2006/math" xmlns:a14="http://schemas.microsoft.com/office/drawing/2010/main" xmlns:ma14="http://schemas.microsoft.com/office/mac/drawingml/2011/main" val="1"/>
             </a:ext>
           </a:extLst>
         </p:spPr>
@@ -13053,7 +13056,7 @@
           </a:ln>
           <a:extLst>
             <a:ext uri="{C572A759-6A51-4108-AA02-DFA0A04FC94B}">
-              <ma14:wrappingTextBoxFlag xmlns:ma14="http://schemas.microsoft.com/office/mac/drawingml/2011/main" xmlns:a14="http://schemas.microsoft.com/office/drawing/2010/main" xmlns:m="http://schemas.openxmlformats.org/officeDocument/2006/math" xmlns="" val="1"/>
+              <ma14:wrappingTextBoxFlag xmlns="" xmlns:m="http://schemas.openxmlformats.org/officeDocument/2006/math" xmlns:a14="http://schemas.microsoft.com/office/drawing/2010/main" xmlns:ma14="http://schemas.microsoft.com/office/mac/drawingml/2011/main" val="1"/>
             </a:ext>
           </a:extLst>
         </p:spPr>
@@ -13105,7 +13108,7 @@
           </a:ln>
           <a:extLst>
             <a:ext uri="{C572A759-6A51-4108-AA02-DFA0A04FC94B}">
-              <ma14:wrappingTextBoxFlag xmlns:ma14="http://schemas.microsoft.com/office/mac/drawingml/2011/main" xmlns:a14="http://schemas.microsoft.com/office/drawing/2010/main" xmlns:m="http://schemas.openxmlformats.org/officeDocument/2006/math" xmlns="" val="1"/>
+              <ma14:wrappingTextBoxFlag xmlns="" xmlns:m="http://schemas.openxmlformats.org/officeDocument/2006/math" xmlns:a14="http://schemas.microsoft.com/office/drawing/2010/main" xmlns:ma14="http://schemas.microsoft.com/office/mac/drawingml/2011/main" val="1"/>
             </a:ext>
           </a:extLst>
         </p:spPr>
@@ -13157,7 +13160,7 @@
           </a:ln>
           <a:extLst>
             <a:ext uri="{C572A759-6A51-4108-AA02-DFA0A04FC94B}">
-              <ma14:wrappingTextBoxFlag xmlns:ma14="http://schemas.microsoft.com/office/mac/drawingml/2011/main" xmlns:a14="http://schemas.microsoft.com/office/drawing/2010/main" xmlns:m="http://schemas.openxmlformats.org/officeDocument/2006/math" xmlns="" val="1"/>
+              <ma14:wrappingTextBoxFlag xmlns="" xmlns:m="http://schemas.openxmlformats.org/officeDocument/2006/math" xmlns:a14="http://schemas.microsoft.com/office/drawing/2010/main" xmlns:ma14="http://schemas.microsoft.com/office/mac/drawingml/2011/main" val="1"/>
             </a:ext>
           </a:extLst>
         </p:spPr>
@@ -13209,7 +13212,7 @@
           </a:ln>
           <a:extLst>
             <a:ext uri="{C572A759-6A51-4108-AA02-DFA0A04FC94B}">
-              <ma14:wrappingTextBoxFlag xmlns:ma14="http://schemas.microsoft.com/office/mac/drawingml/2011/main" xmlns:a14="http://schemas.microsoft.com/office/drawing/2010/main" xmlns:m="http://schemas.openxmlformats.org/officeDocument/2006/math" xmlns="" val="1"/>
+              <ma14:wrappingTextBoxFlag xmlns="" xmlns:m="http://schemas.openxmlformats.org/officeDocument/2006/math" xmlns:a14="http://schemas.microsoft.com/office/drawing/2010/main" xmlns:ma14="http://schemas.microsoft.com/office/mac/drawingml/2011/main" val="1"/>
             </a:ext>
           </a:extLst>
         </p:spPr>
@@ -13296,7 +13299,7 @@
           </a:ln>
           <a:extLst>
             <a:ext uri="{C572A759-6A51-4108-AA02-DFA0A04FC94B}">
-              <ma14:wrappingTextBoxFlag xmlns:ma14="http://schemas.microsoft.com/office/mac/drawingml/2011/main" xmlns:a14="http://schemas.microsoft.com/office/drawing/2010/main" xmlns:m="http://schemas.openxmlformats.org/officeDocument/2006/math" xmlns="" val="1"/>
+              <ma14:wrappingTextBoxFlag xmlns="" xmlns:m="http://schemas.openxmlformats.org/officeDocument/2006/math" xmlns:a14="http://schemas.microsoft.com/office/drawing/2010/main" xmlns:ma14="http://schemas.microsoft.com/office/mac/drawingml/2011/main" val="1"/>
             </a:ext>
           </a:extLst>
         </p:spPr>
@@ -13383,7 +13386,7 @@
           </a:ln>
           <a:extLst>
             <a:ext uri="{C572A759-6A51-4108-AA02-DFA0A04FC94B}">
-              <ma14:wrappingTextBoxFlag xmlns:ma14="http://schemas.microsoft.com/office/mac/drawingml/2011/main" xmlns:a14="http://schemas.microsoft.com/office/drawing/2010/main" xmlns:m="http://schemas.openxmlformats.org/officeDocument/2006/math" xmlns="" val="1"/>
+              <ma14:wrappingTextBoxFlag xmlns="" xmlns:m="http://schemas.openxmlformats.org/officeDocument/2006/math" xmlns:a14="http://schemas.microsoft.com/office/drawing/2010/main" xmlns:ma14="http://schemas.microsoft.com/office/mac/drawingml/2011/main" val="1"/>
             </a:ext>
           </a:extLst>
         </p:spPr>
@@ -13466,7 +13469,7 @@
           </a:ln>
           <a:extLst>
             <a:ext uri="{C572A759-6A51-4108-AA02-DFA0A04FC94B}">
-              <ma14:wrappingTextBoxFlag xmlns:ma14="http://schemas.microsoft.com/office/mac/drawingml/2011/main" xmlns:a14="http://schemas.microsoft.com/office/drawing/2010/main" xmlns:m="http://schemas.openxmlformats.org/officeDocument/2006/math" xmlns="" val="1"/>
+              <ma14:wrappingTextBoxFlag xmlns="" xmlns:m="http://schemas.openxmlformats.org/officeDocument/2006/math" xmlns:a14="http://schemas.microsoft.com/office/drawing/2010/main" xmlns:ma14="http://schemas.microsoft.com/office/mac/drawingml/2011/main" val="1"/>
             </a:ext>
           </a:extLst>
         </p:spPr>
@@ -13518,7 +13521,7 @@
           </a:ln>
           <a:extLst>
             <a:ext uri="{C572A759-6A51-4108-AA02-DFA0A04FC94B}">
-              <ma14:wrappingTextBoxFlag xmlns:ma14="http://schemas.microsoft.com/office/mac/drawingml/2011/main" xmlns:a14="http://schemas.microsoft.com/office/drawing/2010/main" xmlns:m="http://schemas.openxmlformats.org/officeDocument/2006/math" xmlns="" val="1"/>
+              <ma14:wrappingTextBoxFlag xmlns="" xmlns:m="http://schemas.openxmlformats.org/officeDocument/2006/math" xmlns:a14="http://schemas.microsoft.com/office/drawing/2010/main" xmlns:ma14="http://schemas.microsoft.com/office/mac/drawingml/2011/main" val="1"/>
             </a:ext>
           </a:extLst>
         </p:spPr>
@@ -13566,7 +13569,7 @@
           </a:ln>
           <a:extLst>
             <a:ext uri="{C572A759-6A51-4108-AA02-DFA0A04FC94B}">
-              <ma14:wrappingTextBoxFlag xmlns:ma14="http://schemas.microsoft.com/office/mac/drawingml/2011/main" xmlns:a14="http://schemas.microsoft.com/office/drawing/2010/main" xmlns:m="http://schemas.openxmlformats.org/officeDocument/2006/math" xmlns="" val="1"/>
+              <ma14:wrappingTextBoxFlag xmlns="" xmlns:m="http://schemas.openxmlformats.org/officeDocument/2006/math" xmlns:a14="http://schemas.microsoft.com/office/drawing/2010/main" xmlns:ma14="http://schemas.microsoft.com/office/mac/drawingml/2011/main" val="1"/>
             </a:ext>
           </a:extLst>
         </p:spPr>
@@ -13761,7 +13764,7 @@
           </a:ln>
           <a:extLst>
             <a:ext uri="{C572A759-6A51-4108-AA02-DFA0A04FC94B}">
-              <ma14:wrappingTextBoxFlag xmlns="" xmlns:m="http://schemas.openxmlformats.org/officeDocument/2006/math" xmlns:a14="http://schemas.microsoft.com/office/drawing/2010/main" xmlns:ma14="http://schemas.microsoft.com/office/mac/drawingml/2011/main" val="1"/>
+              <ma14:wrappingTextBoxFlag xmlns:ma14="http://schemas.microsoft.com/office/mac/drawingml/2011/main" xmlns:a14="http://schemas.microsoft.com/office/drawing/2010/main" xmlns:m="http://schemas.openxmlformats.org/officeDocument/2006/math" xmlns="" val="1"/>
             </a:ext>
           </a:extLst>
         </p:spPr>
@@ -13838,7 +13841,7 @@
           </a:ln>
           <a:extLst>
             <a:ext uri="{C572A759-6A51-4108-AA02-DFA0A04FC94B}">
-              <ma14:wrappingTextBoxFlag xmlns="" xmlns:m="http://schemas.openxmlformats.org/officeDocument/2006/math" xmlns:a14="http://schemas.microsoft.com/office/drawing/2010/main" xmlns:ma14="http://schemas.microsoft.com/office/mac/drawingml/2011/main" val="1"/>
+              <ma14:wrappingTextBoxFlag xmlns:ma14="http://schemas.microsoft.com/office/mac/drawingml/2011/main" xmlns:a14="http://schemas.microsoft.com/office/drawing/2010/main" xmlns:m="http://schemas.openxmlformats.org/officeDocument/2006/math" xmlns="" val="1"/>
             </a:ext>
           </a:extLst>
         </p:spPr>
@@ -14836,7 +14839,7 @@
           </a:ln>
           <a:extLst>
             <a:ext uri="{C572A759-6A51-4108-AA02-DFA0A04FC94B}">
-              <ma14:wrappingTextBoxFlag xmlns="" xmlns:m="http://schemas.openxmlformats.org/officeDocument/2006/math" xmlns:a14="http://schemas.microsoft.com/office/drawing/2010/main" xmlns:ma14="http://schemas.microsoft.com/office/mac/drawingml/2011/main" val="1"/>
+              <ma14:wrappingTextBoxFlag xmlns:ma14="http://schemas.microsoft.com/office/mac/drawingml/2011/main" xmlns:a14="http://schemas.microsoft.com/office/drawing/2010/main" xmlns:m="http://schemas.openxmlformats.org/officeDocument/2006/math" xmlns="" val="1"/>
             </a:ext>
           </a:extLst>
         </p:spPr>
@@ -14924,7 +14927,7 @@
           </a:ln>
           <a:extLst>
             <a:ext uri="{C572A759-6A51-4108-AA02-DFA0A04FC94B}">
-              <ma14:wrappingTextBoxFlag xmlns="" xmlns:m="http://schemas.openxmlformats.org/officeDocument/2006/math" xmlns:a14="http://schemas.microsoft.com/office/drawing/2010/main" xmlns:ma14="http://schemas.microsoft.com/office/mac/drawingml/2011/main" val="1"/>
+              <ma14:wrappingTextBoxFlag xmlns:ma14="http://schemas.microsoft.com/office/mac/drawingml/2011/main" xmlns:a14="http://schemas.microsoft.com/office/drawing/2010/main" xmlns:m="http://schemas.openxmlformats.org/officeDocument/2006/math" xmlns="" val="1"/>
             </a:ext>
           </a:extLst>
         </p:spPr>
@@ -15003,7 +15006,7 @@
           </a:ln>
           <a:extLst>
             <a:ext uri="{C572A759-6A51-4108-AA02-DFA0A04FC94B}">
-              <ma14:wrappingTextBoxFlag xmlns="" xmlns:m="http://schemas.openxmlformats.org/officeDocument/2006/math" xmlns:a14="http://schemas.microsoft.com/office/drawing/2010/main" xmlns:ma14="http://schemas.microsoft.com/office/mac/drawingml/2011/main" val="1"/>
+              <ma14:wrappingTextBoxFlag xmlns:ma14="http://schemas.microsoft.com/office/mac/drawingml/2011/main" xmlns:a14="http://schemas.microsoft.com/office/drawing/2010/main" xmlns:m="http://schemas.openxmlformats.org/officeDocument/2006/math" xmlns="" val="1"/>
             </a:ext>
           </a:extLst>
         </p:spPr>
@@ -15087,7 +15090,7 @@
           </a:ln>
           <a:extLst>
             <a:ext uri="{C572A759-6A51-4108-AA02-DFA0A04FC94B}">
-              <ma14:wrappingTextBoxFlag xmlns="" xmlns:m="http://schemas.openxmlformats.org/officeDocument/2006/math" xmlns:a14="http://schemas.microsoft.com/office/drawing/2010/main" xmlns:ma14="http://schemas.microsoft.com/office/mac/drawingml/2011/main" val="1"/>
+              <ma14:wrappingTextBoxFlag xmlns:ma14="http://schemas.microsoft.com/office/mac/drawingml/2011/main" xmlns:a14="http://schemas.microsoft.com/office/drawing/2010/main" xmlns:m="http://schemas.openxmlformats.org/officeDocument/2006/math" xmlns="" val="1"/>
             </a:ext>
           </a:extLst>
         </p:spPr>
@@ -15166,7 +15169,7 @@
           </a:ln>
           <a:extLst>
             <a:ext uri="{C572A759-6A51-4108-AA02-DFA0A04FC94B}">
-              <ma14:wrappingTextBoxFlag xmlns="" xmlns:m="http://schemas.openxmlformats.org/officeDocument/2006/math" xmlns:a14="http://schemas.microsoft.com/office/drawing/2010/main" xmlns:ma14="http://schemas.microsoft.com/office/mac/drawingml/2011/main" val="1"/>
+              <ma14:wrappingTextBoxFlag xmlns:ma14="http://schemas.microsoft.com/office/mac/drawingml/2011/main" xmlns:a14="http://schemas.microsoft.com/office/drawing/2010/main" xmlns:m="http://schemas.openxmlformats.org/officeDocument/2006/math" xmlns="" val="1"/>
             </a:ext>
           </a:extLst>
         </p:spPr>
@@ -15243,7 +15246,7 @@
           </a:ln>
           <a:extLst>
             <a:ext uri="{C572A759-6A51-4108-AA02-DFA0A04FC94B}">
-              <ma14:wrappingTextBoxFlag xmlns="" xmlns:m="http://schemas.openxmlformats.org/officeDocument/2006/math" xmlns:a14="http://schemas.microsoft.com/office/drawing/2010/main" xmlns:ma14="http://schemas.microsoft.com/office/mac/drawingml/2011/main" val="1"/>
+              <ma14:wrappingTextBoxFlag xmlns:ma14="http://schemas.microsoft.com/office/mac/drawingml/2011/main" xmlns:a14="http://schemas.microsoft.com/office/drawing/2010/main" xmlns:m="http://schemas.openxmlformats.org/officeDocument/2006/math" xmlns="" val="1"/>
             </a:ext>
           </a:extLst>
         </p:spPr>
@@ -15322,7 +15325,7 @@
           </a:ln>
           <a:extLst>
             <a:ext uri="{C572A759-6A51-4108-AA02-DFA0A04FC94B}">
-              <ma14:wrappingTextBoxFlag xmlns="" xmlns:m="http://schemas.openxmlformats.org/officeDocument/2006/math" xmlns:a14="http://schemas.microsoft.com/office/drawing/2010/main" xmlns:ma14="http://schemas.microsoft.com/office/mac/drawingml/2011/main" val="1"/>
+              <ma14:wrappingTextBoxFlag xmlns:ma14="http://schemas.microsoft.com/office/mac/drawingml/2011/main" xmlns:a14="http://schemas.microsoft.com/office/drawing/2010/main" xmlns:m="http://schemas.openxmlformats.org/officeDocument/2006/math" xmlns="" val="1"/>
             </a:ext>
           </a:extLst>
         </p:spPr>
@@ -15405,7 +15408,7 @@
           </a:ln>
           <a:extLst>
             <a:ext uri="{C572A759-6A51-4108-AA02-DFA0A04FC94B}">
-              <ma14:wrappingTextBoxFlag xmlns="" xmlns:m="http://schemas.openxmlformats.org/officeDocument/2006/math" xmlns:a14="http://schemas.microsoft.com/office/drawing/2010/main" xmlns:ma14="http://schemas.microsoft.com/office/mac/drawingml/2011/main" val="1"/>
+              <ma14:wrappingTextBoxFlag xmlns:ma14="http://schemas.microsoft.com/office/mac/drawingml/2011/main" xmlns:a14="http://schemas.microsoft.com/office/drawing/2010/main" xmlns:m="http://schemas.openxmlformats.org/officeDocument/2006/math" xmlns="" val="1"/>
             </a:ext>
           </a:extLst>
         </p:spPr>
@@ -15453,7 +15456,7 @@
           </a:ln>
           <a:extLst>
             <a:ext uri="{C572A759-6A51-4108-AA02-DFA0A04FC94B}">
-              <ma14:wrappingTextBoxFlag xmlns="" xmlns:m="http://schemas.openxmlformats.org/officeDocument/2006/math" xmlns:a14="http://schemas.microsoft.com/office/drawing/2010/main" xmlns:ma14="http://schemas.microsoft.com/office/mac/drawingml/2011/main" val="1"/>
+              <ma14:wrappingTextBoxFlag xmlns:ma14="http://schemas.microsoft.com/office/mac/drawingml/2011/main" xmlns:a14="http://schemas.microsoft.com/office/drawing/2010/main" xmlns:m="http://schemas.openxmlformats.org/officeDocument/2006/math" xmlns="" val="1"/>
             </a:ext>
           </a:extLst>
         </p:spPr>
@@ -16922,7 +16925,7 @@
           </a:ln>
           <a:extLst>
             <a:ext uri="{C572A759-6A51-4108-AA02-DFA0A04FC94B}">
-              <ma14:wrappingTextBoxFlag xmlns="" xmlns:m="http://schemas.openxmlformats.org/officeDocument/2006/math" xmlns:a14="http://schemas.microsoft.com/office/drawing/2010/main" xmlns:ma14="http://schemas.microsoft.com/office/mac/drawingml/2011/main" val="1"/>
+              <ma14:wrappingTextBoxFlag xmlns:ma14="http://schemas.microsoft.com/office/mac/drawingml/2011/main" xmlns:a14="http://schemas.microsoft.com/office/drawing/2010/main" xmlns:m="http://schemas.openxmlformats.org/officeDocument/2006/math" xmlns="" val="1"/>
             </a:ext>
           </a:extLst>
         </p:spPr>
@@ -17431,7 +17434,7 @@
           </a:ln>
           <a:extLst>
             <a:ext uri="{C572A759-6A51-4108-AA02-DFA0A04FC94B}">
-              <ma14:wrappingTextBoxFlag xmlns="" xmlns:m="http://schemas.openxmlformats.org/officeDocument/2006/math" xmlns:a14="http://schemas.microsoft.com/office/drawing/2010/main" xmlns:ma14="http://schemas.microsoft.com/office/mac/drawingml/2011/main" val="1"/>
+              <ma14:wrappingTextBoxFlag xmlns:ma14="http://schemas.microsoft.com/office/mac/drawingml/2011/main" xmlns:a14="http://schemas.microsoft.com/office/drawing/2010/main" xmlns:m="http://schemas.openxmlformats.org/officeDocument/2006/math" xmlns="" val="1"/>
             </a:ext>
           </a:extLst>
         </p:spPr>
@@ -17519,7 +17522,7 @@
           </a:ln>
           <a:extLst>
             <a:ext uri="{C572A759-6A51-4108-AA02-DFA0A04FC94B}">
-              <ma14:wrappingTextBoxFlag xmlns="" xmlns:m="http://schemas.openxmlformats.org/officeDocument/2006/math" xmlns:a14="http://schemas.microsoft.com/office/drawing/2010/main" xmlns:ma14="http://schemas.microsoft.com/office/mac/drawingml/2011/main" val="1"/>
+              <ma14:wrappingTextBoxFlag xmlns:ma14="http://schemas.microsoft.com/office/mac/drawingml/2011/main" xmlns:a14="http://schemas.microsoft.com/office/drawing/2010/main" xmlns:m="http://schemas.openxmlformats.org/officeDocument/2006/math" xmlns="" val="1"/>
             </a:ext>
           </a:extLst>
         </p:spPr>
@@ -17571,7 +17574,7 @@
           </a:ln>
           <a:extLst>
             <a:ext uri="{C572A759-6A51-4108-AA02-DFA0A04FC94B}">
-              <ma14:wrappingTextBoxFlag xmlns="" xmlns:m="http://schemas.openxmlformats.org/officeDocument/2006/math" xmlns:a14="http://schemas.microsoft.com/office/drawing/2010/main" xmlns:ma14="http://schemas.microsoft.com/office/mac/drawingml/2011/main" val="1"/>
+              <ma14:wrappingTextBoxFlag xmlns:ma14="http://schemas.microsoft.com/office/mac/drawingml/2011/main" xmlns:a14="http://schemas.microsoft.com/office/drawing/2010/main" xmlns:m="http://schemas.openxmlformats.org/officeDocument/2006/math" xmlns="" val="1"/>
             </a:ext>
           </a:extLst>
         </p:spPr>
@@ -18748,7 +18751,7 @@
           </a:ln>
           <a:extLst>
             <a:ext uri="{C572A759-6A51-4108-AA02-DFA0A04FC94B}">
-              <ma14:wrappingTextBoxFlag xmlns="" xmlns:m="http://schemas.openxmlformats.org/officeDocument/2006/math" xmlns:a14="http://schemas.microsoft.com/office/drawing/2010/main" xmlns:ma14="http://schemas.microsoft.com/office/mac/drawingml/2011/main" val="1"/>
+              <ma14:wrappingTextBoxFlag xmlns:ma14="http://schemas.microsoft.com/office/mac/drawingml/2011/main" xmlns:a14="http://schemas.microsoft.com/office/drawing/2010/main" xmlns:m="http://schemas.openxmlformats.org/officeDocument/2006/math" xmlns="" val="1"/>
             </a:ext>
           </a:extLst>
         </p:spPr>
@@ -18800,7 +18803,7 @@
           </a:ln>
           <a:extLst>
             <a:ext uri="{C572A759-6A51-4108-AA02-DFA0A04FC94B}">
-              <ma14:wrappingTextBoxFlag xmlns="" xmlns:m="http://schemas.openxmlformats.org/officeDocument/2006/math" xmlns:a14="http://schemas.microsoft.com/office/drawing/2010/main" xmlns:ma14="http://schemas.microsoft.com/office/mac/drawingml/2011/main" val="1"/>
+              <ma14:wrappingTextBoxFlag xmlns:ma14="http://schemas.microsoft.com/office/mac/drawingml/2011/main" xmlns:a14="http://schemas.microsoft.com/office/drawing/2010/main" xmlns:m="http://schemas.openxmlformats.org/officeDocument/2006/math" xmlns="" val="1"/>
             </a:ext>
           </a:extLst>
         </p:spPr>
@@ -18852,7 +18855,7 @@
           </a:ln>
           <a:extLst>
             <a:ext uri="{C572A759-6A51-4108-AA02-DFA0A04FC94B}">
-              <ma14:wrappingTextBoxFlag xmlns="" xmlns:m="http://schemas.openxmlformats.org/officeDocument/2006/math" xmlns:a14="http://schemas.microsoft.com/office/drawing/2010/main" xmlns:ma14="http://schemas.microsoft.com/office/mac/drawingml/2011/main" val="1"/>
+              <ma14:wrappingTextBoxFlag xmlns:ma14="http://schemas.microsoft.com/office/mac/drawingml/2011/main" xmlns:a14="http://schemas.microsoft.com/office/drawing/2010/main" xmlns:m="http://schemas.openxmlformats.org/officeDocument/2006/math" xmlns="" val="1"/>
             </a:ext>
           </a:extLst>
         </p:spPr>
@@ -18904,7 +18907,7 @@
           </a:ln>
           <a:extLst>
             <a:ext uri="{C572A759-6A51-4108-AA02-DFA0A04FC94B}">
-              <ma14:wrappingTextBoxFlag xmlns="" xmlns:m="http://schemas.openxmlformats.org/officeDocument/2006/math" xmlns:a14="http://schemas.microsoft.com/office/drawing/2010/main" xmlns:ma14="http://schemas.microsoft.com/office/mac/drawingml/2011/main" val="1"/>
+              <ma14:wrappingTextBoxFlag xmlns:ma14="http://schemas.microsoft.com/office/mac/drawingml/2011/main" xmlns:a14="http://schemas.microsoft.com/office/drawing/2010/main" xmlns:m="http://schemas.openxmlformats.org/officeDocument/2006/math" xmlns="" val="1"/>
             </a:ext>
           </a:extLst>
         </p:spPr>
@@ -18956,7 +18959,7 @@
           </a:ln>
           <a:extLst>
             <a:ext uri="{C572A759-6A51-4108-AA02-DFA0A04FC94B}">
-              <ma14:wrappingTextBoxFlag xmlns="" xmlns:m="http://schemas.openxmlformats.org/officeDocument/2006/math" xmlns:a14="http://schemas.microsoft.com/office/drawing/2010/main" xmlns:ma14="http://schemas.microsoft.com/office/mac/drawingml/2011/main" val="1"/>
+              <ma14:wrappingTextBoxFlag xmlns:ma14="http://schemas.microsoft.com/office/mac/drawingml/2011/main" xmlns:a14="http://schemas.microsoft.com/office/drawing/2010/main" xmlns:m="http://schemas.openxmlformats.org/officeDocument/2006/math" xmlns="" val="1"/>
             </a:ext>
           </a:extLst>
         </p:spPr>
@@ -19008,7 +19011,7 @@
           </a:ln>
           <a:extLst>
             <a:ext uri="{C572A759-6A51-4108-AA02-DFA0A04FC94B}">
-              <ma14:wrappingTextBoxFlag xmlns="" xmlns:m="http://schemas.openxmlformats.org/officeDocument/2006/math" xmlns:a14="http://schemas.microsoft.com/office/drawing/2010/main" xmlns:ma14="http://schemas.microsoft.com/office/mac/drawingml/2011/main" val="1"/>
+              <ma14:wrappingTextBoxFlag xmlns:ma14="http://schemas.microsoft.com/office/mac/drawingml/2011/main" xmlns:a14="http://schemas.microsoft.com/office/drawing/2010/main" xmlns:m="http://schemas.openxmlformats.org/officeDocument/2006/math" xmlns="" val="1"/>
             </a:ext>
           </a:extLst>
         </p:spPr>
@@ -19060,7 +19063,7 @@
           </a:ln>
           <a:extLst>
             <a:ext uri="{C572A759-6A51-4108-AA02-DFA0A04FC94B}">
-              <ma14:wrappingTextBoxFlag xmlns="" xmlns:m="http://schemas.openxmlformats.org/officeDocument/2006/math" xmlns:a14="http://schemas.microsoft.com/office/drawing/2010/main" xmlns:ma14="http://schemas.microsoft.com/office/mac/drawingml/2011/main" val="1"/>
+              <ma14:wrappingTextBoxFlag xmlns:ma14="http://schemas.microsoft.com/office/mac/drawingml/2011/main" xmlns:a14="http://schemas.microsoft.com/office/drawing/2010/main" xmlns:m="http://schemas.openxmlformats.org/officeDocument/2006/math" xmlns="" val="1"/>
             </a:ext>
           </a:extLst>
         </p:spPr>
@@ -19112,7 +19115,7 @@
           </a:ln>
           <a:extLst>
             <a:ext uri="{C572A759-6A51-4108-AA02-DFA0A04FC94B}">
-              <ma14:wrappingTextBoxFlag xmlns="" xmlns:m="http://schemas.openxmlformats.org/officeDocument/2006/math" xmlns:a14="http://schemas.microsoft.com/office/drawing/2010/main" xmlns:ma14="http://schemas.microsoft.com/office/mac/drawingml/2011/main" val="1"/>
+              <ma14:wrappingTextBoxFlag xmlns:ma14="http://schemas.microsoft.com/office/mac/drawingml/2011/main" xmlns:a14="http://schemas.microsoft.com/office/drawing/2010/main" xmlns:m="http://schemas.openxmlformats.org/officeDocument/2006/math" xmlns="" val="1"/>
             </a:ext>
           </a:extLst>
         </p:spPr>
@@ -19164,7 +19167,7 @@
           </a:ln>
           <a:extLst>
             <a:ext uri="{C572A759-6A51-4108-AA02-DFA0A04FC94B}">
-              <ma14:wrappingTextBoxFlag xmlns="" xmlns:m="http://schemas.openxmlformats.org/officeDocument/2006/math" xmlns:a14="http://schemas.microsoft.com/office/drawing/2010/main" xmlns:ma14="http://schemas.microsoft.com/office/mac/drawingml/2011/main" val="1"/>
+              <ma14:wrappingTextBoxFlag xmlns:ma14="http://schemas.microsoft.com/office/mac/drawingml/2011/main" xmlns:a14="http://schemas.microsoft.com/office/drawing/2010/main" xmlns:m="http://schemas.openxmlformats.org/officeDocument/2006/math" xmlns="" val="1"/>
             </a:ext>
           </a:extLst>
         </p:spPr>
@@ -19216,7 +19219,7 @@
           </a:ln>
           <a:extLst>
             <a:ext uri="{C572A759-6A51-4108-AA02-DFA0A04FC94B}">
-              <ma14:wrappingTextBoxFlag xmlns="" xmlns:m="http://schemas.openxmlformats.org/officeDocument/2006/math" xmlns:a14="http://schemas.microsoft.com/office/drawing/2010/main" xmlns:ma14="http://schemas.microsoft.com/office/mac/drawingml/2011/main" val="1"/>
+              <ma14:wrappingTextBoxFlag xmlns:ma14="http://schemas.microsoft.com/office/mac/drawingml/2011/main" xmlns:a14="http://schemas.microsoft.com/office/drawing/2010/main" xmlns:m="http://schemas.openxmlformats.org/officeDocument/2006/math" xmlns="" val="1"/>
             </a:ext>
           </a:extLst>
         </p:spPr>
@@ -19268,7 +19271,7 @@
           </a:ln>
           <a:extLst>
             <a:ext uri="{C572A759-6A51-4108-AA02-DFA0A04FC94B}">
-              <ma14:wrappingTextBoxFlag xmlns="" xmlns:m="http://schemas.openxmlformats.org/officeDocument/2006/math" xmlns:a14="http://schemas.microsoft.com/office/drawing/2010/main" xmlns:ma14="http://schemas.microsoft.com/office/mac/drawingml/2011/main" val="1"/>
+              <ma14:wrappingTextBoxFlag xmlns:ma14="http://schemas.microsoft.com/office/mac/drawingml/2011/main" xmlns:a14="http://schemas.microsoft.com/office/drawing/2010/main" xmlns:m="http://schemas.openxmlformats.org/officeDocument/2006/math" xmlns="" val="1"/>
             </a:ext>
           </a:extLst>
         </p:spPr>
@@ -19320,7 +19323,7 @@
           </a:ln>
           <a:extLst>
             <a:ext uri="{C572A759-6A51-4108-AA02-DFA0A04FC94B}">
-              <ma14:wrappingTextBoxFlag xmlns="" xmlns:m="http://schemas.openxmlformats.org/officeDocument/2006/math" xmlns:a14="http://schemas.microsoft.com/office/drawing/2010/main" xmlns:ma14="http://schemas.microsoft.com/office/mac/drawingml/2011/main" val="1"/>
+              <ma14:wrappingTextBoxFlag xmlns:ma14="http://schemas.microsoft.com/office/mac/drawingml/2011/main" xmlns:a14="http://schemas.microsoft.com/office/drawing/2010/main" xmlns:m="http://schemas.openxmlformats.org/officeDocument/2006/math" xmlns="" val="1"/>
             </a:ext>
           </a:extLst>
         </p:spPr>
@@ -19372,7 +19375,7 @@
           </a:ln>
           <a:extLst>
             <a:ext uri="{C572A759-6A51-4108-AA02-DFA0A04FC94B}">
-              <ma14:wrappingTextBoxFlag xmlns="" xmlns:m="http://schemas.openxmlformats.org/officeDocument/2006/math" xmlns:a14="http://schemas.microsoft.com/office/drawing/2010/main" xmlns:ma14="http://schemas.microsoft.com/office/mac/drawingml/2011/main" val="1"/>
+              <ma14:wrappingTextBoxFlag xmlns:ma14="http://schemas.microsoft.com/office/mac/drawingml/2011/main" xmlns:a14="http://schemas.microsoft.com/office/drawing/2010/main" xmlns:m="http://schemas.openxmlformats.org/officeDocument/2006/math" xmlns="" val="1"/>
             </a:ext>
           </a:extLst>
         </p:spPr>
@@ -19424,7 +19427,7 @@
           </a:ln>
           <a:extLst>
             <a:ext uri="{C572A759-6A51-4108-AA02-DFA0A04FC94B}">
-              <ma14:wrappingTextBoxFlag xmlns="" xmlns:m="http://schemas.openxmlformats.org/officeDocument/2006/math" xmlns:a14="http://schemas.microsoft.com/office/drawing/2010/main" xmlns:ma14="http://schemas.microsoft.com/office/mac/drawingml/2011/main" val="1"/>
+              <ma14:wrappingTextBoxFlag xmlns:ma14="http://schemas.microsoft.com/office/mac/drawingml/2011/main" xmlns:a14="http://schemas.microsoft.com/office/drawing/2010/main" xmlns:m="http://schemas.openxmlformats.org/officeDocument/2006/math" xmlns="" val="1"/>
             </a:ext>
           </a:extLst>
         </p:spPr>
@@ -19476,7 +19479,7 @@
           </a:ln>
           <a:extLst>
             <a:ext uri="{C572A759-6A51-4108-AA02-DFA0A04FC94B}">
-              <ma14:wrappingTextBoxFlag xmlns="" xmlns:m="http://schemas.openxmlformats.org/officeDocument/2006/math" xmlns:a14="http://schemas.microsoft.com/office/drawing/2010/main" xmlns:ma14="http://schemas.microsoft.com/office/mac/drawingml/2011/main" val="1"/>
+              <ma14:wrappingTextBoxFlag xmlns:ma14="http://schemas.microsoft.com/office/mac/drawingml/2011/main" xmlns:a14="http://schemas.microsoft.com/office/drawing/2010/main" xmlns:m="http://schemas.openxmlformats.org/officeDocument/2006/math" xmlns="" val="1"/>
             </a:ext>
           </a:extLst>
         </p:spPr>
@@ -19528,7 +19531,7 @@
           </a:ln>
           <a:extLst>
             <a:ext uri="{C572A759-6A51-4108-AA02-DFA0A04FC94B}">
-              <ma14:wrappingTextBoxFlag xmlns="" xmlns:m="http://schemas.openxmlformats.org/officeDocument/2006/math" xmlns:a14="http://schemas.microsoft.com/office/drawing/2010/main" xmlns:ma14="http://schemas.microsoft.com/office/mac/drawingml/2011/main" val="1"/>
+              <ma14:wrappingTextBoxFlag xmlns:ma14="http://schemas.microsoft.com/office/mac/drawingml/2011/main" xmlns:a14="http://schemas.microsoft.com/office/drawing/2010/main" xmlns:m="http://schemas.openxmlformats.org/officeDocument/2006/math" xmlns="" val="1"/>
             </a:ext>
           </a:extLst>
         </p:spPr>
@@ -19580,7 +19583,7 @@
           </a:ln>
           <a:extLst>
             <a:ext uri="{C572A759-6A51-4108-AA02-DFA0A04FC94B}">
-              <ma14:wrappingTextBoxFlag xmlns="" xmlns:m="http://schemas.openxmlformats.org/officeDocument/2006/math" xmlns:a14="http://schemas.microsoft.com/office/drawing/2010/main" xmlns:ma14="http://schemas.microsoft.com/office/mac/drawingml/2011/main" val="1"/>
+              <ma14:wrappingTextBoxFlag xmlns:ma14="http://schemas.microsoft.com/office/mac/drawingml/2011/main" xmlns:a14="http://schemas.microsoft.com/office/drawing/2010/main" xmlns:m="http://schemas.openxmlformats.org/officeDocument/2006/math" xmlns="" val="1"/>
             </a:ext>
           </a:extLst>
         </p:spPr>
@@ -19632,7 +19635,7 @@
           </a:ln>
           <a:extLst>
             <a:ext uri="{C572A759-6A51-4108-AA02-DFA0A04FC94B}">
-              <ma14:wrappingTextBoxFlag xmlns="" xmlns:m="http://schemas.openxmlformats.org/officeDocument/2006/math" xmlns:a14="http://schemas.microsoft.com/office/drawing/2010/main" xmlns:ma14="http://schemas.microsoft.com/office/mac/drawingml/2011/main" val="1"/>
+              <ma14:wrappingTextBoxFlag xmlns:ma14="http://schemas.microsoft.com/office/mac/drawingml/2011/main" xmlns:a14="http://schemas.microsoft.com/office/drawing/2010/main" xmlns:m="http://schemas.openxmlformats.org/officeDocument/2006/math" xmlns="" val="1"/>
             </a:ext>
           </a:extLst>
         </p:spPr>
@@ -19684,7 +19687,7 @@
           </a:ln>
           <a:extLst>
             <a:ext uri="{C572A759-6A51-4108-AA02-DFA0A04FC94B}">
-              <ma14:wrappingTextBoxFlag xmlns="" xmlns:m="http://schemas.openxmlformats.org/officeDocument/2006/math" xmlns:a14="http://schemas.microsoft.com/office/drawing/2010/main" xmlns:ma14="http://schemas.microsoft.com/office/mac/drawingml/2011/main" val="1"/>
+              <ma14:wrappingTextBoxFlag xmlns:ma14="http://schemas.microsoft.com/office/mac/drawingml/2011/main" xmlns:a14="http://schemas.microsoft.com/office/drawing/2010/main" xmlns:m="http://schemas.openxmlformats.org/officeDocument/2006/math" xmlns="" val="1"/>
             </a:ext>
           </a:extLst>
         </p:spPr>
@@ -19736,7 +19739,7 @@
           </a:ln>
           <a:extLst>
             <a:ext uri="{C572A759-6A51-4108-AA02-DFA0A04FC94B}">
-              <ma14:wrappingTextBoxFlag xmlns="" xmlns:m="http://schemas.openxmlformats.org/officeDocument/2006/math" xmlns:a14="http://schemas.microsoft.com/office/drawing/2010/main" xmlns:ma14="http://schemas.microsoft.com/office/mac/drawingml/2011/main" val="1"/>
+              <ma14:wrappingTextBoxFlag xmlns:ma14="http://schemas.microsoft.com/office/mac/drawingml/2011/main" xmlns:a14="http://schemas.microsoft.com/office/drawing/2010/main" xmlns:m="http://schemas.openxmlformats.org/officeDocument/2006/math" xmlns="" val="1"/>
             </a:ext>
           </a:extLst>
         </p:spPr>
@@ -19788,7 +19791,7 @@
           </a:ln>
           <a:extLst>
             <a:ext uri="{C572A759-6A51-4108-AA02-DFA0A04FC94B}">
-              <ma14:wrappingTextBoxFlag xmlns="" xmlns:m="http://schemas.openxmlformats.org/officeDocument/2006/math" xmlns:a14="http://schemas.microsoft.com/office/drawing/2010/main" xmlns:ma14="http://schemas.microsoft.com/office/mac/drawingml/2011/main" val="1"/>
+              <ma14:wrappingTextBoxFlag xmlns:ma14="http://schemas.microsoft.com/office/mac/drawingml/2011/main" xmlns:a14="http://schemas.microsoft.com/office/drawing/2010/main" xmlns:m="http://schemas.openxmlformats.org/officeDocument/2006/math" xmlns="" val="1"/>
             </a:ext>
           </a:extLst>
         </p:spPr>
@@ -19840,7 +19843,7 @@
           </a:ln>
           <a:extLst>
             <a:ext uri="{C572A759-6A51-4108-AA02-DFA0A04FC94B}">
-              <ma14:wrappingTextBoxFlag xmlns="" xmlns:m="http://schemas.openxmlformats.org/officeDocument/2006/math" xmlns:a14="http://schemas.microsoft.com/office/drawing/2010/main" xmlns:ma14="http://schemas.microsoft.com/office/mac/drawingml/2011/main" val="1"/>
+              <ma14:wrappingTextBoxFlag xmlns:ma14="http://schemas.microsoft.com/office/mac/drawingml/2011/main" xmlns:a14="http://schemas.microsoft.com/office/drawing/2010/main" xmlns:m="http://schemas.openxmlformats.org/officeDocument/2006/math" xmlns="" val="1"/>
             </a:ext>
           </a:extLst>
         </p:spPr>
@@ -19892,7 +19895,7 @@
           </a:ln>
           <a:extLst>
             <a:ext uri="{C572A759-6A51-4108-AA02-DFA0A04FC94B}">
-              <ma14:wrappingTextBoxFlag xmlns="" xmlns:m="http://schemas.openxmlformats.org/officeDocument/2006/math" xmlns:a14="http://schemas.microsoft.com/office/drawing/2010/main" xmlns:ma14="http://schemas.microsoft.com/office/mac/drawingml/2011/main" val="1"/>
+              <ma14:wrappingTextBoxFlag xmlns:ma14="http://schemas.microsoft.com/office/mac/drawingml/2011/main" xmlns:a14="http://schemas.microsoft.com/office/drawing/2010/main" xmlns:m="http://schemas.openxmlformats.org/officeDocument/2006/math" xmlns="" val="1"/>
             </a:ext>
           </a:extLst>
         </p:spPr>
@@ -19944,7 +19947,7 @@
           </a:ln>
           <a:extLst>
             <a:ext uri="{C572A759-6A51-4108-AA02-DFA0A04FC94B}">
-              <ma14:wrappingTextBoxFlag xmlns="" xmlns:m="http://schemas.openxmlformats.org/officeDocument/2006/math" xmlns:a14="http://schemas.microsoft.com/office/drawing/2010/main" xmlns:ma14="http://schemas.microsoft.com/office/mac/drawingml/2011/main" val="1"/>
+              <ma14:wrappingTextBoxFlag xmlns:ma14="http://schemas.microsoft.com/office/mac/drawingml/2011/main" xmlns:a14="http://schemas.microsoft.com/office/drawing/2010/main" xmlns:m="http://schemas.openxmlformats.org/officeDocument/2006/math" xmlns="" val="1"/>
             </a:ext>
           </a:extLst>
         </p:spPr>
@@ -19996,7 +19999,7 @@
           </a:ln>
           <a:extLst>
             <a:ext uri="{C572A759-6A51-4108-AA02-DFA0A04FC94B}">
-              <ma14:wrappingTextBoxFlag xmlns="" xmlns:m="http://schemas.openxmlformats.org/officeDocument/2006/math" xmlns:a14="http://schemas.microsoft.com/office/drawing/2010/main" xmlns:ma14="http://schemas.microsoft.com/office/mac/drawingml/2011/main" val="1"/>
+              <ma14:wrappingTextBoxFlag xmlns:ma14="http://schemas.microsoft.com/office/mac/drawingml/2011/main" xmlns:a14="http://schemas.microsoft.com/office/drawing/2010/main" xmlns:m="http://schemas.openxmlformats.org/officeDocument/2006/math" xmlns="" val="1"/>
             </a:ext>
           </a:extLst>
         </p:spPr>
@@ -20048,7 +20051,7 @@
           </a:ln>
           <a:extLst>
             <a:ext uri="{C572A759-6A51-4108-AA02-DFA0A04FC94B}">
-              <ma14:wrappingTextBoxFlag xmlns="" xmlns:m="http://schemas.openxmlformats.org/officeDocument/2006/math" xmlns:a14="http://schemas.microsoft.com/office/drawing/2010/main" xmlns:ma14="http://schemas.microsoft.com/office/mac/drawingml/2011/main" val="1"/>
+              <ma14:wrappingTextBoxFlag xmlns:ma14="http://schemas.microsoft.com/office/mac/drawingml/2011/main" xmlns:a14="http://schemas.microsoft.com/office/drawing/2010/main" xmlns:m="http://schemas.openxmlformats.org/officeDocument/2006/math" xmlns="" val="1"/>
             </a:ext>
           </a:extLst>
         </p:spPr>
@@ -20100,7 +20103,7 @@
           </a:ln>
           <a:extLst>
             <a:ext uri="{C572A759-6A51-4108-AA02-DFA0A04FC94B}">
-              <ma14:wrappingTextBoxFlag xmlns="" xmlns:m="http://schemas.openxmlformats.org/officeDocument/2006/math" xmlns:a14="http://schemas.microsoft.com/office/drawing/2010/main" xmlns:ma14="http://schemas.microsoft.com/office/mac/drawingml/2011/main" val="1"/>
+              <ma14:wrappingTextBoxFlag xmlns:ma14="http://schemas.microsoft.com/office/mac/drawingml/2011/main" xmlns:a14="http://schemas.microsoft.com/office/drawing/2010/main" xmlns:m="http://schemas.openxmlformats.org/officeDocument/2006/math" xmlns="" val="1"/>
             </a:ext>
           </a:extLst>
         </p:spPr>
@@ -20152,7 +20155,7 @@
           </a:ln>
           <a:extLst>
             <a:ext uri="{C572A759-6A51-4108-AA02-DFA0A04FC94B}">
-              <ma14:wrappingTextBoxFlag xmlns="" xmlns:m="http://schemas.openxmlformats.org/officeDocument/2006/math" xmlns:a14="http://schemas.microsoft.com/office/drawing/2010/main" xmlns:ma14="http://schemas.microsoft.com/office/mac/drawingml/2011/main" val="1"/>
+              <ma14:wrappingTextBoxFlag xmlns:ma14="http://schemas.microsoft.com/office/mac/drawingml/2011/main" xmlns:a14="http://schemas.microsoft.com/office/drawing/2010/main" xmlns:m="http://schemas.openxmlformats.org/officeDocument/2006/math" xmlns="" val="1"/>
             </a:ext>
           </a:extLst>
         </p:spPr>
@@ -20204,7 +20207,7 @@
           </a:ln>
           <a:extLst>
             <a:ext uri="{C572A759-6A51-4108-AA02-DFA0A04FC94B}">
-              <ma14:wrappingTextBoxFlag xmlns="" xmlns:m="http://schemas.openxmlformats.org/officeDocument/2006/math" xmlns:a14="http://schemas.microsoft.com/office/drawing/2010/main" xmlns:ma14="http://schemas.microsoft.com/office/mac/drawingml/2011/main" val="1"/>
+              <ma14:wrappingTextBoxFlag xmlns:ma14="http://schemas.microsoft.com/office/mac/drawingml/2011/main" xmlns:a14="http://schemas.microsoft.com/office/drawing/2010/main" xmlns:m="http://schemas.openxmlformats.org/officeDocument/2006/math" xmlns="" val="1"/>
             </a:ext>
           </a:extLst>
         </p:spPr>
@@ -20256,7 +20259,7 @@
           </a:ln>
           <a:extLst>
             <a:ext uri="{C572A759-6A51-4108-AA02-DFA0A04FC94B}">
-              <ma14:wrappingTextBoxFlag xmlns="" xmlns:m="http://schemas.openxmlformats.org/officeDocument/2006/math" xmlns:a14="http://schemas.microsoft.com/office/drawing/2010/main" xmlns:ma14="http://schemas.microsoft.com/office/mac/drawingml/2011/main" val="1"/>
+              <ma14:wrappingTextBoxFlag xmlns:ma14="http://schemas.microsoft.com/office/mac/drawingml/2011/main" xmlns:a14="http://schemas.microsoft.com/office/drawing/2010/main" xmlns:m="http://schemas.openxmlformats.org/officeDocument/2006/math" xmlns="" val="1"/>
             </a:ext>
           </a:extLst>
         </p:spPr>
@@ -20308,7 +20311,7 @@
           </a:ln>
           <a:extLst>
             <a:ext uri="{C572A759-6A51-4108-AA02-DFA0A04FC94B}">
-              <ma14:wrappingTextBoxFlag xmlns="" xmlns:m="http://schemas.openxmlformats.org/officeDocument/2006/math" xmlns:a14="http://schemas.microsoft.com/office/drawing/2010/main" xmlns:ma14="http://schemas.microsoft.com/office/mac/drawingml/2011/main" val="1"/>
+              <ma14:wrappingTextBoxFlag xmlns:ma14="http://schemas.microsoft.com/office/mac/drawingml/2011/main" xmlns:a14="http://schemas.microsoft.com/office/drawing/2010/main" xmlns:m="http://schemas.openxmlformats.org/officeDocument/2006/math" xmlns="" val="1"/>
             </a:ext>
           </a:extLst>
         </p:spPr>
@@ -20360,7 +20363,7 @@
           </a:ln>
           <a:extLst>
             <a:ext uri="{C572A759-6A51-4108-AA02-DFA0A04FC94B}">
-              <ma14:wrappingTextBoxFlag xmlns="" xmlns:m="http://schemas.openxmlformats.org/officeDocument/2006/math" xmlns:a14="http://schemas.microsoft.com/office/drawing/2010/main" xmlns:ma14="http://schemas.microsoft.com/office/mac/drawingml/2011/main" val="1"/>
+              <ma14:wrappingTextBoxFlag xmlns:ma14="http://schemas.microsoft.com/office/mac/drawingml/2011/main" xmlns:a14="http://schemas.microsoft.com/office/drawing/2010/main" xmlns:m="http://schemas.openxmlformats.org/officeDocument/2006/math" xmlns="" val="1"/>
             </a:ext>
           </a:extLst>
         </p:spPr>
@@ -20446,7 +20449,7 @@
           </a:ln>
           <a:extLst>
             <a:ext uri="{C572A759-6A51-4108-AA02-DFA0A04FC94B}">
-              <ma14:wrappingTextBoxFlag xmlns="" xmlns:m="http://schemas.openxmlformats.org/officeDocument/2006/math" xmlns:a14="http://schemas.microsoft.com/office/drawing/2010/main" xmlns:ma14="http://schemas.microsoft.com/office/mac/drawingml/2011/main" val="1"/>
+              <ma14:wrappingTextBoxFlag xmlns:ma14="http://schemas.microsoft.com/office/mac/drawingml/2011/main" xmlns:a14="http://schemas.microsoft.com/office/drawing/2010/main" xmlns:m="http://schemas.openxmlformats.org/officeDocument/2006/math" xmlns="" val="1"/>
             </a:ext>
           </a:extLst>
         </p:spPr>
@@ -20533,7 +20536,7 @@
           </a:ln>
           <a:extLst>
             <a:ext uri="{C572A759-6A51-4108-AA02-DFA0A04FC94B}">
-              <ma14:wrappingTextBoxFlag xmlns="" xmlns:m="http://schemas.openxmlformats.org/officeDocument/2006/math" xmlns:a14="http://schemas.microsoft.com/office/drawing/2010/main" xmlns:ma14="http://schemas.microsoft.com/office/mac/drawingml/2011/main" val="1"/>
+              <ma14:wrappingTextBoxFlag xmlns:ma14="http://schemas.microsoft.com/office/mac/drawingml/2011/main" xmlns:a14="http://schemas.microsoft.com/office/drawing/2010/main" xmlns:m="http://schemas.openxmlformats.org/officeDocument/2006/math" xmlns="" val="1"/>
             </a:ext>
           </a:extLst>
         </p:spPr>
@@ -20620,7 +20623,7 @@
           </a:ln>
           <a:extLst>
             <a:ext uri="{C572A759-6A51-4108-AA02-DFA0A04FC94B}">
-              <ma14:wrappingTextBoxFlag xmlns="" xmlns:m="http://schemas.openxmlformats.org/officeDocument/2006/math" xmlns:a14="http://schemas.microsoft.com/office/drawing/2010/main" xmlns:ma14="http://schemas.microsoft.com/office/mac/drawingml/2011/main" val="1"/>
+              <ma14:wrappingTextBoxFlag xmlns:ma14="http://schemas.microsoft.com/office/mac/drawingml/2011/main" xmlns:a14="http://schemas.microsoft.com/office/drawing/2010/main" xmlns:m="http://schemas.openxmlformats.org/officeDocument/2006/math" xmlns="" val="1"/>
             </a:ext>
           </a:extLst>
         </p:spPr>
@@ -21698,7 +21701,7 @@
           </a:ln>
           <a:extLst>
             <a:ext uri="{C572A759-6A51-4108-AA02-DFA0A04FC94B}">
-              <ma14:wrappingTextBoxFlag xmlns="" xmlns:m="http://schemas.openxmlformats.org/officeDocument/2006/math" xmlns:a14="http://schemas.microsoft.com/office/drawing/2010/main" xmlns:ma14="http://schemas.microsoft.com/office/mac/drawingml/2011/main" val="1"/>
+              <ma14:wrappingTextBoxFlag xmlns:ma14="http://schemas.microsoft.com/office/mac/drawingml/2011/main" xmlns:a14="http://schemas.microsoft.com/office/drawing/2010/main" xmlns:m="http://schemas.openxmlformats.org/officeDocument/2006/math" xmlns="" val="1"/>
             </a:ext>
           </a:extLst>
         </p:spPr>
@@ -22459,7 +22462,7 @@
           </a:ln>
           <a:extLst>
             <a:ext uri="{C572A759-6A51-4108-AA02-DFA0A04FC94B}">
-              <ma14:wrappingTextBoxFlag xmlns="" xmlns:m="http://schemas.openxmlformats.org/officeDocument/2006/math" xmlns:a14="http://schemas.microsoft.com/office/drawing/2010/main" xmlns:ma14="http://schemas.microsoft.com/office/mac/drawingml/2011/main" val="1"/>
+              <ma14:wrappingTextBoxFlag xmlns:ma14="http://schemas.microsoft.com/office/mac/drawingml/2011/main" xmlns:a14="http://schemas.microsoft.com/office/drawing/2010/main" xmlns:m="http://schemas.openxmlformats.org/officeDocument/2006/math" xmlns="" val="1"/>
             </a:ext>
           </a:extLst>
         </p:spPr>
@@ -23272,7 +23275,7 @@
           </a:ln>
           <a:extLst>
             <a:ext uri="{C572A759-6A51-4108-AA02-DFA0A04FC94B}">
-              <ma14:wrappingTextBoxFlag xmlns="" xmlns:m="http://schemas.openxmlformats.org/officeDocument/2006/math" xmlns:a14="http://schemas.microsoft.com/office/drawing/2010/main" xmlns:ma14="http://schemas.microsoft.com/office/mac/drawingml/2011/main" val="1"/>
+              <ma14:wrappingTextBoxFlag xmlns:ma14="http://schemas.microsoft.com/office/mac/drawingml/2011/main" xmlns:a14="http://schemas.microsoft.com/office/drawing/2010/main" xmlns:m="http://schemas.openxmlformats.org/officeDocument/2006/math" xmlns="" val="1"/>
             </a:ext>
           </a:extLst>
         </p:spPr>
@@ -24087,7 +24090,7 @@
           </a:ln>
           <a:extLst>
             <a:ext uri="{C572A759-6A51-4108-AA02-DFA0A04FC94B}">
-              <ma14:wrappingTextBoxFlag xmlns="" xmlns:m="http://schemas.openxmlformats.org/officeDocument/2006/math" xmlns:a14="http://schemas.microsoft.com/office/drawing/2010/main" xmlns:ma14="http://schemas.microsoft.com/office/mac/drawingml/2011/main" val="1"/>
+              <ma14:wrappingTextBoxFlag xmlns:ma14="http://schemas.microsoft.com/office/mac/drawingml/2011/main" xmlns:a14="http://schemas.microsoft.com/office/drawing/2010/main" xmlns:m="http://schemas.openxmlformats.org/officeDocument/2006/math" xmlns="" val="1"/>
             </a:ext>
           </a:extLst>
         </p:spPr>
@@ -24139,7 +24142,7 @@
           </a:ln>
           <a:extLst>
             <a:ext uri="{C572A759-6A51-4108-AA02-DFA0A04FC94B}">
-              <ma14:wrappingTextBoxFlag xmlns="" xmlns:m="http://schemas.openxmlformats.org/officeDocument/2006/math" xmlns:a14="http://schemas.microsoft.com/office/drawing/2010/main" xmlns:ma14="http://schemas.microsoft.com/office/mac/drawingml/2011/main" val="1"/>
+              <ma14:wrappingTextBoxFlag xmlns:ma14="http://schemas.microsoft.com/office/mac/drawingml/2011/main" xmlns:a14="http://schemas.microsoft.com/office/drawing/2010/main" xmlns:m="http://schemas.openxmlformats.org/officeDocument/2006/math" xmlns="" val="1"/>
             </a:ext>
           </a:extLst>
         </p:spPr>
@@ -24205,7 +24208,7 @@
           </a:ln>
           <a:extLst>
             <a:ext uri="{C572A759-6A51-4108-AA02-DFA0A04FC94B}">
-              <ma14:wrappingTextBoxFlag xmlns="" xmlns:m="http://schemas.openxmlformats.org/officeDocument/2006/math" xmlns:a14="http://schemas.microsoft.com/office/drawing/2010/main" xmlns:ma14="http://schemas.microsoft.com/office/mac/drawingml/2011/main" val="1"/>
+              <ma14:wrappingTextBoxFlag xmlns:ma14="http://schemas.microsoft.com/office/mac/drawingml/2011/main" xmlns:a14="http://schemas.microsoft.com/office/drawing/2010/main" xmlns:m="http://schemas.openxmlformats.org/officeDocument/2006/math" xmlns="" val="1"/>
             </a:ext>
           </a:extLst>
         </p:spPr>
@@ -24257,7 +24260,7 @@
           </a:ln>
           <a:extLst>
             <a:ext uri="{C572A759-6A51-4108-AA02-DFA0A04FC94B}">
-              <ma14:wrappingTextBoxFlag xmlns="" xmlns:m="http://schemas.openxmlformats.org/officeDocument/2006/math" xmlns:a14="http://schemas.microsoft.com/office/drawing/2010/main" xmlns:ma14="http://schemas.microsoft.com/office/mac/drawingml/2011/main" val="1"/>
+              <ma14:wrappingTextBoxFlag xmlns:ma14="http://schemas.microsoft.com/office/mac/drawingml/2011/main" xmlns:a14="http://schemas.microsoft.com/office/drawing/2010/main" xmlns:m="http://schemas.openxmlformats.org/officeDocument/2006/math" xmlns="" val="1"/>
             </a:ext>
           </a:extLst>
         </p:spPr>
@@ -24454,7 +24457,7 @@
           </a:ln>
           <a:extLst>
             <a:ext uri="{C572A759-6A51-4108-AA02-DFA0A04FC94B}">
-              <ma14:wrappingTextBoxFlag xmlns="" xmlns:m="http://schemas.openxmlformats.org/officeDocument/2006/math" xmlns:a14="http://schemas.microsoft.com/office/drawing/2010/main" xmlns:ma14="http://schemas.microsoft.com/office/mac/drawingml/2011/main" val="1"/>
+              <ma14:wrappingTextBoxFlag xmlns:ma14="http://schemas.microsoft.com/office/mac/drawingml/2011/main" xmlns:a14="http://schemas.microsoft.com/office/drawing/2010/main" xmlns:m="http://schemas.openxmlformats.org/officeDocument/2006/math" xmlns="" val="1"/>
             </a:ext>
           </a:extLst>
         </p:spPr>
